--- a/media/exports/reports/2026-08/board.pptx
+++ b/media/exports/reports/2026-08/board.pptx
@@ -3131,11 +3131,17 @@
           <a:bodyPr rtlCol="0" anchor="ctr"/>
           <a:lstStyle/>
           <a:p>
+            <a:pPr>
+              <a:defRPr>
+                <a:latin typeface="Roboto"/>
+              </a:defRPr>
+            </a:pPr>
             <a:r>
               <a:rPr sz="1600" b="1">
                 <a:solidFill>
                   <a:srgbClr val="FFFFFF"/>
                 </a:solidFill>
+                <a:latin typeface="Roboto"/>
               </a:rPr>
               <a:t>4th</a:t>
             </a:r>
@@ -3164,14 +3170,19 @@
           </a:bodyPr>
           <a:lstStyle/>
           <a:p>
+            <a:pPr>
+              <a:defRPr>
+                <a:latin typeface="Roboto"/>
+              </a:defRPr>
+            </a:pPr>
             <a:r>
               <a:rPr sz="1800" b="1">
                 <a:solidFill>
                   <a:srgbClr val="25342A"/>
                 </a:solidFill>
-                <a:latin typeface="Arial"/>
+                <a:latin typeface="Roboto"/>
               </a:rPr>
-              <a:t>The 4th Sheet</a:t>
+              <a:t>The Fourth Sheet</a:t>
             </a:r>
           </a:p>
         </p:txBody>
@@ -3198,12 +3209,17 @@
           </a:bodyPr>
           <a:lstStyle/>
           <a:p>
+            <a:pPr>
+              <a:defRPr>
+                <a:latin typeface="Roboto"/>
+              </a:defRPr>
+            </a:pPr>
             <a:r>
               <a:rPr sz="1100" b="1">
                 <a:solidFill>
                   <a:srgbClr val="8A7A52"/>
                 </a:solidFill>
-                <a:latin typeface="Arial"/>
+                <a:latin typeface="Roboto"/>
               </a:rPr>
               <a:t>SAMPLE DATA · invented figures for demonstration</a:t>
             </a:r>
@@ -3232,12 +3248,17 @@
           </a:bodyPr>
           <a:lstStyle/>
           <a:p>
+            <a:pPr>
+              <a:defRPr>
+                <a:latin typeface="Roboto"/>
+              </a:defRPr>
+            </a:pPr>
             <a:r>
               <a:rPr sz="3400" b="1">
                 <a:solidFill>
                   <a:srgbClr val="25342A"/>
                 </a:solidFill>
-                <a:latin typeface="Arial"/>
+                <a:latin typeface="Roboto"/>
               </a:rPr>
               <a:t>What does the board need to see?</a:t>
             </a:r>
@@ -3266,12 +3287,17 @@
           </a:bodyPr>
           <a:lstStyle/>
           <a:p>
+            <a:pPr>
+              <a:defRPr>
+                <a:latin typeface="Roboto"/>
+              </a:defRPr>
+            </a:pPr>
             <a:r>
               <a:rPr sz="1600" b="0">
                 <a:solidFill>
                   <a:srgbClr val="5F6F63"/>
                 </a:solidFill>
-                <a:latin typeface="Arial"/>
+                <a:latin typeface="Roboto"/>
               </a:rPr>
               <a:t>Sample Community Services Ltd</a:t>
             </a:r>
@@ -3300,12 +3326,17 @@
           </a:bodyPr>
           <a:lstStyle/>
           <a:p>
+            <a:pPr>
+              <a:defRPr>
+                <a:latin typeface="Roboto"/>
+              </a:defRPr>
+            </a:pPr>
             <a:r>
               <a:rPr sz="1400" b="0">
                 <a:solidFill>
                   <a:srgbClr val="25342A"/>
                 </a:solidFill>
-                <a:latin typeface="Arial"/>
+                <a:latin typeface="Roboto"/>
               </a:rPr>
               <a:t>Period: August 2026. A one-page board summary for August 2026: the result, the money, the risks, and the decisions to make. The full statements are in the downloads.</a:t>
             </a:r>
@@ -3334,45 +3365,65 @@
           </a:bodyPr>
           <a:lstStyle/>
           <a:p>
+            <a:pPr>
+              <a:defRPr>
+                <a:latin typeface="Roboto"/>
+              </a:defRPr>
+            </a:pPr>
             <a:r>
               <a:rPr sz="1100" b="0">
                 <a:solidFill>
                   <a:srgbClr val="5F6F63"/>
                 </a:solidFill>
-                <a:latin typeface="Arial"/>
+                <a:latin typeface="Roboto"/>
               </a:rPr>
               <a:t>How final is this data?</a:t>
             </a:r>
           </a:p>
           <a:p>
+            <a:pPr>
+              <a:defRPr>
+                <a:latin typeface="Roboto"/>
+              </a:defRPr>
+            </a:pPr>
             <a:r>
               <a:rPr sz="1100" b="0">
                 <a:solidFill>
                   <a:srgbClr val="5F6F63"/>
                 </a:solidFill>
-                <a:latin typeface="Arial"/>
+                <a:latin typeface="Roboto"/>
               </a:rPr>
               <a:t>July 2026: Locked. July 2026 is locked (closed 4 Aug 2026). These numbers won't change.</a:t>
             </a:r>
           </a:p>
           <a:p>
+            <a:pPr>
+              <a:defRPr>
+                <a:latin typeface="Roboto"/>
+              </a:defRPr>
+            </a:pPr>
             <a:r>
               <a:rPr sz="1100" b="0">
                 <a:solidFill>
                   <a:srgbClr val="5F6F63"/>
                 </a:solidFill>
-                <a:latin typeface="Arial"/>
+                <a:latin typeface="Roboto"/>
               </a:rPr>
               <a:t>August 2026: Locked. August 2026 is locked (closed 2 Sep 2026). These numbers won't change.</a:t>
             </a:r>
           </a:p>
           <a:p>
+            <a:pPr>
+              <a:defRPr>
+                <a:latin typeface="Roboto"/>
+              </a:defRPr>
+            </a:pPr>
             <a:r>
               <a:rPr sz="1100" b="0">
                 <a:solidFill>
                   <a:srgbClr val="5F6F63"/>
                 </a:solidFill>
-                <a:latin typeface="Arial"/>
+                <a:latin typeface="Roboto"/>
               </a:rPr>
               <a:t>October 2026: Incomplete. October 2026 is still in progress: figures to 6 Oct only.</a:t>
             </a:r>
@@ -3401,12 +3452,17 @@
           </a:bodyPr>
           <a:lstStyle/>
           <a:p>
+            <a:pPr>
+              <a:defRPr>
+                <a:latin typeface="Roboto"/>
+              </a:defRPr>
+            </a:pPr>
             <a:r>
               <a:rPr sz="900" b="0">
                 <a:solidFill>
                   <a:srgbClr val="5F6F63"/>
                 </a:solidFill>
-                <a:latin typeface="Arial"/>
+                <a:latin typeface="Roboto"/>
               </a:rPr>
               <a:t>board.pptx</a:t>
             </a:r>
@@ -3435,13 +3491,17 @@
           </a:bodyPr>
           <a:lstStyle/>
           <a:p>
-            <a:pPr algn="ctr"/>
+            <a:pPr algn="ctr">
+              <a:defRPr>
+                <a:latin typeface="Roboto"/>
+              </a:defRPr>
+            </a:pPr>
             <a:r>
               <a:rPr sz="900" b="0">
                 <a:solidFill>
                   <a:srgbClr val="5F6F63"/>
                 </a:solidFill>
-                <a:latin typeface="Arial"/>
+                <a:latin typeface="Roboto"/>
               </a:rPr>
               <a:t>Data retrieved 2pm, Tue 6 Oct 2026 · Sample data</a:t>
             </a:r>
@@ -3470,13 +3530,17 @@
           </a:bodyPr>
           <a:lstStyle/>
           <a:p>
-            <a:pPr algn="r"/>
+            <a:pPr algn="r">
+              <a:defRPr>
+                <a:latin typeface="Roboto"/>
+              </a:defRPr>
+            </a:pPr>
             <a:r>
               <a:rPr sz="900" b="0">
                 <a:solidFill>
                   <a:srgbClr val="5F6F63"/>
                 </a:solidFill>
-                <a:latin typeface="Arial"/>
+                <a:latin typeface="Roboto"/>
               </a:rPr>
               <a:t>Slide 1 of 5</a:t>
             </a:r>
@@ -3540,7 +3604,11 @@
           <a:bodyPr rtlCol="0" anchor="ctr"/>
           <a:lstStyle/>
           <a:p>
-            <a:pPr algn="ctr"/>
+            <a:pPr algn="ctr">
+              <a:defRPr>
+                <a:latin typeface="Roboto"/>
+              </a:defRPr>
+            </a:pPr>
           </a:p>
         </p:txBody>
       </p:sp>
@@ -3566,12 +3634,17 @@
           </a:bodyPr>
           <a:lstStyle/>
           <a:p>
+            <a:pPr>
+              <a:defRPr>
+                <a:latin typeface="Roboto"/>
+              </a:defRPr>
+            </a:pPr>
             <a:r>
               <a:rPr sz="1000" b="0">
                 <a:solidFill>
                   <a:srgbClr val="5F6F63"/>
                 </a:solidFill>
-                <a:latin typeface="Arial"/>
+                <a:latin typeface="Roboto"/>
               </a:rPr>
               <a:t>Sample Community Services Ltd · What does the board need to see?</a:t>
             </a:r>
@@ -3600,12 +3673,17 @@
           </a:bodyPr>
           <a:lstStyle/>
           <a:p>
+            <a:pPr>
+              <a:defRPr>
+                <a:latin typeface="Roboto"/>
+              </a:defRPr>
+            </a:pPr>
             <a:r>
               <a:rPr sz="2400" b="1">
                 <a:solidFill>
                   <a:srgbClr val="25342A"/>
                 </a:solidFill>
-                <a:latin typeface="Arial"/>
+                <a:latin typeface="Roboto"/>
               </a:rPr>
               <a:t>Headline numbers</a:t>
             </a:r>
@@ -3653,7 +3731,11 @@
           <a:bodyPr rtlCol="0" anchor="ctr"/>
           <a:lstStyle/>
           <a:p>
-            <a:pPr algn="ctr"/>
+            <a:pPr algn="ctr">
+              <a:defRPr>
+                <a:latin typeface="Roboto"/>
+              </a:defRPr>
+            </a:pPr>
           </a:p>
         </p:txBody>
       </p:sp>
@@ -3679,12 +3761,17 @@
           </a:bodyPr>
           <a:lstStyle/>
           <a:p>
+            <a:pPr>
+              <a:defRPr>
+                <a:latin typeface="Roboto"/>
+              </a:defRPr>
+            </a:pPr>
             <a:r>
               <a:rPr sz="1200" b="0">
                 <a:solidFill>
                   <a:srgbClr val="5F6F63"/>
                 </a:solidFill>
-                <a:latin typeface="Arial"/>
+                <a:latin typeface="Roboto"/>
               </a:rPr>
               <a:t>Surplus, August</a:t>
             </a:r>
@@ -3713,12 +3800,17 @@
           </a:bodyPr>
           <a:lstStyle/>
           <a:p>
+            <a:pPr>
+              <a:defRPr>
+                <a:latin typeface="Roboto"/>
+              </a:defRPr>
+            </a:pPr>
             <a:r>
               <a:rPr sz="3000" b="1">
                 <a:solidFill>
                   <a:srgbClr val="B42318"/>
                 </a:solidFill>
-                <a:latin typeface="Arial"/>
+                <a:latin typeface="Roboto"/>
               </a:rPr>
               <a:t>($23,750)</a:t>
             </a:r>
@@ -3747,12 +3839,17 @@
           </a:bodyPr>
           <a:lstStyle/>
           <a:p>
+            <a:pPr>
+              <a:defRPr>
+                <a:latin typeface="Roboto"/>
+              </a:defRPr>
+            </a:pPr>
             <a:r>
               <a:rPr sz="1100" b="0">
                 <a:solidFill>
                   <a:srgbClr val="5F6F63"/>
                 </a:solidFill>
-                <a:latin typeface="Arial"/>
+                <a:latin typeface="Roboto"/>
               </a:rPr>
               <a:t>July ($25,420)</a:t>
             </a:r>
@@ -3800,7 +3897,11 @@
           <a:bodyPr rtlCol="0" anchor="ctr"/>
           <a:lstStyle/>
           <a:p>
-            <a:pPr algn="ctr"/>
+            <a:pPr algn="ctr">
+              <a:defRPr>
+                <a:latin typeface="Roboto"/>
+              </a:defRPr>
+            </a:pPr>
           </a:p>
         </p:txBody>
       </p:sp>
@@ -3826,12 +3927,17 @@
           </a:bodyPr>
           <a:lstStyle/>
           <a:p>
+            <a:pPr>
+              <a:defRPr>
+                <a:latin typeface="Roboto"/>
+              </a:defRPr>
+            </a:pPr>
             <a:r>
               <a:rPr sz="1200" b="0">
                 <a:solidFill>
                   <a:srgbClr val="5F6F63"/>
                 </a:solidFill>
-                <a:latin typeface="Arial"/>
+                <a:latin typeface="Roboto"/>
               </a:rPr>
               <a:t>Surplus (deficit), year to date</a:t>
             </a:r>
@@ -3860,12 +3966,17 @@
           </a:bodyPr>
           <a:lstStyle/>
           <a:p>
+            <a:pPr>
+              <a:defRPr>
+                <a:latin typeface="Roboto"/>
+              </a:defRPr>
+            </a:pPr>
             <a:r>
               <a:rPr sz="3000" b="1">
                 <a:solidFill>
                   <a:srgbClr val="B42318"/>
                 </a:solidFill>
-                <a:latin typeface="Arial"/>
+                <a:latin typeface="Roboto"/>
               </a:rPr>
               <a:t>($49,170)</a:t>
             </a:r>
@@ -3894,12 +4005,17 @@
           </a:bodyPr>
           <a:lstStyle/>
           <a:p>
+            <a:pPr>
+              <a:defRPr>
+                <a:latin typeface="Roboto"/>
+              </a:defRPr>
+            </a:pPr>
             <a:r>
               <a:rPr sz="1100" b="0">
                 <a:solidFill>
                   <a:srgbClr val="5F6F63"/>
                 </a:solidFill>
-                <a:latin typeface="Arial"/>
+                <a:latin typeface="Roboto"/>
               </a:rPr>
               <a:t>Jul to Aug 2026</a:t>
             </a:r>
@@ -3947,7 +4063,11 @@
           <a:bodyPr rtlCol="0" anchor="ctr"/>
           <a:lstStyle/>
           <a:p>
-            <a:pPr algn="ctr"/>
+            <a:pPr algn="ctr">
+              <a:defRPr>
+                <a:latin typeface="Roboto"/>
+              </a:defRPr>
+            </a:pPr>
           </a:p>
         </p:txBody>
       </p:sp>
@@ -3973,12 +4093,17 @@
           </a:bodyPr>
           <a:lstStyle/>
           <a:p>
+            <a:pPr>
+              <a:defRPr>
+                <a:latin typeface="Roboto"/>
+              </a:defRPr>
+            </a:pPr>
             <a:r>
               <a:rPr sz="1200" b="0">
                 <a:solidFill>
                   <a:srgbClr val="5F6F63"/>
                 </a:solidFill>
-                <a:latin typeface="Arial"/>
+                <a:latin typeface="Roboto"/>
               </a:rPr>
               <a:t>Unrestricted cash runway</a:t>
             </a:r>
@@ -4007,12 +4132,17 @@
           </a:bodyPr>
           <a:lstStyle/>
           <a:p>
+            <a:pPr>
+              <a:defRPr>
+                <a:latin typeface="Roboto"/>
+              </a:defRPr>
+            </a:pPr>
             <a:r>
               <a:rPr sz="3000" b="1">
                 <a:solidFill>
                   <a:srgbClr val="2F7A5D"/>
                 </a:solidFill>
-                <a:latin typeface="Arial"/>
+                <a:latin typeface="Roboto"/>
               </a:rPr>
               <a:t>2.2 months</a:t>
             </a:r>
@@ -4041,12 +4171,17 @@
           </a:bodyPr>
           <a:lstStyle/>
           <a:p>
+            <a:pPr>
+              <a:defRPr>
+                <a:latin typeface="Roboto"/>
+              </a:defRPr>
+            </a:pPr>
             <a:r>
               <a:rPr sz="1100" b="0">
                 <a:solidFill>
                   <a:srgbClr val="5F6F63"/>
                 </a:solidFill>
-                <a:latin typeface="Arial"/>
+                <a:latin typeface="Roboto"/>
               </a:rPr>
               <a:t>reserves target 3.0 months</a:t>
             </a:r>
@@ -4094,7 +4229,11 @@
           <a:bodyPr rtlCol="0" anchor="ctr"/>
           <a:lstStyle/>
           <a:p>
-            <a:pPr algn="ctr"/>
+            <a:pPr algn="ctr">
+              <a:defRPr>
+                <a:latin typeface="Roboto"/>
+              </a:defRPr>
+            </a:pPr>
           </a:p>
         </p:txBody>
       </p:sp>
@@ -4120,12 +4259,17 @@
           </a:bodyPr>
           <a:lstStyle/>
           <a:p>
+            <a:pPr>
+              <a:defRPr>
+                <a:latin typeface="Roboto"/>
+              </a:defRPr>
+            </a:pPr>
             <a:r>
               <a:rPr sz="1200" b="0">
                 <a:solidFill>
                   <a:srgbClr val="5F6F63"/>
                 </a:solidFill>
-                <a:latin typeface="Arial"/>
+                <a:latin typeface="Roboto"/>
               </a:rPr>
               <a:t>Cost to raise a dollar, August</a:t>
             </a:r>
@@ -4154,12 +4298,17 @@
           </a:bodyPr>
           <a:lstStyle/>
           <a:p>
+            <a:pPr>
+              <a:defRPr>
+                <a:latin typeface="Roboto"/>
+              </a:defRPr>
+            </a:pPr>
             <a:r>
               <a:rPr sz="3000" b="1">
                 <a:solidFill>
                   <a:srgbClr val="2F7A5D"/>
                 </a:solidFill>
-                <a:latin typeface="Arial"/>
+                <a:latin typeface="Roboto"/>
               </a:rPr>
               <a:t>13¢</a:t>
             </a:r>
@@ -4188,12 +4337,17 @@
           </a:bodyPr>
           <a:lstStyle/>
           <a:p>
+            <a:pPr>
+              <a:defRPr>
+                <a:latin typeface="Roboto"/>
+              </a:defRPr>
+            </a:pPr>
             <a:r>
               <a:rPr sz="1100" b="0">
                 <a:solidFill>
                   <a:srgbClr val="5F6F63"/>
                 </a:solidFill>
-                <a:latin typeface="Arial"/>
+                <a:latin typeface="Roboto"/>
               </a:rPr>
               <a:t>July 11¢</a:t>
             </a:r>
@@ -4222,12 +4376,17 @@
           </a:bodyPr>
           <a:lstStyle/>
           <a:p>
+            <a:pPr>
+              <a:defRPr>
+                <a:latin typeface="Roboto"/>
+              </a:defRPr>
+            </a:pPr>
             <a:r>
               <a:rPr sz="900" b="0">
                 <a:solidFill>
                   <a:srgbClr val="5F6F63"/>
                 </a:solidFill>
-                <a:latin typeface="Arial"/>
+                <a:latin typeface="Roboto"/>
               </a:rPr>
               <a:t>board.pptx</a:t>
             </a:r>
@@ -4256,13 +4415,17 @@
           </a:bodyPr>
           <a:lstStyle/>
           <a:p>
-            <a:pPr algn="ctr"/>
+            <a:pPr algn="ctr">
+              <a:defRPr>
+                <a:latin typeface="Roboto"/>
+              </a:defRPr>
+            </a:pPr>
             <a:r>
               <a:rPr sz="900" b="0">
                 <a:solidFill>
                   <a:srgbClr val="5F6F63"/>
                 </a:solidFill>
-                <a:latin typeface="Arial"/>
+                <a:latin typeface="Roboto"/>
               </a:rPr>
               <a:t>Data retrieved 2pm, Tue 6 Oct 2026 · Sample data</a:t>
             </a:r>
@@ -4291,13 +4454,17 @@
           </a:bodyPr>
           <a:lstStyle/>
           <a:p>
-            <a:pPr algn="r"/>
+            <a:pPr algn="r">
+              <a:defRPr>
+                <a:latin typeface="Roboto"/>
+              </a:defRPr>
+            </a:pPr>
             <a:r>
               <a:rPr sz="900" b="0">
                 <a:solidFill>
                   <a:srgbClr val="5F6F63"/>
                 </a:solidFill>
-                <a:latin typeface="Arial"/>
+                <a:latin typeface="Roboto"/>
               </a:rPr>
               <a:t>Slide 2 of 5</a:t>
             </a:r>
@@ -4361,7 +4528,11 @@
           <a:bodyPr rtlCol="0" anchor="ctr"/>
           <a:lstStyle/>
           <a:p>
-            <a:pPr algn="ctr"/>
+            <a:pPr algn="ctr">
+              <a:defRPr>
+                <a:latin typeface="Roboto"/>
+              </a:defRPr>
+            </a:pPr>
           </a:p>
         </p:txBody>
       </p:sp>
@@ -4387,12 +4558,17 @@
           </a:bodyPr>
           <a:lstStyle/>
           <a:p>
+            <a:pPr>
+              <a:defRPr>
+                <a:latin typeface="Roboto"/>
+              </a:defRPr>
+            </a:pPr>
             <a:r>
               <a:rPr sz="1000" b="0">
                 <a:solidFill>
                   <a:srgbClr val="5F6F63"/>
                 </a:solidFill>
-                <a:latin typeface="Arial"/>
+                <a:latin typeface="Roboto"/>
               </a:rPr>
               <a:t>Sample Community Services Ltd · What does the board need to see?</a:t>
             </a:r>
@@ -4421,12 +4597,17 @@
           </a:bodyPr>
           <a:lstStyle/>
           <a:p>
+            <a:pPr>
+              <a:defRPr>
+                <a:latin typeface="Roboto"/>
+              </a:defRPr>
+            </a:pPr>
             <a:r>
               <a:rPr sz="2400" b="1">
                 <a:solidFill>
                   <a:srgbClr val="25342A"/>
                 </a:solidFill>
-                <a:latin typeface="Arial"/>
+                <a:latin typeface="Roboto"/>
               </a:rPr>
               <a:t>What the board should note</a:t>
             </a:r>
@@ -4474,7 +4655,11 @@
           <a:bodyPr rtlCol="0" anchor="ctr"/>
           <a:lstStyle/>
           <a:p>
-            <a:pPr algn="ctr"/>
+            <a:pPr algn="ctr">
+              <a:defRPr>
+                <a:latin typeface="Roboto"/>
+              </a:defRPr>
+            </a:pPr>
           </a:p>
         </p:txBody>
       </p:sp>
@@ -4500,12 +4685,17 @@
           </a:bodyPr>
           <a:lstStyle/>
           <a:p>
+            <a:pPr>
+              <a:defRPr>
+                <a:latin typeface="Roboto"/>
+              </a:defRPr>
+            </a:pPr>
             <a:r>
               <a:rPr sz="1100" b="1">
                 <a:solidFill>
                   <a:srgbClr val="5F6F63"/>
                 </a:solidFill>
-                <a:latin typeface="Arial"/>
+                <a:latin typeface="Roboto"/>
               </a:rPr>
               <a:t>WHAT THE BOARD SHOULD NOTE</a:t>
             </a:r>
@@ -4534,34 +4724,49 @@
           </a:bodyPr>
           <a:lstStyle/>
           <a:p>
+            <a:pPr>
+              <a:defRPr>
+                <a:latin typeface="Roboto"/>
+              </a:defRPr>
+            </a:pPr>
             <a:r>
               <a:rPr sz="1600" b="0">
                 <a:solidFill>
                   <a:srgbClr val="25342A"/>
                 </a:solidFill>
-                <a:latin typeface="Arial"/>
+                <a:latin typeface="Roboto"/>
               </a:rPr>
               <a:t>• Unrestricted cash covers 2.2 months of spending, against a 3.0 months reserves target.</a:t>
             </a:r>
           </a:p>
           <a:p>
+            <a:pPr>
+              <a:defRPr>
+                <a:latin typeface="Roboto"/>
+              </a:defRPr>
+            </a:pPr>
             <a:r>
               <a:rPr sz="1600" b="0">
                 <a:solidFill>
                   <a:srgbClr val="25342A"/>
                 </a:solidFill>
-                <a:latin typeface="Arial"/>
+                <a:latin typeface="Roboto"/>
               </a:rPr>
               <a:t>• 1 grant(s) end within 6 months with $133,500 still to spend. Housing support: $133,500 left in 4 months ($33,375 a month needed, against $30,500 spent in August).</a:t>
             </a:r>
           </a:p>
           <a:p>
+            <a:pPr>
+              <a:defRPr>
+                <a:latin typeface="Roboto"/>
+              </a:defRPr>
+            </a:pPr>
             <a:r>
               <a:rPr sz="1600" b="0">
                 <a:solidFill>
                   <a:srgbClr val="25342A"/>
                 </a:solidFill>
-                <a:latin typeface="Arial"/>
+                <a:latin typeface="Roboto"/>
               </a:rPr>
               <a:t>• Fundraising cost 13¢ per dollar in August: grants the cheapest (10¢), donations the dearest (12¢).</a:t>
             </a:r>
@@ -4590,12 +4795,17 @@
           </a:bodyPr>
           <a:lstStyle/>
           <a:p>
+            <a:pPr>
+              <a:defRPr>
+                <a:latin typeface="Roboto"/>
+              </a:defRPr>
+            </a:pPr>
             <a:r>
               <a:rPr sz="900" b="0">
                 <a:solidFill>
                   <a:srgbClr val="5F6F63"/>
                 </a:solidFill>
-                <a:latin typeface="Arial"/>
+                <a:latin typeface="Roboto"/>
               </a:rPr>
               <a:t>board.pptx</a:t>
             </a:r>
@@ -4624,13 +4834,17 @@
           </a:bodyPr>
           <a:lstStyle/>
           <a:p>
-            <a:pPr algn="ctr"/>
+            <a:pPr algn="ctr">
+              <a:defRPr>
+                <a:latin typeface="Roboto"/>
+              </a:defRPr>
+            </a:pPr>
             <a:r>
               <a:rPr sz="900" b="0">
                 <a:solidFill>
                   <a:srgbClr val="5F6F63"/>
                 </a:solidFill>
-                <a:latin typeface="Arial"/>
+                <a:latin typeface="Roboto"/>
               </a:rPr>
               <a:t>Data retrieved 2pm, Tue 6 Oct 2026 · Sample data</a:t>
             </a:r>
@@ -4659,13 +4873,17 @@
           </a:bodyPr>
           <a:lstStyle/>
           <a:p>
-            <a:pPr algn="r"/>
+            <a:pPr algn="r">
+              <a:defRPr>
+                <a:latin typeface="Roboto"/>
+              </a:defRPr>
+            </a:pPr>
             <a:r>
               <a:rPr sz="900" b="0">
                 <a:solidFill>
                   <a:srgbClr val="5F6F63"/>
                 </a:solidFill>
-                <a:latin typeface="Arial"/>
+                <a:latin typeface="Roboto"/>
               </a:rPr>
               <a:t>Slide 3 of 5</a:t>
             </a:r>
@@ -4729,7 +4947,11 @@
           <a:bodyPr rtlCol="0" anchor="ctr"/>
           <a:lstStyle/>
           <a:p>
-            <a:pPr algn="ctr"/>
+            <a:pPr algn="ctr">
+              <a:defRPr>
+                <a:latin typeface="Roboto"/>
+              </a:defRPr>
+            </a:pPr>
           </a:p>
         </p:txBody>
       </p:sp>
@@ -4755,12 +4977,17 @@
           </a:bodyPr>
           <a:lstStyle/>
           <a:p>
+            <a:pPr>
+              <a:defRPr>
+                <a:latin typeface="Roboto"/>
+              </a:defRPr>
+            </a:pPr>
             <a:r>
               <a:rPr sz="1000" b="0">
                 <a:solidFill>
                   <a:srgbClr val="5F6F63"/>
                 </a:solidFill>
-                <a:latin typeface="Arial"/>
+                <a:latin typeface="Roboto"/>
               </a:rPr>
               <a:t>Sample Community Services Ltd · What does the board need to see?</a:t>
             </a:r>
@@ -4789,12 +5016,17 @@
           </a:bodyPr>
           <a:lstStyle/>
           <a:p>
+            <a:pPr>
+              <a:defRPr>
+                <a:latin typeface="Roboto"/>
+              </a:defRPr>
+            </a:pPr>
             <a:r>
               <a:rPr sz="2400" b="1">
                 <a:solidFill>
                   <a:srgbClr val="25342A"/>
                 </a:solidFill>
-                <a:latin typeface="Arial"/>
+                <a:latin typeface="Roboto"/>
               </a:rPr>
               <a:t>Grants</a:t>
             </a:r>
@@ -4833,11 +5065,17 @@
                     <a:bodyPr/>
                     <a:lstStyle/>
                     <a:p>
+                      <a:pPr>
+                        <a:defRPr>
+                          <a:latin typeface="Roboto"/>
+                        </a:defRPr>
+                      </a:pPr>
                       <a:r>
                         <a:rPr sz="1100" b="1">
                           <a:solidFill>
                             <a:srgbClr val="FFFFFF"/>
                           </a:solidFill>
+                          <a:latin typeface="Roboto"/>
                         </a:rPr>
                         <a:t>Program</a:t>
                       </a:r>
@@ -4854,12 +5092,17 @@
                     <a:bodyPr/>
                     <a:lstStyle/>
                     <a:p>
-                      <a:pPr algn="r"/>
+                      <a:pPr algn="r">
+                        <a:defRPr>
+                          <a:latin typeface="Roboto"/>
+                        </a:defRPr>
+                      </a:pPr>
                       <a:r>
                         <a:rPr sz="1100" b="1">
                           <a:solidFill>
                             <a:srgbClr val="FFFFFF"/>
                           </a:solidFill>
+                          <a:latin typeface="Roboto"/>
                         </a:rPr>
                         <a:t>Spent to date</a:t>
                       </a:r>
@@ -4876,12 +5119,17 @@
                     <a:bodyPr/>
                     <a:lstStyle/>
                     <a:p>
-                      <a:pPr algn="r"/>
+                      <a:pPr algn="r">
+                        <a:defRPr>
+                          <a:latin typeface="Roboto"/>
+                        </a:defRPr>
+                      </a:pPr>
                       <a:r>
                         <a:rPr sz="1100" b="1">
                           <a:solidFill>
                             <a:srgbClr val="FFFFFF"/>
                           </a:solidFill>
+                          <a:latin typeface="Roboto"/>
                         </a:rPr>
                         <a:t>Budget to date</a:t>
                       </a:r>
@@ -4898,12 +5146,17 @@
                     <a:bodyPr/>
                     <a:lstStyle/>
                     <a:p>
-                      <a:pPr algn="r"/>
+                      <a:pPr algn="r">
+                        <a:defRPr>
+                          <a:latin typeface="Roboto"/>
+                        </a:defRPr>
+                      </a:pPr>
                       <a:r>
                         <a:rPr sz="1100" b="1">
                           <a:solidFill>
                             <a:srgbClr val="FFFFFF"/>
                           </a:solidFill>
+                          <a:latin typeface="Roboto"/>
                         </a:rPr>
                         <a:t>Against budget</a:t>
                       </a:r>
@@ -4920,12 +5173,17 @@
                     <a:bodyPr/>
                     <a:lstStyle/>
                     <a:p>
-                      <a:pPr algn="r"/>
+                      <a:pPr algn="r">
+                        <a:defRPr>
+                          <a:latin typeface="Roboto"/>
+                        </a:defRPr>
+                      </a:pPr>
                       <a:r>
                         <a:rPr sz="1100" b="1">
                           <a:solidFill>
                             <a:srgbClr val="FFFFFF"/>
                           </a:solidFill>
+                          <a:latin typeface="Roboto"/>
                         </a:rPr>
                         <a:t>Still to spend</a:t>
                       </a:r>
@@ -4942,12 +5200,17 @@
                     <a:bodyPr/>
                     <a:lstStyle/>
                     <a:p>
-                      <a:pPr algn="r"/>
+                      <a:pPr algn="r">
+                        <a:defRPr>
+                          <a:latin typeface="Roboto"/>
+                        </a:defRPr>
+                      </a:pPr>
                       <a:r>
                         <a:rPr sz="1100" b="1">
                           <a:solidFill>
                             <a:srgbClr val="FFFFFF"/>
                           </a:solidFill>
+                          <a:latin typeface="Roboto"/>
                         </a:rPr>
                         <a:t>Months left</a:t>
                       </a:r>
@@ -4966,11 +5229,17 @@
                     <a:bodyPr/>
                     <a:lstStyle/>
                     <a:p>
+                      <a:pPr>
+                        <a:defRPr>
+                          <a:latin typeface="Roboto"/>
+                        </a:defRPr>
+                      </a:pPr>
                       <a:r>
                         <a:rPr sz="1050">
                           <a:solidFill>
                             <a:srgbClr val="25342A"/>
                           </a:solidFill>
+                          <a:latin typeface="Roboto"/>
                         </a:rPr>
                         <a:t>Housing support</a:t>
                       </a:r>
@@ -4987,12 +5256,17 @@
                     <a:bodyPr/>
                     <a:lstStyle/>
                     <a:p>
-                      <a:pPr algn="r"/>
+                      <a:pPr algn="r">
+                        <a:defRPr>
+                          <a:latin typeface="Roboto"/>
+                        </a:defRPr>
+                      </a:pPr>
                       <a:r>
                         <a:rPr sz="1050">
                           <a:solidFill>
                             <a:srgbClr val="25342A"/>
                           </a:solidFill>
+                          <a:latin typeface="Roboto"/>
                         </a:rPr>
                         <a:t>$226,500</a:t>
                       </a:r>
@@ -5009,12 +5283,17 @@
                     <a:bodyPr/>
                     <a:lstStyle/>
                     <a:p>
-                      <a:pPr algn="r"/>
+                      <a:pPr algn="r">
+                        <a:defRPr>
+                          <a:latin typeface="Roboto"/>
+                        </a:defRPr>
+                      </a:pPr>
                       <a:r>
                         <a:rPr sz="1050">
                           <a:solidFill>
                             <a:srgbClr val="25342A"/>
                           </a:solidFill>
+                          <a:latin typeface="Roboto"/>
                         </a:rPr>
                         <a:t>$240,000</a:t>
                       </a:r>
@@ -5031,12 +5310,17 @@
                     <a:bodyPr/>
                     <a:lstStyle/>
                     <a:p>
-                      <a:pPr algn="r"/>
+                      <a:pPr algn="r">
+                        <a:defRPr>
+                          <a:latin typeface="Roboto"/>
+                        </a:defRPr>
+                      </a:pPr>
                       <a:r>
                         <a:rPr sz="1050">
                           <a:solidFill>
                             <a:srgbClr val="25342A"/>
                           </a:solidFill>
+                          <a:latin typeface="Roboto"/>
                         </a:rPr>
                         <a:t>94.4%</a:t>
                       </a:r>
@@ -5053,12 +5337,17 @@
                     <a:bodyPr/>
                     <a:lstStyle/>
                     <a:p>
-                      <a:pPr algn="r"/>
+                      <a:pPr algn="r">
+                        <a:defRPr>
+                          <a:latin typeface="Roboto"/>
+                        </a:defRPr>
+                      </a:pPr>
                       <a:r>
                         <a:rPr sz="1050">
                           <a:solidFill>
                             <a:srgbClr val="25342A"/>
                           </a:solidFill>
+                          <a:latin typeface="Roboto"/>
                         </a:rPr>
                         <a:t>$133,500</a:t>
                       </a:r>
@@ -5075,12 +5364,17 @@
                     <a:bodyPr/>
                     <a:lstStyle/>
                     <a:p>
-                      <a:pPr algn="r"/>
+                      <a:pPr algn="r">
+                        <a:defRPr>
+                          <a:latin typeface="Roboto"/>
+                        </a:defRPr>
+                      </a:pPr>
                       <a:r>
                         <a:rPr sz="1050">
                           <a:solidFill>
                             <a:srgbClr val="25342A"/>
                           </a:solidFill>
+                          <a:latin typeface="Roboto"/>
                         </a:rPr>
                         <a:t>4</a:t>
                       </a:r>
@@ -5099,11 +5393,17 @@
                     <a:bodyPr/>
                     <a:lstStyle/>
                     <a:p>
+                      <a:pPr>
+                        <a:defRPr>
+                          <a:latin typeface="Roboto"/>
+                        </a:defRPr>
+                      </a:pPr>
                       <a:r>
                         <a:rPr sz="1050">
                           <a:solidFill>
                             <a:srgbClr val="25342A"/>
                           </a:solidFill>
+                          <a:latin typeface="Roboto"/>
                         </a:rPr>
                         <a:t>Volunteer coordinator</a:t>
                       </a:r>
@@ -5120,12 +5420,17 @@
                     <a:bodyPr/>
                     <a:lstStyle/>
                     <a:p>
-                      <a:pPr algn="r"/>
+                      <a:pPr algn="r">
+                        <a:defRPr>
+                          <a:latin typeface="Roboto"/>
+                        </a:defRPr>
+                      </a:pPr>
                       <a:r>
                         <a:rPr sz="1050">
                           <a:solidFill>
                             <a:srgbClr val="25342A"/>
                           </a:solidFill>
+                          <a:latin typeface="Roboto"/>
                         </a:rPr>
                         <a:t>$18,000</a:t>
                       </a:r>
@@ -5142,12 +5447,17 @@
                     <a:bodyPr/>
                     <a:lstStyle/>
                     <a:p>
-                      <a:pPr algn="r"/>
+                      <a:pPr algn="r">
+                        <a:defRPr>
+                          <a:latin typeface="Roboto"/>
+                        </a:defRPr>
+                      </a:pPr>
                       <a:r>
                         <a:rPr sz="1050">
                           <a:solidFill>
                             <a:srgbClr val="25342A"/>
                           </a:solidFill>
+                          <a:latin typeface="Roboto"/>
                         </a:rPr>
                         <a:t>$18,000</a:t>
                       </a:r>
@@ -5164,12 +5474,17 @@
                     <a:bodyPr/>
                     <a:lstStyle/>
                     <a:p>
-                      <a:pPr algn="r"/>
+                      <a:pPr algn="r">
+                        <a:defRPr>
+                          <a:latin typeface="Roboto"/>
+                        </a:defRPr>
+                      </a:pPr>
                       <a:r>
                         <a:rPr sz="1050">
                           <a:solidFill>
                             <a:srgbClr val="25342A"/>
                           </a:solidFill>
+                          <a:latin typeface="Roboto"/>
                         </a:rPr>
                         <a:t>100.0%</a:t>
                       </a:r>
@@ -5186,12 +5501,17 @@
                     <a:bodyPr/>
                     <a:lstStyle/>
                     <a:p>
-                      <a:pPr algn="r"/>
+                      <a:pPr algn="r">
+                        <a:defRPr>
+                          <a:latin typeface="Roboto"/>
+                        </a:defRPr>
+                      </a:pPr>
                       <a:r>
                         <a:rPr sz="1050">
                           <a:solidFill>
                             <a:srgbClr val="25342A"/>
                           </a:solidFill>
+                          <a:latin typeface="Roboto"/>
                         </a:rPr>
                         <a:t>$18,000</a:t>
                       </a:r>
@@ -5208,12 +5528,17 @@
                     <a:bodyPr/>
                     <a:lstStyle/>
                     <a:p>
-                      <a:pPr algn="r"/>
+                      <a:pPr algn="r">
+                        <a:defRPr>
+                          <a:latin typeface="Roboto"/>
+                        </a:defRPr>
+                      </a:pPr>
                       <a:r>
                         <a:rPr sz="1050">
                           <a:solidFill>
                             <a:srgbClr val="25342A"/>
                           </a:solidFill>
+                          <a:latin typeface="Roboto"/>
                         </a:rPr>
                         <a:t>6</a:t>
                       </a:r>
@@ -5232,11 +5557,17 @@
                     <a:bodyPr/>
                     <a:lstStyle/>
                     <a:p>
+                      <a:pPr>
+                        <a:defRPr>
+                          <a:latin typeface="Roboto"/>
+                        </a:defRPr>
+                      </a:pPr>
                       <a:r>
                         <a:rPr sz="1050">
                           <a:solidFill>
                             <a:srgbClr val="25342A"/>
                           </a:solidFill>
+                          <a:latin typeface="Roboto"/>
                         </a:rPr>
                         <a:t>Digital literacy</a:t>
                       </a:r>
@@ -5253,12 +5584,17 @@
                     <a:bodyPr/>
                     <a:lstStyle/>
                     <a:p>
-                      <a:pPr algn="r"/>
+                      <a:pPr algn="r">
+                        <a:defRPr>
+                          <a:latin typeface="Roboto"/>
+                        </a:defRPr>
+                      </a:pPr>
                       <a:r>
                         <a:rPr sz="1050">
                           <a:solidFill>
                             <a:srgbClr val="25342A"/>
                           </a:solidFill>
+                          <a:latin typeface="Roboto"/>
                         </a:rPr>
                         <a:t>$54,700</a:t>
                       </a:r>
@@ -5275,12 +5611,17 @@
                     <a:bodyPr/>
                     <a:lstStyle/>
                     <a:p>
-                      <a:pPr algn="r"/>
+                      <a:pPr algn="r">
+                        <a:defRPr>
+                          <a:latin typeface="Roboto"/>
+                        </a:defRPr>
+                      </a:pPr>
                       <a:r>
                         <a:rPr sz="1050">
                           <a:solidFill>
                             <a:srgbClr val="25342A"/>
                           </a:solidFill>
+                          <a:latin typeface="Roboto"/>
                         </a:rPr>
                         <a:t>$55,000</a:t>
                       </a:r>
@@ -5297,12 +5638,17 @@
                     <a:bodyPr/>
                     <a:lstStyle/>
                     <a:p>
-                      <a:pPr algn="r"/>
+                      <a:pPr algn="r">
+                        <a:defRPr>
+                          <a:latin typeface="Roboto"/>
+                        </a:defRPr>
+                      </a:pPr>
                       <a:r>
                         <a:rPr sz="1050">
                           <a:solidFill>
                             <a:srgbClr val="25342A"/>
                           </a:solidFill>
+                          <a:latin typeface="Roboto"/>
                         </a:rPr>
                         <a:t>99.5%</a:t>
                       </a:r>
@@ -5319,12 +5665,17 @@
                     <a:bodyPr/>
                     <a:lstStyle/>
                     <a:p>
-                      <a:pPr algn="r"/>
+                      <a:pPr algn="r">
+                        <a:defRPr>
+                          <a:latin typeface="Roboto"/>
+                        </a:defRPr>
+                      </a:pPr>
                       <a:r>
                         <a:rPr sz="1050">
                           <a:solidFill>
                             <a:srgbClr val="25342A"/>
                           </a:solidFill>
+                          <a:latin typeface="Roboto"/>
                         </a:rPr>
                         <a:t>$35,300</a:t>
                       </a:r>
@@ -5341,12 +5692,17 @@
                     <a:bodyPr/>
                     <a:lstStyle/>
                     <a:p>
-                      <a:pPr algn="r"/>
+                      <a:pPr algn="r">
+                        <a:defRPr>
+                          <a:latin typeface="Roboto"/>
+                        </a:defRPr>
+                      </a:pPr>
                       <a:r>
                         <a:rPr sz="1050">
                           <a:solidFill>
                             <a:srgbClr val="25342A"/>
                           </a:solidFill>
+                          <a:latin typeface="Roboto"/>
                         </a:rPr>
                         <a:t>7</a:t>
                       </a:r>
@@ -5365,11 +5721,17 @@
                     <a:bodyPr/>
                     <a:lstStyle/>
                     <a:p>
+                      <a:pPr>
+                        <a:defRPr>
+                          <a:latin typeface="Roboto"/>
+                        </a:defRPr>
+                      </a:pPr>
                       <a:r>
                         <a:rPr sz="1050">
                           <a:solidFill>
                             <a:srgbClr val="25342A"/>
                           </a:solidFill>
+                          <a:latin typeface="Roboto"/>
                         </a:rPr>
                         <a:t>Mental health first aid</a:t>
                       </a:r>
@@ -5386,12 +5748,17 @@
                     <a:bodyPr/>
                     <a:lstStyle/>
                     <a:p>
-                      <a:pPr algn="r"/>
+                      <a:pPr algn="r">
+                        <a:defRPr>
+                          <a:latin typeface="Roboto"/>
+                        </a:defRPr>
+                      </a:pPr>
                       <a:r>
                         <a:rPr sz="1050">
                           <a:solidFill>
                             <a:srgbClr val="25342A"/>
                           </a:solidFill>
+                          <a:latin typeface="Roboto"/>
                         </a:rPr>
                         <a:t>$46,400</a:t>
                       </a:r>
@@ -5408,12 +5775,17 @@
                     <a:bodyPr/>
                     <a:lstStyle/>
                     <a:p>
-                      <a:pPr algn="r"/>
+                      <a:pPr algn="r">
+                        <a:defRPr>
+                          <a:latin typeface="Roboto"/>
+                        </a:defRPr>
+                      </a:pPr>
                       <a:r>
                         <a:rPr sz="1050">
                           <a:solidFill>
                             <a:srgbClr val="25342A"/>
                           </a:solidFill>
+                          <a:latin typeface="Roboto"/>
                         </a:rPr>
                         <a:t>$50,000</a:t>
                       </a:r>
@@ -5430,12 +5802,17 @@
                     <a:bodyPr/>
                     <a:lstStyle/>
                     <a:p>
-                      <a:pPr algn="r"/>
+                      <a:pPr algn="r">
+                        <a:defRPr>
+                          <a:latin typeface="Roboto"/>
+                        </a:defRPr>
+                      </a:pPr>
                       <a:r>
                         <a:rPr sz="1050">
                           <a:solidFill>
                             <a:srgbClr val="25342A"/>
                           </a:solidFill>
+                          <a:latin typeface="Roboto"/>
                         </a:rPr>
                         <a:t>92.8%</a:t>
                       </a:r>
@@ -5452,12 +5829,17 @@
                     <a:bodyPr/>
                     <a:lstStyle/>
                     <a:p>
-                      <a:pPr algn="r"/>
+                      <a:pPr algn="r">
+                        <a:defRPr>
+                          <a:latin typeface="Roboto"/>
+                        </a:defRPr>
+                      </a:pPr>
                       <a:r>
                         <a:rPr sz="1050">
                           <a:solidFill>
                             <a:srgbClr val="25342A"/>
                           </a:solidFill>
+                          <a:latin typeface="Roboto"/>
                         </a:rPr>
                         <a:t>$73,600</a:t>
                       </a:r>
@@ -5474,12 +5856,17 @@
                     <a:bodyPr/>
                     <a:lstStyle/>
                     <a:p>
-                      <a:pPr algn="r"/>
+                      <a:pPr algn="r">
+                        <a:defRPr>
+                          <a:latin typeface="Roboto"/>
+                        </a:defRPr>
+                      </a:pPr>
                       <a:r>
                         <a:rPr sz="1050">
                           <a:solidFill>
                             <a:srgbClr val="25342A"/>
                           </a:solidFill>
+                          <a:latin typeface="Roboto"/>
                         </a:rPr>
                         <a:t>7</a:t>
                       </a:r>
@@ -5498,11 +5885,17 @@
                     <a:bodyPr/>
                     <a:lstStyle/>
                     <a:p>
+                      <a:pPr>
+                        <a:defRPr>
+                          <a:latin typeface="Roboto"/>
+                        </a:defRPr>
+                      </a:pPr>
                       <a:r>
                         <a:rPr sz="1050">
                           <a:solidFill>
                             <a:srgbClr val="25342A"/>
                           </a:solidFill>
+                          <a:latin typeface="Roboto"/>
                         </a:rPr>
                         <a:t>Youth outreach</a:t>
                       </a:r>
@@ -5519,12 +5912,17 @@
                     <a:bodyPr/>
                     <a:lstStyle/>
                     <a:p>
-                      <a:pPr algn="r"/>
+                      <a:pPr algn="r">
+                        <a:defRPr>
+                          <a:latin typeface="Roboto"/>
+                        </a:defRPr>
+                      </a:pPr>
                       <a:r>
                         <a:rPr sz="1050">
                           <a:solidFill>
                             <a:srgbClr val="25342A"/>
                           </a:solidFill>
+                          <a:latin typeface="Roboto"/>
                         </a:rPr>
                         <a:t>$283,500</a:t>
                       </a:r>
@@ -5541,12 +5939,17 @@
                     <a:bodyPr/>
                     <a:lstStyle/>
                     <a:p>
-                      <a:pPr algn="r"/>
+                      <a:pPr algn="r">
+                        <a:defRPr>
+                          <a:latin typeface="Roboto"/>
+                        </a:defRPr>
+                      </a:pPr>
                       <a:r>
                         <a:rPr sz="1050">
                           <a:solidFill>
                             <a:srgbClr val="25342A"/>
                           </a:solidFill>
+                          <a:latin typeface="Roboto"/>
                         </a:rPr>
                         <a:t>$280,000</a:t>
                       </a:r>
@@ -5563,12 +5966,17 @@
                     <a:bodyPr/>
                     <a:lstStyle/>
                     <a:p>
-                      <a:pPr algn="r"/>
+                      <a:pPr algn="r">
+                        <a:defRPr>
+                          <a:latin typeface="Roboto"/>
+                        </a:defRPr>
+                      </a:pPr>
                       <a:r>
                         <a:rPr sz="1050">
                           <a:solidFill>
                             <a:srgbClr val="25342A"/>
                           </a:solidFill>
+                          <a:latin typeface="Roboto"/>
                         </a:rPr>
                         <a:t>101.2%</a:t>
                       </a:r>
@@ -5585,12 +5993,17 @@
                     <a:bodyPr/>
                     <a:lstStyle/>
                     <a:p>
-                      <a:pPr algn="r"/>
+                      <a:pPr algn="r">
+                        <a:defRPr>
+                          <a:latin typeface="Roboto"/>
+                        </a:defRPr>
+                      </a:pPr>
                       <a:r>
                         <a:rPr sz="1050">
                           <a:solidFill>
                             <a:srgbClr val="25342A"/>
                           </a:solidFill>
+                          <a:latin typeface="Roboto"/>
                         </a:rPr>
                         <a:t>$196,500</a:t>
                       </a:r>
@@ -5607,12 +6020,17 @@
                     <a:bodyPr/>
                     <a:lstStyle/>
                     <a:p>
-                      <a:pPr algn="r"/>
+                      <a:pPr algn="r">
+                        <a:defRPr>
+                          <a:latin typeface="Roboto"/>
+                        </a:defRPr>
+                      </a:pPr>
                       <a:r>
                         <a:rPr sz="1050">
                           <a:solidFill>
                             <a:srgbClr val="25342A"/>
                           </a:solidFill>
+                          <a:latin typeface="Roboto"/>
                         </a:rPr>
                         <a:t>10</a:t>
                       </a:r>
@@ -5631,11 +6049,17 @@
                     <a:bodyPr/>
                     <a:lstStyle/>
                     <a:p>
+                      <a:pPr>
+                        <a:defRPr>
+                          <a:latin typeface="Roboto"/>
+                        </a:defRPr>
+                      </a:pPr>
                       <a:r>
                         <a:rPr sz="1050">
                           <a:solidFill>
                             <a:srgbClr val="25342A"/>
                           </a:solidFill>
+                          <a:latin typeface="Roboto"/>
                         </a:rPr>
                         <a:t>Community meals</a:t>
                       </a:r>
@@ -5652,12 +6076,17 @@
                     <a:bodyPr/>
                     <a:lstStyle/>
                     <a:p>
-                      <a:pPr algn="r"/>
+                      <a:pPr algn="r">
+                        <a:defRPr>
+                          <a:latin typeface="Roboto"/>
+                        </a:defRPr>
+                      </a:pPr>
                       <a:r>
                         <a:rPr sz="1050">
                           <a:solidFill>
                             <a:srgbClr val="25342A"/>
                           </a:solidFill>
+                          <a:latin typeface="Roboto"/>
                         </a:rPr>
                         <a:t>$7,700</a:t>
                       </a:r>
@@ -5674,12 +6103,17 @@
                     <a:bodyPr/>
                     <a:lstStyle/>
                     <a:p>
-                      <a:pPr algn="r"/>
+                      <a:pPr algn="r">
+                        <a:defRPr>
+                          <a:latin typeface="Roboto"/>
+                        </a:defRPr>
+                      </a:pPr>
                       <a:r>
                         <a:rPr sz="1050">
                           <a:solidFill>
                             <a:srgbClr val="25342A"/>
                           </a:solidFill>
+                          <a:latin typeface="Roboto"/>
                         </a:rPr>
                         <a:t>$8,000</a:t>
                       </a:r>
@@ -5696,12 +6130,17 @@
                     <a:bodyPr/>
                     <a:lstStyle/>
                     <a:p>
-                      <a:pPr algn="r"/>
+                      <a:pPr algn="r">
+                        <a:defRPr>
+                          <a:latin typeface="Roboto"/>
+                        </a:defRPr>
+                      </a:pPr>
                       <a:r>
                         <a:rPr sz="1050">
                           <a:solidFill>
                             <a:srgbClr val="25342A"/>
                           </a:solidFill>
+                          <a:latin typeface="Roboto"/>
                         </a:rPr>
                         <a:t>96.2%</a:t>
                       </a:r>
@@ -5718,12 +6157,17 @@
                     <a:bodyPr/>
                     <a:lstStyle/>
                     <a:p>
-                      <a:pPr algn="r"/>
+                      <a:pPr algn="r">
+                        <a:defRPr>
+                          <a:latin typeface="Roboto"/>
+                        </a:defRPr>
+                      </a:pPr>
                       <a:r>
                         <a:rPr sz="1050">
                           <a:solidFill>
                             <a:srgbClr val="25342A"/>
                           </a:solidFill>
+                          <a:latin typeface="Roboto"/>
                         </a:rPr>
                         <a:t>$40,300</a:t>
                       </a:r>
@@ -5740,12 +6184,17 @@
                     <a:bodyPr/>
                     <a:lstStyle/>
                     <a:p>
-                      <a:pPr algn="r"/>
+                      <a:pPr algn="r">
+                        <a:defRPr>
+                          <a:latin typeface="Roboto"/>
+                        </a:defRPr>
+                      </a:pPr>
                       <a:r>
                         <a:rPr sz="1050">
                           <a:solidFill>
                             <a:srgbClr val="25342A"/>
                           </a:solidFill>
+                          <a:latin typeface="Roboto"/>
                         </a:rPr>
                         <a:t>10</a:t>
                       </a:r>
@@ -5784,12 +6233,17 @@
           </a:bodyPr>
           <a:lstStyle/>
           <a:p>
+            <a:pPr>
+              <a:defRPr>
+                <a:latin typeface="Roboto"/>
+              </a:defRPr>
+            </a:pPr>
             <a:r>
               <a:rPr sz="900" b="0">
                 <a:solidFill>
                   <a:srgbClr val="5F6F63"/>
                 </a:solidFill>
-                <a:latin typeface="Arial"/>
+                <a:latin typeface="Roboto"/>
               </a:rPr>
               <a:t>board.pptx</a:t>
             </a:r>
@@ -5818,13 +6272,17 @@
           </a:bodyPr>
           <a:lstStyle/>
           <a:p>
-            <a:pPr algn="ctr"/>
+            <a:pPr algn="ctr">
+              <a:defRPr>
+                <a:latin typeface="Roboto"/>
+              </a:defRPr>
+            </a:pPr>
             <a:r>
               <a:rPr sz="900" b="0">
                 <a:solidFill>
                   <a:srgbClr val="5F6F63"/>
                 </a:solidFill>
-                <a:latin typeface="Arial"/>
+                <a:latin typeface="Roboto"/>
               </a:rPr>
               <a:t>Data retrieved 2pm, Tue 6 Oct 2026 · Sample data</a:t>
             </a:r>
@@ -5853,13 +6311,17 @@
           </a:bodyPr>
           <a:lstStyle/>
           <a:p>
-            <a:pPr algn="r"/>
+            <a:pPr algn="r">
+              <a:defRPr>
+                <a:latin typeface="Roboto"/>
+              </a:defRPr>
+            </a:pPr>
             <a:r>
               <a:rPr sz="900" b="0">
                 <a:solidFill>
                   <a:srgbClr val="5F6F63"/>
                 </a:solidFill>
-                <a:latin typeface="Arial"/>
+                <a:latin typeface="Roboto"/>
               </a:rPr>
               <a:t>Slide 4 of 5</a:t>
             </a:r>
@@ -5923,7 +6385,11 @@
           <a:bodyPr rtlCol="0" anchor="ctr"/>
           <a:lstStyle/>
           <a:p>
-            <a:pPr algn="ctr"/>
+            <a:pPr algn="ctr">
+              <a:defRPr>
+                <a:latin typeface="Roboto"/>
+              </a:defRPr>
+            </a:pPr>
           </a:p>
         </p:txBody>
       </p:sp>
@@ -5949,12 +6415,17 @@
           </a:bodyPr>
           <a:lstStyle/>
           <a:p>
+            <a:pPr>
+              <a:defRPr>
+                <a:latin typeface="Roboto"/>
+              </a:defRPr>
+            </a:pPr>
             <a:r>
               <a:rPr sz="1000" b="0">
                 <a:solidFill>
                   <a:srgbClr val="5F6F63"/>
                 </a:solidFill>
-                <a:latin typeface="Arial"/>
+                <a:latin typeface="Roboto"/>
               </a:rPr>
               <a:t>Sample Community Services Ltd · What does the board need to see?</a:t>
             </a:r>
@@ -5983,12 +6454,17 @@
           </a:bodyPr>
           <a:lstStyle/>
           <a:p>
+            <a:pPr>
+              <a:defRPr>
+                <a:latin typeface="Roboto"/>
+              </a:defRPr>
+            </a:pPr>
             <a:r>
               <a:rPr sz="2400" b="1">
                 <a:solidFill>
                   <a:srgbClr val="25342A"/>
                 </a:solidFill>
-                <a:latin typeface="Arial"/>
+                <a:latin typeface="Roboto"/>
               </a:rPr>
               <a:t>Decisions to make</a:t>
             </a:r>
@@ -6036,7 +6512,11 @@
           <a:bodyPr rtlCol="0" anchor="ctr"/>
           <a:lstStyle/>
           <a:p>
-            <a:pPr algn="ctr"/>
+            <a:pPr algn="ctr">
+              <a:defRPr>
+                <a:latin typeface="Roboto"/>
+              </a:defRPr>
+            </a:pPr>
           </a:p>
         </p:txBody>
       </p:sp>
@@ -6062,12 +6542,17 @@
           </a:bodyPr>
           <a:lstStyle/>
           <a:p>
+            <a:pPr>
+              <a:defRPr>
+                <a:latin typeface="Roboto"/>
+              </a:defRPr>
+            </a:pPr>
             <a:r>
               <a:rPr sz="1100" b="1">
                 <a:solidFill>
                   <a:srgbClr val="5F6F63"/>
                 </a:solidFill>
-                <a:latin typeface="Arial"/>
+                <a:latin typeface="Roboto"/>
               </a:rPr>
               <a:t>DECISIONS TO MAKE</a:t>
             </a:r>
@@ -6096,34 +6581,49 @@
           </a:bodyPr>
           <a:lstStyle/>
           <a:p>
+            <a:pPr>
+              <a:defRPr>
+                <a:latin typeface="Roboto"/>
+              </a:defRPr>
+            </a:pPr>
             <a:r>
               <a:rPr sz="1600" b="0">
                 <a:solidFill>
                   <a:srgbClr val="25342A"/>
                 </a:solidFill>
-                <a:latin typeface="Arial"/>
+                <a:latin typeface="Roboto"/>
               </a:rPr>
               <a:t>• Housing support: lift spending to $33,375 a month, or ask State Housing Program about carrying the balance over.</a:t>
             </a:r>
           </a:p>
           <a:p>
+            <a:pPr>
+              <a:defRPr>
+                <a:latin typeface="Roboto"/>
+              </a:defRPr>
+            </a:pPr>
             <a:r>
               <a:rPr sz="1600" b="0">
                 <a:solidFill>
                   <a:srgbClr val="25342A"/>
                 </a:solidFill>
-                <a:latin typeface="Arial"/>
+                <a:latin typeface="Roboto"/>
               </a:rPr>
               <a:t>• Reserves: how much of each month's surplus goes to reserves, and by when the target is reached.</a:t>
             </a:r>
           </a:p>
           <a:p>
+            <a:pPr>
+              <a:defRPr>
+                <a:latin typeface="Roboto"/>
+              </a:defRPr>
+            </a:pPr>
             <a:r>
               <a:rPr sz="1600" b="0">
                 <a:solidFill>
                   <a:srgbClr val="25342A"/>
                 </a:solidFill>
-                <a:latin typeface="Arial"/>
+                <a:latin typeface="Roboto"/>
               </a:rPr>
               <a:t>• Fundraising: where the next spare hours go, given what each source costs to raise.</a:t>
             </a:r>
@@ -6152,12 +6652,17 @@
           </a:bodyPr>
           <a:lstStyle/>
           <a:p>
+            <a:pPr>
+              <a:defRPr>
+                <a:latin typeface="Roboto"/>
+              </a:defRPr>
+            </a:pPr>
             <a:r>
               <a:rPr sz="900" b="0">
                 <a:solidFill>
                   <a:srgbClr val="5F6F63"/>
                 </a:solidFill>
-                <a:latin typeface="Arial"/>
+                <a:latin typeface="Roboto"/>
               </a:rPr>
               <a:t>board.pptx</a:t>
             </a:r>
@@ -6186,13 +6691,17 @@
           </a:bodyPr>
           <a:lstStyle/>
           <a:p>
-            <a:pPr algn="ctr"/>
+            <a:pPr algn="ctr">
+              <a:defRPr>
+                <a:latin typeface="Roboto"/>
+              </a:defRPr>
+            </a:pPr>
             <a:r>
               <a:rPr sz="900" b="0">
                 <a:solidFill>
                   <a:srgbClr val="5F6F63"/>
                 </a:solidFill>
-                <a:latin typeface="Arial"/>
+                <a:latin typeface="Roboto"/>
               </a:rPr>
               <a:t>Data retrieved 2pm, Tue 6 Oct 2026 · Sample data</a:t>
             </a:r>
@@ -6221,13 +6730,17 @@
           </a:bodyPr>
           <a:lstStyle/>
           <a:p>
-            <a:pPr algn="r"/>
+            <a:pPr algn="r">
+              <a:defRPr>
+                <a:latin typeface="Roboto"/>
+              </a:defRPr>
+            </a:pPr>
             <a:r>
               <a:rPr sz="900" b="0">
                 <a:solidFill>
                   <a:srgbClr val="5F6F63"/>
                 </a:solidFill>
-                <a:latin typeface="Arial"/>
+                <a:latin typeface="Roboto"/>
               </a:rPr>
               <a:t>Slide 5 of 5</a:t>
             </a:r>

--- a/media/exports/reports/2026-08/board.pptx
+++ b/media/exports/reports/2026-08/board.pptx
@@ -4752,7 +4752,7 @@
                 </a:solidFill>
                 <a:latin typeface="Roboto"/>
               </a:rPr>
-              <a:t>• 1 grant(s) end within 6 months with $133,500 still to spend. Housing support: $133,500 left in 4 months ($33,375 a month needed, against $30,500 spent in August).</a:t>
+              <a:t>• 1 grant ends within 6 months with $133,500 still to spend. Housing support: $133,500 left in 4 months ($33,375 a month needed, against $30,500 spent in August).</a:t>
             </a:r>
           </a:p>
           <a:p>

--- a/media/exports/reports/2026-08/board.pptx
+++ b/media/exports/reports/2026-08/board.pptx
@@ -6,10 +6,7 @@
   </p:sldMasterIdLst>
   <p:sldIdLst>
     <p:sldId id="256" r:id="rId7"/>
-    <p:sldId id="257" r:id="rId8"/>
-    <p:sldId id="258" r:id="rId9"/>
-    <p:sldId id="259" r:id="rId10"/>
-    <p:sldId id="260" r:id="rId11"/>
+    <p:sldId id="257" r:id="rId9"/>
   </p:sldIdLst>
   <p:sldSz cx="12191695" cy="6858000" type="screen4x3"/>
   <p:notesSz cx="6858000" cy="9144000"/>
@@ -109,6 +106,496 @@
     </a:lvl9pPr>
   </p:defaultTextStyle>
 </p:presentation>
+</file>
+
+<file path=ppt/notesMasters/notesMaster1.xml><?xml version="1.0" encoding="utf-8"?>
+<p:notesMaster xmlns:a="http://schemas.openxmlformats.org/drawingml/2006/main" xmlns:p="http://schemas.openxmlformats.org/presentationml/2006/main" xmlns:r="http://schemas.openxmlformats.org/officeDocument/2006/relationships">
+  <p:cSld>
+    <p:bg>
+      <p:bgRef idx="1001">
+        <a:schemeClr val="bg1"/>
+      </p:bgRef>
+    </p:bg>
+    <p:spTree>
+      <p:nvGrpSpPr>
+        <p:cNvPr id="1" name=""/>
+        <p:cNvGrpSpPr/>
+        <p:nvPr/>
+      </p:nvGrpSpPr>
+      <p:grpSpPr>
+        <a:xfrm>
+          <a:off x="0" y="0"/>
+          <a:ext cx="0" cy="0"/>
+          <a:chOff x="0" y="0"/>
+          <a:chExt cx="0" cy="0"/>
+        </a:xfrm>
+      </p:grpSpPr>
+      <p:sp>
+        <p:nvSpPr>
+          <p:cNvPr id="2" name="Header Placeholder 1"/>
+          <p:cNvSpPr>
+            <a:spLocks noGrp="1"/>
+          </p:cNvSpPr>
+          <p:nvPr>
+            <p:ph type="hdr" sz="quarter"/>
+          </p:nvPr>
+        </p:nvSpPr>
+        <p:spPr>
+          <a:xfrm>
+            <a:off x="0" y="0"/>
+            <a:ext cx="2971800" cy="457200"/>
+          </a:xfrm>
+          <a:prstGeom prst="rect">
+            <a:avLst/>
+          </a:prstGeom>
+        </p:spPr>
+        <p:txBody>
+          <a:bodyPr vert="horz" lIns="91440" tIns="45720" rIns="91440" bIns="45720" rtlCol="0"/>
+          <a:lstStyle>
+            <a:lvl1pPr algn="l">
+              <a:defRPr sz="1200"/>
+            </a:lvl1pPr>
+          </a:lstStyle>
+          <a:p>
+            <a:endParaRPr lang="en-US"/>
+          </a:p>
+        </p:txBody>
+      </p:sp>
+      <p:sp>
+        <p:nvSpPr>
+          <p:cNvPr id="3" name="Date Placeholder 2"/>
+          <p:cNvSpPr>
+            <a:spLocks noGrp="1"/>
+          </p:cNvSpPr>
+          <p:nvPr>
+            <p:ph type="dt" idx="1"/>
+          </p:nvPr>
+        </p:nvSpPr>
+        <p:spPr>
+          <a:xfrm>
+            <a:off x="3884613" y="0"/>
+            <a:ext cx="2971800" cy="457200"/>
+          </a:xfrm>
+          <a:prstGeom prst="rect">
+            <a:avLst/>
+          </a:prstGeom>
+        </p:spPr>
+        <p:txBody>
+          <a:bodyPr vert="horz" lIns="91440" tIns="45720" rIns="91440" bIns="45720" rtlCol="0"/>
+          <a:lstStyle>
+            <a:lvl1pPr algn="r">
+              <a:defRPr sz="1200"/>
+            </a:lvl1pPr>
+          </a:lstStyle>
+          <a:p>
+            <a:fld id="{0F89C1C7-3DCD-1040-A9CF-14679D8B5DDD}" type="datetimeFigureOut">
+              <a:rPr lang="en-US" smtClean="0"/>
+              <a:t>10/17/16</a:t>
+            </a:fld>
+            <a:endParaRPr lang="en-US"/>
+          </a:p>
+        </p:txBody>
+      </p:sp>
+      <p:sp>
+        <p:nvSpPr>
+          <p:cNvPr id="4" name="Slide Image Placeholder 3"/>
+          <p:cNvSpPr>
+            <a:spLocks noGrp="1" noRot="1" noChangeAspect="1"/>
+          </p:cNvSpPr>
+          <p:nvPr>
+            <p:ph type="sldImg" idx="2"/>
+          </p:nvPr>
+        </p:nvSpPr>
+        <p:spPr>
+          <a:xfrm>
+            <a:off x="1143000" y="685800"/>
+            <a:ext cx="4572000" cy="3429000"/>
+          </a:xfrm>
+          <a:prstGeom prst="rect">
+            <a:avLst/>
+          </a:prstGeom>
+          <a:noFill/>
+          <a:ln w="12700">
+            <a:solidFill>
+              <a:prstClr val="black"/>
+            </a:solidFill>
+          </a:ln>
+        </p:spPr>
+        <p:txBody>
+          <a:bodyPr vert="horz" lIns="91440" tIns="45720" rIns="91440" bIns="45720" rtlCol="0" anchor="ctr"/>
+          <a:lstStyle/>
+          <a:p>
+            <a:endParaRPr lang="en-US"/>
+          </a:p>
+        </p:txBody>
+      </p:sp>
+      <p:sp>
+        <p:nvSpPr>
+          <p:cNvPr id="5" name="Notes Placeholder 4"/>
+          <p:cNvSpPr>
+            <a:spLocks noGrp="1"/>
+          </p:cNvSpPr>
+          <p:nvPr>
+            <p:ph type="body" sz="quarter" idx="3"/>
+          </p:nvPr>
+        </p:nvSpPr>
+        <p:spPr>
+          <a:xfrm>
+            <a:off x="685800" y="4343400"/>
+            <a:ext cx="5486400" cy="4114800"/>
+          </a:xfrm>
+          <a:prstGeom prst="rect">
+            <a:avLst/>
+          </a:prstGeom>
+        </p:spPr>
+        <p:txBody>
+          <a:bodyPr vert="horz" lIns="91440" tIns="45720" rIns="91440" bIns="45720" rtlCol="0"/>
+          <a:lstStyle/>
+          <a:p>
+            <a:pPr lvl="0"/>
+            <a:r>
+              <a:rPr lang="en-US" smtClean="0"/>
+              <a:t>Click to edit Master text styles</a:t>
+            </a:r>
+          </a:p>
+          <a:p>
+            <a:pPr lvl="1"/>
+            <a:r>
+              <a:rPr lang="en-US" smtClean="0"/>
+              <a:t>Second level</a:t>
+            </a:r>
+          </a:p>
+          <a:p>
+            <a:pPr lvl="2"/>
+            <a:r>
+              <a:rPr lang="en-US" smtClean="0"/>
+              <a:t>Third level</a:t>
+            </a:r>
+          </a:p>
+          <a:p>
+            <a:pPr lvl="3"/>
+            <a:r>
+              <a:rPr lang="en-US" smtClean="0"/>
+              <a:t>Fourth level</a:t>
+            </a:r>
+          </a:p>
+          <a:p>
+            <a:pPr lvl="4"/>
+            <a:r>
+              <a:rPr lang="en-US" smtClean="0"/>
+              <a:t>Fifth level</a:t>
+            </a:r>
+            <a:endParaRPr lang="en-US"/>
+          </a:p>
+        </p:txBody>
+      </p:sp>
+      <p:sp>
+        <p:nvSpPr>
+          <p:cNvPr id="6" name="Footer Placeholder 5"/>
+          <p:cNvSpPr>
+            <a:spLocks noGrp="1"/>
+          </p:cNvSpPr>
+          <p:nvPr>
+            <p:ph type="ftr" sz="quarter" idx="4"/>
+          </p:nvPr>
+        </p:nvSpPr>
+        <p:spPr>
+          <a:xfrm>
+            <a:off x="0" y="8685213"/>
+            <a:ext cx="2971800" cy="457200"/>
+          </a:xfrm>
+          <a:prstGeom prst="rect">
+            <a:avLst/>
+          </a:prstGeom>
+        </p:spPr>
+        <p:txBody>
+          <a:bodyPr vert="horz" lIns="91440" tIns="45720" rIns="91440" bIns="45720" rtlCol="0" anchor="b"/>
+          <a:lstStyle>
+            <a:lvl1pPr algn="l">
+              <a:defRPr sz="1200"/>
+            </a:lvl1pPr>
+          </a:lstStyle>
+          <a:p>
+            <a:endParaRPr lang="en-US"/>
+          </a:p>
+        </p:txBody>
+      </p:sp>
+      <p:sp>
+        <p:nvSpPr>
+          <p:cNvPr id="7" name="Slide Number Placeholder 6"/>
+          <p:cNvSpPr>
+            <a:spLocks noGrp="1"/>
+          </p:cNvSpPr>
+          <p:nvPr>
+            <p:ph type="sldNum" sz="quarter" idx="5"/>
+          </p:nvPr>
+        </p:nvSpPr>
+        <p:spPr>
+          <a:xfrm>
+            <a:off x="3884613" y="8685213"/>
+            <a:ext cx="2971800" cy="457200"/>
+          </a:xfrm>
+          <a:prstGeom prst="rect">
+            <a:avLst/>
+          </a:prstGeom>
+        </p:spPr>
+        <p:txBody>
+          <a:bodyPr vert="horz" lIns="91440" tIns="45720" rIns="91440" bIns="45720" rtlCol="0" anchor="b"/>
+          <a:lstStyle>
+            <a:lvl1pPr algn="r">
+              <a:defRPr sz="1200"/>
+            </a:lvl1pPr>
+          </a:lstStyle>
+          <a:p>
+            <a:fld id="{BB5E49A5-4136-284D-997B-48E1D791AD67}" type="slidenum">
+              <a:rPr lang="en-US" smtClean="0"/>
+              <a:t>‹#›</a:t>
+            </a:fld>
+            <a:endParaRPr lang="en-US"/>
+          </a:p>
+        </p:txBody>
+      </p:sp>
+    </p:spTree>
+    <p:extLst>
+      <p:ext uri="{BB962C8B-B14F-4D97-AF65-F5344CB8AC3E}">
+        <p14:creationId xmlns:p14="http://schemas.microsoft.com/office/powerpoint/2010/main" val="2623252185"/>
+      </p:ext>
+    </p:extLst>
+  </p:cSld>
+  <p:clrMap bg1="lt1" tx1="dk1" bg2="lt2" tx2="dk2" accent1="accent1" accent2="accent2" accent3="accent3" accent4="accent4" accent5="accent5" accent6="accent6" hlink="hlink" folHlink="folHlink"/>
+  <p:notesStyle>
+    <a:lvl1pPr marL="0" algn="l" defTabSz="457200" rtl="0" eaLnBrk="1" latinLnBrk="0" hangingPunct="1">
+      <a:defRPr sz="1200" kern="1200">
+        <a:solidFill>
+          <a:schemeClr val="tx1"/>
+        </a:solidFill>
+        <a:latin typeface="+mn-lt"/>
+        <a:ea typeface="+mn-ea"/>
+        <a:cs typeface="+mn-cs"/>
+      </a:defRPr>
+    </a:lvl1pPr>
+    <a:lvl2pPr marL="457200" algn="l" defTabSz="457200" rtl="0" eaLnBrk="1" latinLnBrk="0" hangingPunct="1">
+      <a:defRPr sz="1200" kern="1200">
+        <a:solidFill>
+          <a:schemeClr val="tx1"/>
+        </a:solidFill>
+        <a:latin typeface="+mn-lt"/>
+        <a:ea typeface="+mn-ea"/>
+        <a:cs typeface="+mn-cs"/>
+      </a:defRPr>
+    </a:lvl2pPr>
+    <a:lvl3pPr marL="914400" algn="l" defTabSz="457200" rtl="0" eaLnBrk="1" latinLnBrk="0" hangingPunct="1">
+      <a:defRPr sz="1200" kern="1200">
+        <a:solidFill>
+          <a:schemeClr val="tx1"/>
+        </a:solidFill>
+        <a:latin typeface="+mn-lt"/>
+        <a:ea typeface="+mn-ea"/>
+        <a:cs typeface="+mn-cs"/>
+      </a:defRPr>
+    </a:lvl3pPr>
+    <a:lvl4pPr marL="1371600" algn="l" defTabSz="457200" rtl="0" eaLnBrk="1" latinLnBrk="0" hangingPunct="1">
+      <a:defRPr sz="1200" kern="1200">
+        <a:solidFill>
+          <a:schemeClr val="tx1"/>
+        </a:solidFill>
+        <a:latin typeface="+mn-lt"/>
+        <a:ea typeface="+mn-ea"/>
+        <a:cs typeface="+mn-cs"/>
+      </a:defRPr>
+    </a:lvl4pPr>
+    <a:lvl5pPr marL="1828800" algn="l" defTabSz="457200" rtl="0" eaLnBrk="1" latinLnBrk="0" hangingPunct="1">
+      <a:defRPr sz="1200" kern="1200">
+        <a:solidFill>
+          <a:schemeClr val="tx1"/>
+        </a:solidFill>
+        <a:latin typeface="+mn-lt"/>
+        <a:ea typeface="+mn-ea"/>
+        <a:cs typeface="+mn-cs"/>
+      </a:defRPr>
+    </a:lvl5pPr>
+    <a:lvl6pPr marL="2286000" algn="l" defTabSz="457200" rtl="0" eaLnBrk="1" latinLnBrk="0" hangingPunct="1">
+      <a:defRPr sz="1200" kern="1200">
+        <a:solidFill>
+          <a:schemeClr val="tx1"/>
+        </a:solidFill>
+        <a:latin typeface="+mn-lt"/>
+        <a:ea typeface="+mn-ea"/>
+        <a:cs typeface="+mn-cs"/>
+      </a:defRPr>
+    </a:lvl6pPr>
+    <a:lvl7pPr marL="2743200" algn="l" defTabSz="457200" rtl="0" eaLnBrk="1" latinLnBrk="0" hangingPunct="1">
+      <a:defRPr sz="1200" kern="1200">
+        <a:solidFill>
+          <a:schemeClr val="tx1"/>
+        </a:solidFill>
+        <a:latin typeface="+mn-lt"/>
+        <a:ea typeface="+mn-ea"/>
+        <a:cs typeface="+mn-cs"/>
+      </a:defRPr>
+    </a:lvl7pPr>
+    <a:lvl8pPr marL="3200400" algn="l" defTabSz="457200" rtl="0" eaLnBrk="1" latinLnBrk="0" hangingPunct="1">
+      <a:defRPr sz="1200" kern="1200">
+        <a:solidFill>
+          <a:schemeClr val="tx1"/>
+        </a:solidFill>
+        <a:latin typeface="+mn-lt"/>
+        <a:ea typeface="+mn-ea"/>
+        <a:cs typeface="+mn-cs"/>
+      </a:defRPr>
+    </a:lvl8pPr>
+    <a:lvl9pPr marL="3657600" algn="l" defTabSz="457200" rtl="0" eaLnBrk="1" latinLnBrk="0" hangingPunct="1">
+      <a:defRPr sz="1200" kern="1200">
+        <a:solidFill>
+          <a:schemeClr val="tx1"/>
+        </a:solidFill>
+        <a:latin typeface="+mn-lt"/>
+        <a:ea typeface="+mn-ea"/>
+        <a:cs typeface="+mn-cs"/>
+      </a:defRPr>
+    </a:lvl9pPr>
+  </p:notesStyle>
+</p:notesMaster>
+</file>
+
+<file path=ppt/notesSlides/notesSlide1.xml><?xml version="1.0" encoding="utf-8"?>
+<p:notes xmlns:a="http://schemas.openxmlformats.org/drawingml/2006/main" xmlns:p="http://schemas.openxmlformats.org/presentationml/2006/main" xmlns:r="http://schemas.openxmlformats.org/officeDocument/2006/relationships">
+  <p:cSld>
+    <p:spTree>
+      <p:nvGrpSpPr>
+        <p:cNvPr id="1" name=""/>
+        <p:cNvGrpSpPr/>
+        <p:nvPr/>
+      </p:nvGrpSpPr>
+      <p:grpSpPr>
+        <a:xfrm>
+          <a:off x="0" y="0"/>
+          <a:ext cx="0" cy="0"/>
+          <a:chOff x="0" y="0"/>
+          <a:chExt cx="0" cy="0"/>
+        </a:xfrm>
+      </p:grpSpPr>
+      <p:sp>
+        <p:nvSpPr>
+          <p:cNvPr id="2" name="Slide Image Placeholder 1"/>
+          <p:cNvSpPr>
+            <a:spLocks noGrp="1"/>
+          </p:cNvSpPr>
+          <p:nvPr>
+            <p:ph type="sldImg" idx="2"/>
+          </p:nvPr>
+        </p:nvSpPr>
+        <p:spPr/>
+      </p:sp>
+      <p:sp>
+        <p:nvSpPr>
+          <p:cNvPr id="3" name="Notes Placeholder 2"/>
+          <p:cNvSpPr>
+            <a:spLocks noGrp="1"/>
+          </p:cNvSpPr>
+          <p:nvPr>
+            <p:ph type="body" idx="3" sz="quarter"/>
+          </p:nvPr>
+        </p:nvSpPr>
+        <p:spPr/>
+        <p:txBody>
+          <a:bodyPr/>
+          <a:lstStyle/>
+          <a:p>
+            <a:r>
+              <a:t>What does the board need to see?. Sample Community Services Ltd. Period: August 2026. A one-page board summary for August 2026: the result, the money, the risks, and the decisions to make. The full statements are in the downloads.</a:t>
+            </a:r>
+          </a:p>
+        </p:txBody>
+      </p:sp>
+      <p:sp>
+        <p:nvSpPr>
+          <p:cNvPr id="4" name="Slide Number Placeholder 3"/>
+          <p:cNvSpPr>
+            <a:spLocks noGrp="1"/>
+          </p:cNvSpPr>
+          <p:nvPr>
+            <p:ph type="sldNum" idx="5" sz="quarter"/>
+          </p:nvPr>
+        </p:nvSpPr>
+        <p:spPr/>
+      </p:sp>
+    </p:spTree>
+  </p:cSld>
+  <p:clrMapOvr>
+    <a:masterClrMapping/>
+  </p:clrMapOvr>
+</p:notes>
+</file>
+
+<file path=ppt/notesSlides/notesSlide2.xml><?xml version="1.0" encoding="utf-8"?>
+<p:notes xmlns:a="http://schemas.openxmlformats.org/drawingml/2006/main" xmlns:p="http://schemas.openxmlformats.org/presentationml/2006/main" xmlns:r="http://schemas.openxmlformats.org/officeDocument/2006/relationships">
+  <p:cSld>
+    <p:spTree>
+      <p:nvGrpSpPr>
+        <p:cNvPr id="1" name=""/>
+        <p:cNvGrpSpPr/>
+        <p:nvPr/>
+      </p:nvGrpSpPr>
+      <p:grpSpPr>
+        <a:xfrm>
+          <a:off x="0" y="0"/>
+          <a:ext cx="0" cy="0"/>
+          <a:chOff x="0" y="0"/>
+          <a:chExt cx="0" cy="0"/>
+        </a:xfrm>
+      </p:grpSpPr>
+      <p:sp>
+        <p:nvSpPr>
+          <p:cNvPr id="2" name="Slide Image Placeholder 1"/>
+          <p:cNvSpPr>
+            <a:spLocks noGrp="1"/>
+          </p:cNvSpPr>
+          <p:nvPr>
+            <p:ph type="sldImg" idx="2"/>
+          </p:nvPr>
+        </p:nvSpPr>
+        <p:spPr/>
+      </p:sp>
+      <p:sp>
+        <p:nvSpPr>
+          <p:cNvPr id="3" name="Notes Placeholder 2"/>
+          <p:cNvSpPr>
+            <a:spLocks noGrp="1"/>
+          </p:cNvSpPr>
+          <p:nvPr>
+            <p:ph type="body" idx="3" sz="quarter"/>
+          </p:nvPr>
+        </p:nvSpPr>
+        <p:spPr/>
+        <p:txBody>
+          <a:bodyPr/>
+          <a:lstStyle/>
+          <a:p>
+            <a:r>
+              <a:t>What does the board need to see?. Surplus, August: ($23,750); Surplus (deficit), year to date: ($49,170); Unrestricted cash runway: 2.2 months; Cost to raise a dollar, August: 13¢.</a:t>
+            </a:r>
+          </a:p>
+        </p:txBody>
+      </p:sp>
+      <p:sp>
+        <p:nvSpPr>
+          <p:cNvPr id="4" name="Slide Number Placeholder 3"/>
+          <p:cNvSpPr>
+            <a:spLocks noGrp="1"/>
+          </p:cNvSpPr>
+          <p:nvPr>
+            <p:ph type="sldNum" idx="5" sz="quarter"/>
+          </p:nvPr>
+        </p:nvSpPr>
+        <p:spPr/>
+      </p:sp>
+    </p:spTree>
+  </p:cSld>
+  <p:clrMapOvr>
+    <a:masterClrMapping/>
+  </p:clrMapOvr>
+</p:notes>
 </file>
 
 <file path=ppt/slideLayouts/slideLayout1.xml><?xml version="1.0" encoding="utf-8"?>
@@ -3094,7 +3581,44 @@
       <p:grpSpPr/>
       <p:sp>
         <p:nvSpPr>
-          <p:cNvPr id="2" name="Rectangle 1"/>
+          <p:cNvPr id="2" name="Title 1"/>
+          <p:cNvSpPr>
+            <a:spLocks noGrp="1"/>
+          </p:cNvSpPr>
+          <p:nvPr>
+            <p:ph type="ctrTitle"/>
+          </p:nvPr>
+        </p:nvSpPr>
+        <p:spPr>
+          <a:xfrm>
+            <a:off x="457200" y="1965960"/>
+            <a:ext cx="11277295" cy="1097280"/>
+          </a:xfrm>
+        </p:spPr>
+        <p:txBody>
+          <a:bodyPr wrap="square"/>
+          <a:lstStyle/>
+          <a:p>
+            <a:pPr algn="l">
+              <a:defRPr>
+                <a:latin typeface="Roboto"/>
+              </a:defRPr>
+            </a:pPr>
+            <a:r>
+              <a:rPr sz="3400" b="1">
+                <a:solidFill>
+                  <a:srgbClr val="25342A"/>
+                </a:solidFill>
+                <a:latin typeface="Roboto"/>
+              </a:rPr>
+              <a:t>What does the board need to see?</a:t>
+            </a:r>
+          </a:p>
+        </p:txBody>
+      </p:sp>
+      <p:sp>
+        <p:nvSpPr>
+          <p:cNvPr id="3" name="Rectangle 2"/>
           <p:cNvSpPr/>
           <p:nvPr/>
         </p:nvSpPr>
@@ -3150,7 +3674,7 @@
       </p:sp>
       <p:sp>
         <p:nvSpPr>
-          <p:cNvPr id="3" name="TextBox 2"/>
+          <p:cNvPr id="4" name="TextBox 3"/>
           <p:cNvSpPr txBox="1"/>
           <p:nvPr/>
         </p:nvSpPr>
@@ -3165,7 +3689,7 @@
           <a:noFill/>
         </p:spPr>
         <p:txBody>
-          <a:bodyPr wrap="square">
+          <a:bodyPr wrap="square" lIns="45720" rIns="45720">
             <a:spAutoFit/>
           </a:bodyPr>
           <a:lstStyle/>
@@ -3189,7 +3713,7 @@
       </p:sp>
       <p:sp>
         <p:nvSpPr>
-          <p:cNvPr id="4" name="TextBox 3"/>
+          <p:cNvPr id="5" name="TextBox 4"/>
           <p:cNvSpPr txBox="1"/>
           <p:nvPr/>
         </p:nvSpPr>
@@ -3204,7 +3728,7 @@
           <a:noFill/>
         </p:spPr>
         <p:txBody>
-          <a:bodyPr wrap="square">
+          <a:bodyPr wrap="square" lIns="45720" rIns="45720">
             <a:spAutoFit/>
           </a:bodyPr>
           <a:lstStyle/>
@@ -3228,14 +3752,14 @@
       </p:sp>
       <p:sp>
         <p:nvSpPr>
-          <p:cNvPr id="5" name="TextBox 4"/>
+          <p:cNvPr id="6" name="TextBox 5"/>
           <p:cNvSpPr txBox="1"/>
           <p:nvPr/>
         </p:nvSpPr>
         <p:spPr>
           <a:xfrm>
-            <a:off x="457200" y="2011680"/>
-            <a:ext cx="11247120" cy="1097280"/>
+            <a:off x="457200" y="3154680"/>
+            <a:ext cx="11277295" cy="457200"/>
           </a:xfrm>
           <a:prstGeom prst="rect">
             <a:avLst/>
@@ -3243,7 +3767,7 @@
           <a:noFill/>
         </p:spPr>
         <p:txBody>
-          <a:bodyPr wrap="square">
+          <a:bodyPr wrap="square" lIns="45720" rIns="45720">
             <a:spAutoFit/>
           </a:bodyPr>
           <a:lstStyle/>
@@ -3254,27 +3778,27 @@
               </a:defRPr>
             </a:pPr>
             <a:r>
-              <a:rPr sz="3400" b="1">
+              <a:rPr sz="1600" b="0">
                 <a:solidFill>
-                  <a:srgbClr val="25342A"/>
+                  <a:srgbClr val="5F6F63"/>
                 </a:solidFill>
                 <a:latin typeface="Roboto"/>
               </a:rPr>
-              <a:t>What does the board need to see?</a:t>
-            </a:r>
-          </a:p>
-        </p:txBody>
-      </p:sp>
-      <p:sp>
-        <p:nvSpPr>
-          <p:cNvPr id="6" name="TextBox 5"/>
+              <a:t>Sample Community Services Ltd</a:t>
+            </a:r>
+          </a:p>
+        </p:txBody>
+      </p:sp>
+      <p:sp>
+        <p:nvSpPr>
+          <p:cNvPr id="7" name="TextBox 6"/>
           <p:cNvSpPr txBox="1"/>
           <p:nvPr/>
         </p:nvSpPr>
         <p:spPr>
           <a:xfrm>
-            <a:off x="457200" y="3154680"/>
-            <a:ext cx="11247120" cy="457200"/>
+            <a:off x="457200" y="3703320"/>
+            <a:ext cx="11277295" cy="535940"/>
           </a:xfrm>
           <a:prstGeom prst="rect">
             <a:avLst/>
@@ -3282,7 +3806,7 @@
           <a:noFill/>
         </p:spPr>
         <p:txBody>
-          <a:bodyPr wrap="square">
+          <a:bodyPr wrap="square" lIns="45720" rIns="45720">
             <a:spAutoFit/>
           </a:bodyPr>
           <a:lstStyle/>
@@ -3293,27 +3817,27 @@
               </a:defRPr>
             </a:pPr>
             <a:r>
-              <a:rPr sz="1600" b="0">
+              <a:rPr sz="1400" b="0">
                 <a:solidFill>
-                  <a:srgbClr val="5F6F63"/>
+                  <a:srgbClr val="25342A"/>
                 </a:solidFill>
                 <a:latin typeface="Roboto"/>
               </a:rPr>
-              <a:t>Sample Community Services Ltd</a:t>
-            </a:r>
-          </a:p>
-        </p:txBody>
-      </p:sp>
-      <p:sp>
-        <p:nvSpPr>
-          <p:cNvPr id="7" name="TextBox 6"/>
+              <a:t>Period: August 2026. A one-page board summary for August 2026: the result, the money, the risks, and the decisions to make. The full statements are in the downloads.</a:t>
+            </a:r>
+          </a:p>
+        </p:txBody>
+      </p:sp>
+      <p:sp>
+        <p:nvSpPr>
+          <p:cNvPr id="8" name="TextBox 7"/>
           <p:cNvSpPr txBox="1"/>
           <p:nvPr/>
         </p:nvSpPr>
         <p:spPr>
           <a:xfrm>
-            <a:off x="457200" y="3703320"/>
-            <a:ext cx="11247120" cy="1097280"/>
+            <a:off x="457200" y="4330700"/>
+            <a:ext cx="11277295" cy="1097280"/>
           </a:xfrm>
           <a:prstGeom prst="rect">
             <a:avLst/>
@@ -3321,7 +3845,7 @@
           <a:noFill/>
         </p:spPr>
         <p:txBody>
-          <a:bodyPr wrap="square">
+          <a:bodyPr wrap="square" lIns="45720" rIns="45720">
             <a:spAutoFit/>
           </a:bodyPr>
           <a:lstStyle/>
@@ -3332,27 +3856,75 @@
               </a:defRPr>
             </a:pPr>
             <a:r>
-              <a:rPr sz="1400" b="0">
+              <a:rPr sz="1100" b="0">
                 <a:solidFill>
-                  <a:srgbClr val="25342A"/>
+                  <a:srgbClr val="5F6F63"/>
                 </a:solidFill>
                 <a:latin typeface="Roboto"/>
               </a:rPr>
-              <a:t>Period: August 2026. A one-page board summary for August 2026: the result, the money, the risks, and the decisions to make. The full statements are in the downloads.</a:t>
-            </a:r>
-          </a:p>
-        </p:txBody>
-      </p:sp>
-      <p:sp>
-        <p:nvSpPr>
-          <p:cNvPr id="8" name="TextBox 7"/>
+              <a:t>How final is this data?</a:t>
+            </a:r>
+          </a:p>
+          <a:p>
+            <a:pPr>
+              <a:defRPr>
+                <a:latin typeface="Roboto"/>
+              </a:defRPr>
+            </a:pPr>
+            <a:r>
+              <a:rPr sz="1100" b="0">
+                <a:solidFill>
+                  <a:srgbClr val="5F6F63"/>
+                </a:solidFill>
+                <a:latin typeface="Roboto"/>
+              </a:rPr>
+              <a:t>July 2026: Locked. July 2026 is locked (closed 4 Aug 2026). These numbers won't change.</a:t>
+            </a:r>
+          </a:p>
+          <a:p>
+            <a:pPr>
+              <a:defRPr>
+                <a:latin typeface="Roboto"/>
+              </a:defRPr>
+            </a:pPr>
+            <a:r>
+              <a:rPr sz="1100" b="0">
+                <a:solidFill>
+                  <a:srgbClr val="5F6F63"/>
+                </a:solidFill>
+                <a:latin typeface="Roboto"/>
+              </a:rPr>
+              <a:t>August 2026: Locked. August 2026 is locked (closed 2 Sep 2026). These numbers won't change.</a:t>
+            </a:r>
+          </a:p>
+          <a:p>
+            <a:pPr>
+              <a:defRPr>
+                <a:latin typeface="Roboto"/>
+              </a:defRPr>
+            </a:pPr>
+            <a:r>
+              <a:rPr sz="1100" b="0">
+                <a:solidFill>
+                  <a:srgbClr val="5F6F63"/>
+                </a:solidFill>
+                <a:latin typeface="Roboto"/>
+              </a:rPr>
+              <a:t>October 2026: Incomplete. October 2026 is still in progress: figures to 6 Oct only.</a:t>
+            </a:r>
+          </a:p>
+        </p:txBody>
+      </p:sp>
+      <p:sp>
+        <p:nvSpPr>
+          <p:cNvPr id="9" name="TextBox 8"/>
           <p:cNvSpPr txBox="1"/>
           <p:nvPr/>
         </p:nvSpPr>
         <p:spPr>
           <a:xfrm>
-            <a:off x="457200" y="4937760"/>
-            <a:ext cx="11247120" cy="1097280"/>
+            <a:off x="457200" y="6492240"/>
+            <a:ext cx="2926080" cy="274320"/>
           </a:xfrm>
           <a:prstGeom prst="rect">
             <a:avLst/>
@@ -3360,7 +3932,7 @@
           <a:noFill/>
         </p:spPr>
         <p:txBody>
-          <a:bodyPr wrap="square">
+          <a:bodyPr wrap="square" lIns="45720" rIns="45720">
             <a:spAutoFit/>
           </a:bodyPr>
           <a:lstStyle/>
@@ -3371,75 +3943,27 @@
               </a:defRPr>
             </a:pPr>
             <a:r>
-              <a:rPr sz="1100" b="0">
+              <a:rPr sz="900" b="0">
                 <a:solidFill>
                   <a:srgbClr val="5F6F63"/>
                 </a:solidFill>
                 <a:latin typeface="Roboto"/>
               </a:rPr>
-              <a:t>How final is this data?</a:t>
-            </a:r>
-          </a:p>
-          <a:p>
-            <a:pPr>
-              <a:defRPr>
-                <a:latin typeface="Roboto"/>
-              </a:defRPr>
-            </a:pPr>
-            <a:r>
-              <a:rPr sz="1100" b="0">
-                <a:solidFill>
-                  <a:srgbClr val="5F6F63"/>
-                </a:solidFill>
-                <a:latin typeface="Roboto"/>
-              </a:rPr>
-              <a:t>July 2026: Locked. July 2026 is locked (closed 4 Aug 2026). These numbers won't change.</a:t>
-            </a:r>
-          </a:p>
-          <a:p>
-            <a:pPr>
-              <a:defRPr>
-                <a:latin typeface="Roboto"/>
-              </a:defRPr>
-            </a:pPr>
-            <a:r>
-              <a:rPr sz="1100" b="0">
-                <a:solidFill>
-                  <a:srgbClr val="5F6F63"/>
-                </a:solidFill>
-                <a:latin typeface="Roboto"/>
-              </a:rPr>
-              <a:t>August 2026: Locked. August 2026 is locked (closed 2 Sep 2026). These numbers won't change.</a:t>
-            </a:r>
-          </a:p>
-          <a:p>
-            <a:pPr>
-              <a:defRPr>
-                <a:latin typeface="Roboto"/>
-              </a:defRPr>
-            </a:pPr>
-            <a:r>
-              <a:rPr sz="1100" b="0">
-                <a:solidFill>
-                  <a:srgbClr val="5F6F63"/>
-                </a:solidFill>
-                <a:latin typeface="Roboto"/>
-              </a:rPr>
-              <a:t>October 2026: Incomplete. October 2026 is still in progress: figures to 6 Oct only.</a:t>
-            </a:r>
-          </a:p>
-        </p:txBody>
-      </p:sp>
-      <p:sp>
-        <p:nvSpPr>
-          <p:cNvPr id="9" name="TextBox 8"/>
+              <a:t>board.pptx</a:t>
+            </a:r>
+          </a:p>
+        </p:txBody>
+      </p:sp>
+      <p:sp>
+        <p:nvSpPr>
+          <p:cNvPr id="10" name="TextBox 9"/>
           <p:cNvSpPr txBox="1"/>
           <p:nvPr/>
         </p:nvSpPr>
         <p:spPr>
           <a:xfrm>
-            <a:off x="457200" y="6492240"/>
-            <a:ext cx="3657600" cy="274320"/>
+            <a:off x="3108960" y="6492240"/>
+            <a:ext cx="5943600" cy="274320"/>
           </a:xfrm>
           <a:prstGeom prst="rect">
             <a:avLst/>
@@ -3447,12 +3971,12 @@
           <a:noFill/>
         </p:spPr>
         <p:txBody>
-          <a:bodyPr wrap="square">
+          <a:bodyPr wrap="square" lIns="45720" rIns="45720">
             <a:spAutoFit/>
           </a:bodyPr>
           <a:lstStyle/>
           <a:p>
-            <a:pPr>
+            <a:pPr algn="ctr">
               <a:defRPr>
                 <a:latin typeface="Roboto"/>
               </a:defRPr>
@@ -3464,46 +3988,7 @@
                 </a:solidFill>
                 <a:latin typeface="Roboto"/>
               </a:rPr>
-              <a:t>board.pptx</a:t>
-            </a:r>
-          </a:p>
-        </p:txBody>
-      </p:sp>
-      <p:sp>
-        <p:nvSpPr>
-          <p:cNvPr id="10" name="TextBox 9"/>
-          <p:cNvSpPr txBox="1"/>
-          <p:nvPr/>
-        </p:nvSpPr>
-        <p:spPr>
-          <a:xfrm>
-            <a:off x="4297680" y="6492240"/>
-            <a:ext cx="3657600" cy="274320"/>
-          </a:xfrm>
-          <a:prstGeom prst="rect">
-            <a:avLst/>
-          </a:prstGeom>
-          <a:noFill/>
-        </p:spPr>
-        <p:txBody>
-          <a:bodyPr wrap="square">
-            <a:spAutoFit/>
-          </a:bodyPr>
-          <a:lstStyle/>
-          <a:p>
-            <a:pPr algn="ctr">
-              <a:defRPr>
-                <a:latin typeface="Roboto"/>
-              </a:defRPr>
-            </a:pPr>
-            <a:r>
-              <a:rPr sz="900" b="0">
-                <a:solidFill>
-                  <a:srgbClr val="5F6F63"/>
-                </a:solidFill>
-                <a:latin typeface="Roboto"/>
-              </a:rPr>
-              <a:t>Data retrieved 2pm, Tue 6 Oct 2026 · Sample data</a:t>
+              <a:t>Data retrieved 2pm, Tue 6 Oct 2026 · Generated 8 Oct 2026, 9:35am · Sample data · Made with Python (python-pptx)</a:t>
             </a:r>
           </a:p>
         </p:txBody>
@@ -3525,7 +4010,7 @@
           <a:noFill/>
         </p:spPr>
         <p:txBody>
-          <a:bodyPr wrap="square">
+          <a:bodyPr wrap="square" lIns="45720" rIns="45720">
             <a:spAutoFit/>
           </a:bodyPr>
           <a:lstStyle/>
@@ -3542,7 +4027,7 @@
                 </a:solidFill>
                 <a:latin typeface="Roboto"/>
               </a:rPr>
-              <a:t>Slide 1 of 5</a:t>
+              <a:t>Slide 1 of 2</a:t>
             </a:r>
           </a:p>
         </p:txBody>
@@ -3567,7 +4052,44 @@
       <p:grpSpPr/>
       <p:sp>
         <p:nvSpPr>
-          <p:cNvPr id="2" name="Rectangle 1"/>
+          <p:cNvPr id="2" name="Title 1"/>
+          <p:cNvSpPr>
+            <a:spLocks noGrp="1"/>
+          </p:cNvSpPr>
+          <p:nvPr>
+            <p:ph type="title"/>
+          </p:nvPr>
+        </p:nvSpPr>
+        <p:spPr>
+          <a:xfrm>
+            <a:off x="457200" y="384048"/>
+            <a:ext cx="11277295" cy="475488"/>
+          </a:xfrm>
+        </p:spPr>
+        <p:txBody>
+          <a:bodyPr wrap="square" lIns="45720" rIns="45720" tIns="0" bIns="0" anchor="t"/>
+          <a:lstStyle/>
+          <a:p>
+            <a:pPr algn="l">
+              <a:defRPr>
+                <a:latin typeface="Roboto"/>
+              </a:defRPr>
+            </a:pPr>
+            <a:r>
+              <a:rPr sz="2400" b="1">
+                <a:solidFill>
+                  <a:srgbClr val="25342A"/>
+                </a:solidFill>
+                <a:latin typeface="Roboto"/>
+              </a:rPr>
+              <a:t>What does the board need to see?</a:t>
+            </a:r>
+          </a:p>
+        </p:txBody>
+      </p:sp>
+      <p:sp>
+        <p:nvSpPr>
+          <p:cNvPr id="3" name="Rectangle 2"/>
           <p:cNvSpPr/>
           <p:nvPr/>
         </p:nvSpPr>
@@ -3614,14 +4136,14 @@
       </p:sp>
       <p:sp>
         <p:nvSpPr>
-          <p:cNvPr id="3" name="TextBox 2"/>
+          <p:cNvPr id="4" name="TextBox 3"/>
           <p:cNvSpPr txBox="1"/>
           <p:nvPr/>
         </p:nvSpPr>
         <p:spPr>
           <a:xfrm>
-            <a:off x="457200" y="164592"/>
-            <a:ext cx="7315200" cy="274320"/>
+            <a:off x="457200" y="146304"/>
+            <a:ext cx="8229600" cy="256032"/>
           </a:xfrm>
           <a:prstGeom prst="rect">
             <a:avLst/>
@@ -3629,7 +4151,7 @@
           <a:noFill/>
         </p:spPr>
         <p:txBody>
-          <a:bodyPr wrap="square">
+          <a:bodyPr wrap="square" lIns="45720" rIns="45720">
             <a:spAutoFit/>
           </a:bodyPr>
           <a:lstStyle/>
@@ -3653,53 +4175,14 @@
       </p:sp>
       <p:sp>
         <p:nvSpPr>
-          <p:cNvPr id="4" name="TextBox 3"/>
-          <p:cNvSpPr txBox="1"/>
-          <p:nvPr/>
-        </p:nvSpPr>
-        <p:spPr>
-          <a:xfrm>
-            <a:off x="457200" y="411480"/>
-            <a:ext cx="11247120" cy="548640"/>
-          </a:xfrm>
-          <a:prstGeom prst="rect">
-            <a:avLst/>
-          </a:prstGeom>
-          <a:noFill/>
-        </p:spPr>
-        <p:txBody>
-          <a:bodyPr wrap="square">
-            <a:spAutoFit/>
-          </a:bodyPr>
-          <a:lstStyle/>
-          <a:p>
-            <a:pPr>
-              <a:defRPr>
-                <a:latin typeface="Roboto"/>
-              </a:defRPr>
-            </a:pPr>
-            <a:r>
-              <a:rPr sz="2400" b="1">
-                <a:solidFill>
-                  <a:srgbClr val="25342A"/>
-                </a:solidFill>
-                <a:latin typeface="Roboto"/>
-              </a:rPr>
-              <a:t>Headline numbers</a:t>
-            </a:r>
-          </a:p>
-        </p:txBody>
-      </p:sp>
-      <p:sp>
-        <p:nvSpPr>
           <p:cNvPr id="5" name="Rectangle 4"/>
           <p:cNvSpPr/>
           <p:nvPr/>
         </p:nvSpPr>
         <p:spPr>
           <a:xfrm>
-            <a:off x="457200" y="1645920"/>
-            <a:ext cx="2613583" cy="2011680"/>
+            <a:off x="457200" y="960120"/>
+            <a:ext cx="2647873" cy="1188720"/>
           </a:xfrm>
           <a:prstGeom prst="rect">
             <a:avLst/>
@@ -3747,8 +4230,8 @@
         </p:nvSpPr>
         <p:spPr>
           <a:xfrm>
-            <a:off x="640080" y="1783080"/>
-            <a:ext cx="2247823" cy="457200"/>
+            <a:off x="594360" y="1033272"/>
+            <a:ext cx="2373553" cy="384048"/>
           </a:xfrm>
           <a:prstGeom prst="rect">
             <a:avLst/>
@@ -3756,7 +4239,7 @@
           <a:noFill/>
         </p:spPr>
         <p:txBody>
-          <a:bodyPr wrap="square">
+          <a:bodyPr wrap="square" lIns="45720" rIns="45720">
             <a:spAutoFit/>
           </a:bodyPr>
           <a:lstStyle/>
@@ -3767,7 +4250,7 @@
               </a:defRPr>
             </a:pPr>
             <a:r>
-              <a:rPr sz="1200" b="0">
+              <a:rPr sz="1100" b="0">
                 <a:solidFill>
                   <a:srgbClr val="5F6F63"/>
                 </a:solidFill>
@@ -3786,8 +4269,8 @@
         </p:nvSpPr>
         <p:spPr>
           <a:xfrm>
-            <a:off x="640080" y="2240280"/>
-            <a:ext cx="2247823" cy="731520"/>
+            <a:off x="594360" y="1399032"/>
+            <a:ext cx="2373553" cy="502920"/>
           </a:xfrm>
           <a:prstGeom prst="rect">
             <a:avLst/>
@@ -3795,7 +4278,7 @@
           <a:noFill/>
         </p:spPr>
         <p:txBody>
-          <a:bodyPr wrap="square">
+          <a:bodyPr wrap="square" lIns="45720" rIns="45720">
             <a:spAutoFit/>
           </a:bodyPr>
           <a:lstStyle/>
@@ -3806,7 +4289,7 @@
               </a:defRPr>
             </a:pPr>
             <a:r>
-              <a:rPr sz="3000" b="1">
+              <a:rPr sz="2200" b="1">
                 <a:solidFill>
                   <a:srgbClr val="B42318"/>
                 </a:solidFill>
@@ -3825,8 +4308,8 @@
         </p:nvSpPr>
         <p:spPr>
           <a:xfrm>
-            <a:off x="640080" y="3017520"/>
-            <a:ext cx="2247823" cy="548640"/>
+            <a:off x="594360" y="1764792"/>
+            <a:ext cx="2373553" cy="329184"/>
           </a:xfrm>
           <a:prstGeom prst="rect">
             <a:avLst/>
@@ -3834,7 +4317,7 @@
           <a:noFill/>
         </p:spPr>
         <p:txBody>
-          <a:bodyPr wrap="square">
+          <a:bodyPr wrap="square" lIns="45720" rIns="45720">
             <a:spAutoFit/>
           </a:bodyPr>
           <a:lstStyle/>
@@ -3845,7 +4328,7 @@
               </a:defRPr>
             </a:pPr>
             <a:r>
-              <a:rPr sz="1100" b="0">
+              <a:rPr sz="1000" b="0">
                 <a:solidFill>
                   <a:srgbClr val="5F6F63"/>
                 </a:solidFill>
@@ -3864,8 +4347,8 @@
         </p:nvSpPr>
         <p:spPr>
           <a:xfrm>
-            <a:off x="3345103" y="1645920"/>
-            <a:ext cx="2613583" cy="2011680"/>
+            <a:off x="3333673" y="960120"/>
+            <a:ext cx="2647873" cy="1188720"/>
           </a:xfrm>
           <a:prstGeom prst="rect">
             <a:avLst/>
@@ -3913,8 +4396,8 @@
         </p:nvSpPr>
         <p:spPr>
           <a:xfrm>
-            <a:off x="3527983" y="1783080"/>
-            <a:ext cx="2247823" cy="457200"/>
+            <a:off x="3470833" y="1033272"/>
+            <a:ext cx="2373553" cy="384048"/>
           </a:xfrm>
           <a:prstGeom prst="rect">
             <a:avLst/>
@@ -3922,7 +4405,7 @@
           <a:noFill/>
         </p:spPr>
         <p:txBody>
-          <a:bodyPr wrap="square">
+          <a:bodyPr wrap="square" lIns="45720" rIns="45720">
             <a:spAutoFit/>
           </a:bodyPr>
           <a:lstStyle/>
@@ -3933,7 +4416,7 @@
               </a:defRPr>
             </a:pPr>
             <a:r>
-              <a:rPr sz="1200" b="0">
+              <a:rPr sz="1100" b="0">
                 <a:solidFill>
                   <a:srgbClr val="5F6F63"/>
                 </a:solidFill>
@@ -3952,8 +4435,8 @@
         </p:nvSpPr>
         <p:spPr>
           <a:xfrm>
-            <a:off x="3527983" y="2240280"/>
-            <a:ext cx="2247823" cy="731520"/>
+            <a:off x="3470833" y="1399032"/>
+            <a:ext cx="2373553" cy="502920"/>
           </a:xfrm>
           <a:prstGeom prst="rect">
             <a:avLst/>
@@ -3961,7 +4444,7 @@
           <a:noFill/>
         </p:spPr>
         <p:txBody>
-          <a:bodyPr wrap="square">
+          <a:bodyPr wrap="square" lIns="45720" rIns="45720">
             <a:spAutoFit/>
           </a:bodyPr>
           <a:lstStyle/>
@@ -3972,7 +4455,7 @@
               </a:defRPr>
             </a:pPr>
             <a:r>
-              <a:rPr sz="3000" b="1">
+              <a:rPr sz="2200" b="1">
                 <a:solidFill>
                   <a:srgbClr val="B42318"/>
                 </a:solidFill>
@@ -3991,8 +4474,8 @@
         </p:nvSpPr>
         <p:spPr>
           <a:xfrm>
-            <a:off x="3527983" y="3017520"/>
-            <a:ext cx="2247823" cy="548640"/>
+            <a:off x="3470833" y="1764792"/>
+            <a:ext cx="2373553" cy="329184"/>
           </a:xfrm>
           <a:prstGeom prst="rect">
             <a:avLst/>
@@ -4000,7 +4483,7 @@
           <a:noFill/>
         </p:spPr>
         <p:txBody>
-          <a:bodyPr wrap="square">
+          <a:bodyPr wrap="square" lIns="45720" rIns="45720">
             <a:spAutoFit/>
           </a:bodyPr>
           <a:lstStyle/>
@@ -4011,7 +4494,7 @@
               </a:defRPr>
             </a:pPr>
             <a:r>
-              <a:rPr sz="1100" b="0">
+              <a:rPr sz="1000" b="0">
                 <a:solidFill>
                   <a:srgbClr val="5F6F63"/>
                 </a:solidFill>
@@ -4030,8 +4513,8 @@
         </p:nvSpPr>
         <p:spPr>
           <a:xfrm>
-            <a:off x="6233007" y="1645920"/>
-            <a:ext cx="2613583" cy="2011680"/>
+            <a:off x="6210147" y="960120"/>
+            <a:ext cx="2647873" cy="1188720"/>
           </a:xfrm>
           <a:prstGeom prst="rect">
             <a:avLst/>
@@ -4079,8 +4562,8 @@
         </p:nvSpPr>
         <p:spPr>
           <a:xfrm>
-            <a:off x="6415887" y="1783080"/>
-            <a:ext cx="2247823" cy="457200"/>
+            <a:off x="6347307" y="1033272"/>
+            <a:ext cx="2373553" cy="384048"/>
           </a:xfrm>
           <a:prstGeom prst="rect">
             <a:avLst/>
@@ -4088,7 +4571,7 @@
           <a:noFill/>
         </p:spPr>
         <p:txBody>
-          <a:bodyPr wrap="square">
+          <a:bodyPr wrap="square" lIns="45720" rIns="45720">
             <a:spAutoFit/>
           </a:bodyPr>
           <a:lstStyle/>
@@ -4099,7 +4582,7 @@
               </a:defRPr>
             </a:pPr>
             <a:r>
-              <a:rPr sz="1200" b="0">
+              <a:rPr sz="1100" b="0">
                 <a:solidFill>
                   <a:srgbClr val="5F6F63"/>
                 </a:solidFill>
@@ -4118,8 +4601,8 @@
         </p:nvSpPr>
         <p:spPr>
           <a:xfrm>
-            <a:off x="6415887" y="2240280"/>
-            <a:ext cx="2247823" cy="731520"/>
+            <a:off x="6347307" y="1399032"/>
+            <a:ext cx="2373553" cy="502920"/>
           </a:xfrm>
           <a:prstGeom prst="rect">
             <a:avLst/>
@@ -4127,7 +4610,7 @@
           <a:noFill/>
         </p:spPr>
         <p:txBody>
-          <a:bodyPr wrap="square">
+          <a:bodyPr wrap="square" lIns="45720" rIns="45720">
             <a:spAutoFit/>
           </a:bodyPr>
           <a:lstStyle/>
@@ -4138,7 +4621,7 @@
               </a:defRPr>
             </a:pPr>
             <a:r>
-              <a:rPr sz="3000" b="1">
+              <a:rPr sz="2200" b="1">
                 <a:solidFill>
                   <a:srgbClr val="2F7A5D"/>
                 </a:solidFill>
@@ -4157,8 +4640,8 @@
         </p:nvSpPr>
         <p:spPr>
           <a:xfrm>
-            <a:off x="6415887" y="3017520"/>
-            <a:ext cx="2247823" cy="548640"/>
+            <a:off x="6347307" y="1764792"/>
+            <a:ext cx="2373553" cy="329184"/>
           </a:xfrm>
           <a:prstGeom prst="rect">
             <a:avLst/>
@@ -4166,7 +4649,7 @@
           <a:noFill/>
         </p:spPr>
         <p:txBody>
-          <a:bodyPr wrap="square">
+          <a:bodyPr wrap="square" lIns="45720" rIns="45720">
             <a:spAutoFit/>
           </a:bodyPr>
           <a:lstStyle/>
@@ -4177,7 +4660,7 @@
               </a:defRPr>
             </a:pPr>
             <a:r>
-              <a:rPr sz="1100" b="0">
+              <a:rPr sz="1000" b="0">
                 <a:solidFill>
                   <a:srgbClr val="5F6F63"/>
                 </a:solidFill>
@@ -4196,8 +4679,8 @@
         </p:nvSpPr>
         <p:spPr>
           <a:xfrm>
-            <a:off x="9120911" y="1645920"/>
-            <a:ext cx="2613583" cy="2011680"/>
+            <a:off x="9086621" y="960120"/>
+            <a:ext cx="2647873" cy="1188720"/>
           </a:xfrm>
           <a:prstGeom prst="rect">
             <a:avLst/>
@@ -4245,8 +4728,8 @@
         </p:nvSpPr>
         <p:spPr>
           <a:xfrm>
-            <a:off x="9303791" y="1783080"/>
-            <a:ext cx="2247823" cy="457200"/>
+            <a:off x="9223781" y="1033272"/>
+            <a:ext cx="2373553" cy="384048"/>
           </a:xfrm>
           <a:prstGeom prst="rect">
             <a:avLst/>
@@ -4254,7 +4737,7 @@
           <a:noFill/>
         </p:spPr>
         <p:txBody>
-          <a:bodyPr wrap="square">
+          <a:bodyPr wrap="square" lIns="45720" rIns="45720">
             <a:spAutoFit/>
           </a:bodyPr>
           <a:lstStyle/>
@@ -4265,7 +4748,7 @@
               </a:defRPr>
             </a:pPr>
             <a:r>
-              <a:rPr sz="1200" b="0">
+              <a:rPr sz="1100" b="0">
                 <a:solidFill>
                   <a:srgbClr val="5F6F63"/>
                 </a:solidFill>
@@ -4284,8 +4767,8 @@
         </p:nvSpPr>
         <p:spPr>
           <a:xfrm>
-            <a:off x="9303791" y="2240280"/>
-            <a:ext cx="2247823" cy="731520"/>
+            <a:off x="9223781" y="1399032"/>
+            <a:ext cx="2373553" cy="502920"/>
           </a:xfrm>
           <a:prstGeom prst="rect">
             <a:avLst/>
@@ -4293,7 +4776,7 @@
           <a:noFill/>
         </p:spPr>
         <p:txBody>
-          <a:bodyPr wrap="square">
+          <a:bodyPr wrap="square" lIns="45720" rIns="45720">
             <a:spAutoFit/>
           </a:bodyPr>
           <a:lstStyle/>
@@ -4304,7 +4787,7 @@
               </a:defRPr>
             </a:pPr>
             <a:r>
-              <a:rPr sz="3000" b="1">
+              <a:rPr sz="2200" b="1">
                 <a:solidFill>
                   <a:srgbClr val="2F7A5D"/>
                 </a:solidFill>
@@ -4323,8 +4806,8 @@
         </p:nvSpPr>
         <p:spPr>
           <a:xfrm>
-            <a:off x="9303791" y="3017520"/>
-            <a:ext cx="2247823" cy="548640"/>
+            <a:off x="9223781" y="1764792"/>
+            <a:ext cx="2373553" cy="329184"/>
           </a:xfrm>
           <a:prstGeom prst="rect">
             <a:avLst/>
@@ -4332,228 +4815,7 @@
           <a:noFill/>
         </p:spPr>
         <p:txBody>
-          <a:bodyPr wrap="square">
-            <a:spAutoFit/>
-          </a:bodyPr>
-          <a:lstStyle/>
-          <a:p>
-            <a:pPr>
-              <a:defRPr>
-                <a:latin typeface="Roboto"/>
-              </a:defRPr>
-            </a:pPr>
-            <a:r>
-              <a:rPr sz="1100" b="0">
-                <a:solidFill>
-                  <a:srgbClr val="5F6F63"/>
-                </a:solidFill>
-                <a:latin typeface="Roboto"/>
-              </a:rPr>
-              <a:t>July 11¢</a:t>
-            </a:r>
-          </a:p>
-        </p:txBody>
-      </p:sp>
-      <p:sp>
-        <p:nvSpPr>
-          <p:cNvPr id="21" name="TextBox 20"/>
-          <p:cNvSpPr txBox="1"/>
-          <p:nvPr/>
-        </p:nvSpPr>
-        <p:spPr>
-          <a:xfrm>
-            <a:off x="457200" y="6492240"/>
-            <a:ext cx="3657600" cy="274320"/>
-          </a:xfrm>
-          <a:prstGeom prst="rect">
-            <a:avLst/>
-          </a:prstGeom>
-          <a:noFill/>
-        </p:spPr>
-        <p:txBody>
-          <a:bodyPr wrap="square">
-            <a:spAutoFit/>
-          </a:bodyPr>
-          <a:lstStyle/>
-          <a:p>
-            <a:pPr>
-              <a:defRPr>
-                <a:latin typeface="Roboto"/>
-              </a:defRPr>
-            </a:pPr>
-            <a:r>
-              <a:rPr sz="900" b="0">
-                <a:solidFill>
-                  <a:srgbClr val="5F6F63"/>
-                </a:solidFill>
-                <a:latin typeface="Roboto"/>
-              </a:rPr>
-              <a:t>board.pptx</a:t>
-            </a:r>
-          </a:p>
-        </p:txBody>
-      </p:sp>
-      <p:sp>
-        <p:nvSpPr>
-          <p:cNvPr id="22" name="TextBox 21"/>
-          <p:cNvSpPr txBox="1"/>
-          <p:nvPr/>
-        </p:nvSpPr>
-        <p:spPr>
-          <a:xfrm>
-            <a:off x="4297680" y="6492240"/>
-            <a:ext cx="3657600" cy="274320"/>
-          </a:xfrm>
-          <a:prstGeom prst="rect">
-            <a:avLst/>
-          </a:prstGeom>
-          <a:noFill/>
-        </p:spPr>
-        <p:txBody>
-          <a:bodyPr wrap="square">
-            <a:spAutoFit/>
-          </a:bodyPr>
-          <a:lstStyle/>
-          <a:p>
-            <a:pPr algn="ctr">
-              <a:defRPr>
-                <a:latin typeface="Roboto"/>
-              </a:defRPr>
-            </a:pPr>
-            <a:r>
-              <a:rPr sz="900" b="0">
-                <a:solidFill>
-                  <a:srgbClr val="5F6F63"/>
-                </a:solidFill>
-                <a:latin typeface="Roboto"/>
-              </a:rPr>
-              <a:t>Data retrieved 2pm, Tue 6 Oct 2026 · Sample data</a:t>
-            </a:r>
-          </a:p>
-        </p:txBody>
-      </p:sp>
-      <p:sp>
-        <p:nvSpPr>
-          <p:cNvPr id="23" name="TextBox 22"/>
-          <p:cNvSpPr txBox="1"/>
-          <p:nvPr/>
-        </p:nvSpPr>
-        <p:spPr>
-          <a:xfrm>
-            <a:off x="8503920" y="6492240"/>
-            <a:ext cx="3200400" cy="274320"/>
-          </a:xfrm>
-          <a:prstGeom prst="rect">
-            <a:avLst/>
-          </a:prstGeom>
-          <a:noFill/>
-        </p:spPr>
-        <p:txBody>
-          <a:bodyPr wrap="square">
-            <a:spAutoFit/>
-          </a:bodyPr>
-          <a:lstStyle/>
-          <a:p>
-            <a:pPr algn="r">
-              <a:defRPr>
-                <a:latin typeface="Roboto"/>
-              </a:defRPr>
-            </a:pPr>
-            <a:r>
-              <a:rPr sz="900" b="0">
-                <a:solidFill>
-                  <a:srgbClr val="5F6F63"/>
-                </a:solidFill>
-                <a:latin typeface="Roboto"/>
-              </a:rPr>
-              <a:t>Slide 2 of 5</a:t>
-            </a:r>
-          </a:p>
-        </p:txBody>
-      </p:sp>
-    </p:spTree>
-  </p:cSld>
-  <p:clrMapOvr>
-    <a:masterClrMapping/>
-  </p:clrMapOvr>
-</p:sld>
-</file>
-
-<file path=ppt/slides/slide3.xml><?xml version="1.0" encoding="utf-8"?>
-<p:sld xmlns:a="http://schemas.openxmlformats.org/drawingml/2006/main" xmlns:p="http://schemas.openxmlformats.org/presentationml/2006/main" xmlns:r="http://schemas.openxmlformats.org/officeDocument/2006/relationships">
-  <p:cSld>
-    <p:spTree>
-      <p:nvGrpSpPr>
-        <p:cNvPr id="1" name=""/>
-        <p:cNvGrpSpPr/>
-        <p:nvPr/>
-      </p:nvGrpSpPr>
-      <p:grpSpPr/>
-      <p:sp>
-        <p:nvSpPr>
-          <p:cNvPr id="2" name="Rectangle 1"/>
-          <p:cNvSpPr/>
-          <p:nvPr/>
-        </p:nvSpPr>
-        <p:spPr>
-          <a:xfrm>
-            <a:off x="0" y="0"/>
-            <a:ext cx="12191695" cy="73152"/>
-          </a:xfrm>
-          <a:prstGeom prst="rect">
-            <a:avLst/>
-          </a:prstGeom>
-          <a:solidFill>
-            <a:srgbClr val="2F7A5D"/>
-          </a:solidFill>
-          <a:ln>
-            <a:noFill/>
-          </a:ln>
-        </p:spPr>
-        <p:style>
-          <a:lnRef idx="1">
-            <a:schemeClr val="accent1"/>
-          </a:lnRef>
-          <a:fillRef idx="3">
-            <a:schemeClr val="accent1"/>
-          </a:fillRef>
-          <a:effectRef idx="2">
-            <a:schemeClr val="accent1"/>
-          </a:effectRef>
-          <a:fontRef idx="minor">
-            <a:schemeClr val="lt1"/>
-          </a:fontRef>
-        </p:style>
-        <p:txBody>
-          <a:bodyPr rtlCol="0" anchor="ctr"/>
-          <a:lstStyle/>
-          <a:p>
-            <a:pPr algn="ctr">
-              <a:defRPr>
-                <a:latin typeface="Roboto"/>
-              </a:defRPr>
-            </a:pPr>
-          </a:p>
-        </p:txBody>
-      </p:sp>
-      <p:sp>
-        <p:nvSpPr>
-          <p:cNvPr id="3" name="TextBox 2"/>
-          <p:cNvSpPr txBox="1"/>
-          <p:nvPr/>
-        </p:nvSpPr>
-        <p:spPr>
-          <a:xfrm>
-            <a:off x="457200" y="164592"/>
-            <a:ext cx="7315200" cy="274320"/>
-          </a:xfrm>
-          <a:prstGeom prst="rect">
-            <a:avLst/>
-          </a:prstGeom>
-          <a:noFill/>
-        </p:spPr>
-        <p:txBody>
-          <a:bodyPr wrap="square">
+          <a:bodyPr wrap="square" lIns="45720" rIns="45720">
             <a:spAutoFit/>
           </a:bodyPr>
           <a:lstStyle/>
@@ -4570,60 +4832,21 @@
                 </a:solidFill>
                 <a:latin typeface="Roboto"/>
               </a:rPr>
-              <a:t>Sample Community Services Ltd · What does the board need to see?</a:t>
-            </a:r>
-          </a:p>
-        </p:txBody>
-      </p:sp>
-      <p:sp>
-        <p:nvSpPr>
-          <p:cNvPr id="4" name="TextBox 3"/>
-          <p:cNvSpPr txBox="1"/>
+              <a:t>July 11¢</a:t>
+            </a:r>
+          </a:p>
+        </p:txBody>
+      </p:sp>
+      <p:sp>
+        <p:nvSpPr>
+          <p:cNvPr id="21" name="Rectangle 20"/>
+          <p:cNvSpPr/>
           <p:nvPr/>
         </p:nvSpPr>
         <p:spPr>
           <a:xfrm>
-            <a:off x="457200" y="411480"/>
-            <a:ext cx="11247120" cy="548640"/>
-          </a:xfrm>
-          <a:prstGeom prst="rect">
-            <a:avLst/>
-          </a:prstGeom>
-          <a:noFill/>
-        </p:spPr>
-        <p:txBody>
-          <a:bodyPr wrap="square">
-            <a:spAutoFit/>
-          </a:bodyPr>
-          <a:lstStyle/>
-          <a:p>
-            <a:pPr>
-              <a:defRPr>
-                <a:latin typeface="Roboto"/>
-              </a:defRPr>
-            </a:pPr>
-            <a:r>
-              <a:rPr sz="2400" b="1">
-                <a:solidFill>
-                  <a:srgbClr val="25342A"/>
-                </a:solidFill>
-                <a:latin typeface="Roboto"/>
-              </a:rPr>
-              <a:t>What the board should note</a:t>
-            </a:r>
-          </a:p>
-        </p:txBody>
-      </p:sp>
-      <p:sp>
-        <p:nvSpPr>
-          <p:cNvPr id="5" name="Rectangle 4"/>
-          <p:cNvSpPr/>
-          <p:nvPr/>
-        </p:nvSpPr>
-        <p:spPr>
-          <a:xfrm>
-            <a:off x="457200" y="1554480"/>
-            <a:ext cx="11277295" cy="4389120"/>
+            <a:off x="457200" y="2286000"/>
+            <a:ext cx="5501487" cy="1889760"/>
           </a:xfrm>
           <a:prstGeom prst="rect">
             <a:avLst/>
@@ -4665,14 +4888,14 @@
       </p:sp>
       <p:sp>
         <p:nvSpPr>
-          <p:cNvPr id="6" name="TextBox 5"/>
+          <p:cNvPr id="22" name="TextBox 21"/>
           <p:cNvSpPr txBox="1"/>
           <p:nvPr/>
         </p:nvSpPr>
         <p:spPr>
           <a:xfrm>
-            <a:off x="685800" y="1691640"/>
-            <a:ext cx="10820095" cy="365760"/>
+            <a:off x="594360" y="2340864"/>
+            <a:ext cx="5227167" cy="274320"/>
           </a:xfrm>
           <a:prstGeom prst="rect">
             <a:avLst/>
@@ -4680,7 +4903,7 @@
           <a:noFill/>
         </p:spPr>
         <p:txBody>
-          <a:bodyPr wrap="square">
+          <a:bodyPr wrap="square" lIns="45720" rIns="45720">
             <a:spAutoFit/>
           </a:bodyPr>
           <a:lstStyle/>
@@ -4691,7 +4914,7 @@
               </a:defRPr>
             </a:pPr>
             <a:r>
-              <a:rPr sz="1100" b="1">
+              <a:rPr sz="1000" b="1">
                 <a:solidFill>
                   <a:srgbClr val="5F6F63"/>
                 </a:solidFill>
@@ -4704,14 +4927,14 @@
       </p:sp>
       <p:sp>
         <p:nvSpPr>
-          <p:cNvPr id="7" name="TextBox 6"/>
+          <p:cNvPr id="23" name="TextBox 22"/>
           <p:cNvSpPr txBox="1"/>
           <p:nvPr/>
         </p:nvSpPr>
         <p:spPr>
           <a:xfrm>
-            <a:off x="685800" y="2103120"/>
-            <a:ext cx="10820095" cy="3749039"/>
+            <a:off x="594360" y="2615184"/>
+            <a:ext cx="5227167" cy="1524000"/>
           </a:xfrm>
           <a:prstGeom prst="rect">
             <a:avLst/>
@@ -4719,7 +4942,7 @@
           <a:noFill/>
         </p:spPr>
         <p:txBody>
-          <a:bodyPr wrap="square">
+          <a:bodyPr wrap="square" lIns="45720" rIns="45720">
             <a:spAutoFit/>
           </a:bodyPr>
           <a:lstStyle/>
@@ -4730,7 +4953,7 @@
               </a:defRPr>
             </a:pPr>
             <a:r>
-              <a:rPr sz="1600" b="0">
+              <a:rPr sz="1200" b="0">
                 <a:solidFill>
                   <a:srgbClr val="25342A"/>
                 </a:solidFill>
@@ -4746,7 +4969,7 @@
               </a:defRPr>
             </a:pPr>
             <a:r>
-              <a:rPr sz="1600" b="0">
+              <a:rPr sz="1200" b="0">
                 <a:solidFill>
                   <a:srgbClr val="25342A"/>
                 </a:solidFill>
@@ -4762,7 +4985,7 @@
               </a:defRPr>
             </a:pPr>
             <a:r>
-              <a:rPr sz="1600" b="0">
+              <a:rPr sz="1200" b="0">
                 <a:solidFill>
                   <a:srgbClr val="25342A"/>
                 </a:solidFill>
@@ -4775,1718 +4998,20 @@
       </p:sp>
       <p:sp>
         <p:nvSpPr>
-          <p:cNvPr id="8" name="TextBox 7"/>
-          <p:cNvSpPr txBox="1"/>
+          <p:cNvPr id="24" name="Rectangle 23"/>
+          <p:cNvSpPr/>
           <p:nvPr/>
         </p:nvSpPr>
         <p:spPr>
           <a:xfrm>
-            <a:off x="457200" y="6492240"/>
-            <a:ext cx="3657600" cy="274320"/>
-          </a:xfrm>
-          <a:prstGeom prst="rect">
-            <a:avLst/>
-          </a:prstGeom>
-          <a:noFill/>
-        </p:spPr>
-        <p:txBody>
-          <a:bodyPr wrap="square">
-            <a:spAutoFit/>
-          </a:bodyPr>
-          <a:lstStyle/>
-          <a:p>
-            <a:pPr>
-              <a:defRPr>
-                <a:latin typeface="Roboto"/>
-              </a:defRPr>
-            </a:pPr>
-            <a:r>
-              <a:rPr sz="900" b="0">
-                <a:solidFill>
-                  <a:srgbClr val="5F6F63"/>
-                </a:solidFill>
-                <a:latin typeface="Roboto"/>
-              </a:rPr>
-              <a:t>board.pptx</a:t>
-            </a:r>
-          </a:p>
-        </p:txBody>
-      </p:sp>
-      <p:sp>
-        <p:nvSpPr>
-          <p:cNvPr id="9" name="TextBox 8"/>
-          <p:cNvSpPr txBox="1"/>
-          <p:nvPr/>
-        </p:nvSpPr>
-        <p:spPr>
-          <a:xfrm>
-            <a:off x="4297680" y="6492240"/>
-            <a:ext cx="3657600" cy="274320"/>
-          </a:xfrm>
-          <a:prstGeom prst="rect">
-            <a:avLst/>
-          </a:prstGeom>
-          <a:noFill/>
-        </p:spPr>
-        <p:txBody>
-          <a:bodyPr wrap="square">
-            <a:spAutoFit/>
-          </a:bodyPr>
-          <a:lstStyle/>
-          <a:p>
-            <a:pPr algn="ctr">
-              <a:defRPr>
-                <a:latin typeface="Roboto"/>
-              </a:defRPr>
-            </a:pPr>
-            <a:r>
-              <a:rPr sz="900" b="0">
-                <a:solidFill>
-                  <a:srgbClr val="5F6F63"/>
-                </a:solidFill>
-                <a:latin typeface="Roboto"/>
-              </a:rPr>
-              <a:t>Data retrieved 2pm, Tue 6 Oct 2026 · Sample data</a:t>
-            </a:r>
-          </a:p>
-        </p:txBody>
-      </p:sp>
-      <p:sp>
-        <p:nvSpPr>
-          <p:cNvPr id="10" name="TextBox 9"/>
-          <p:cNvSpPr txBox="1"/>
-          <p:nvPr/>
-        </p:nvSpPr>
-        <p:spPr>
-          <a:xfrm>
-            <a:off x="8503920" y="6492240"/>
-            <a:ext cx="3200400" cy="274320"/>
-          </a:xfrm>
-          <a:prstGeom prst="rect">
-            <a:avLst/>
-          </a:prstGeom>
-          <a:noFill/>
-        </p:spPr>
-        <p:txBody>
-          <a:bodyPr wrap="square">
-            <a:spAutoFit/>
-          </a:bodyPr>
-          <a:lstStyle/>
-          <a:p>
-            <a:pPr algn="r">
-              <a:defRPr>
-                <a:latin typeface="Roboto"/>
-              </a:defRPr>
-            </a:pPr>
-            <a:r>
-              <a:rPr sz="900" b="0">
-                <a:solidFill>
-                  <a:srgbClr val="5F6F63"/>
-                </a:solidFill>
-                <a:latin typeface="Roboto"/>
-              </a:rPr>
-              <a:t>Slide 3 of 5</a:t>
-            </a:r>
-          </a:p>
-        </p:txBody>
-      </p:sp>
-    </p:spTree>
-  </p:cSld>
-  <p:clrMapOvr>
-    <a:masterClrMapping/>
-  </p:clrMapOvr>
-</p:sld>
-</file>
-
-<file path=ppt/slides/slide4.xml><?xml version="1.0" encoding="utf-8"?>
-<p:sld xmlns:a="http://schemas.openxmlformats.org/drawingml/2006/main" xmlns:p="http://schemas.openxmlformats.org/presentationml/2006/main" xmlns:r="http://schemas.openxmlformats.org/officeDocument/2006/relationships">
-  <p:cSld>
-    <p:spTree>
-      <p:nvGrpSpPr>
-        <p:cNvPr id="1" name=""/>
-        <p:cNvGrpSpPr/>
-        <p:nvPr/>
-      </p:nvGrpSpPr>
-      <p:grpSpPr/>
-      <p:sp>
-        <p:nvSpPr>
-          <p:cNvPr id="2" name="Rectangle 1"/>
-          <p:cNvSpPr/>
-          <p:nvPr/>
-        </p:nvSpPr>
-        <p:spPr>
-          <a:xfrm>
-            <a:off x="0" y="0"/>
-            <a:ext cx="12191695" cy="73152"/>
+            <a:off x="6233007" y="2286000"/>
+            <a:ext cx="5501487" cy="1889760"/>
           </a:xfrm>
           <a:prstGeom prst="rect">
             <a:avLst/>
           </a:prstGeom>
           <a:solidFill>
-            <a:srgbClr val="2F7A5D"/>
-          </a:solidFill>
-          <a:ln>
-            <a:noFill/>
-          </a:ln>
-        </p:spPr>
-        <p:style>
-          <a:lnRef idx="1">
-            <a:schemeClr val="accent1"/>
-          </a:lnRef>
-          <a:fillRef idx="3">
-            <a:schemeClr val="accent1"/>
-          </a:fillRef>
-          <a:effectRef idx="2">
-            <a:schemeClr val="accent1"/>
-          </a:effectRef>
-          <a:fontRef idx="minor">
-            <a:schemeClr val="lt1"/>
-          </a:fontRef>
-        </p:style>
-        <p:txBody>
-          <a:bodyPr rtlCol="0" anchor="ctr"/>
-          <a:lstStyle/>
-          <a:p>
-            <a:pPr algn="ctr">
-              <a:defRPr>
-                <a:latin typeface="Roboto"/>
-              </a:defRPr>
-            </a:pPr>
-          </a:p>
-        </p:txBody>
-      </p:sp>
-      <p:sp>
-        <p:nvSpPr>
-          <p:cNvPr id="3" name="TextBox 2"/>
-          <p:cNvSpPr txBox="1"/>
-          <p:nvPr/>
-        </p:nvSpPr>
-        <p:spPr>
-          <a:xfrm>
-            <a:off x="457200" y="164592"/>
-            <a:ext cx="7315200" cy="274320"/>
-          </a:xfrm>
-          <a:prstGeom prst="rect">
-            <a:avLst/>
-          </a:prstGeom>
-          <a:noFill/>
-        </p:spPr>
-        <p:txBody>
-          <a:bodyPr wrap="square">
-            <a:spAutoFit/>
-          </a:bodyPr>
-          <a:lstStyle/>
-          <a:p>
-            <a:pPr>
-              <a:defRPr>
-                <a:latin typeface="Roboto"/>
-              </a:defRPr>
-            </a:pPr>
-            <a:r>
-              <a:rPr sz="1000" b="0">
-                <a:solidFill>
-                  <a:srgbClr val="5F6F63"/>
-                </a:solidFill>
-                <a:latin typeface="Roboto"/>
-              </a:rPr>
-              <a:t>Sample Community Services Ltd · What does the board need to see?</a:t>
-            </a:r>
-          </a:p>
-        </p:txBody>
-      </p:sp>
-      <p:sp>
-        <p:nvSpPr>
-          <p:cNvPr id="4" name="TextBox 3"/>
-          <p:cNvSpPr txBox="1"/>
-          <p:nvPr/>
-        </p:nvSpPr>
-        <p:spPr>
-          <a:xfrm>
-            <a:off x="457200" y="411480"/>
-            <a:ext cx="11247120" cy="548640"/>
-          </a:xfrm>
-          <a:prstGeom prst="rect">
-            <a:avLst/>
-          </a:prstGeom>
-          <a:noFill/>
-        </p:spPr>
-        <p:txBody>
-          <a:bodyPr wrap="square">
-            <a:spAutoFit/>
-          </a:bodyPr>
-          <a:lstStyle/>
-          <a:p>
-            <a:pPr>
-              <a:defRPr>
-                <a:latin typeface="Roboto"/>
-              </a:defRPr>
-            </a:pPr>
-            <a:r>
-              <a:rPr sz="2400" b="1">
-                <a:solidFill>
-                  <a:srgbClr val="25342A"/>
-                </a:solidFill>
-                <a:latin typeface="Roboto"/>
-              </a:rPr>
-              <a:t>Grants</a:t>
-            </a:r>
-          </a:p>
-        </p:txBody>
-      </p:sp>
-      <p:graphicFrame>
-        <p:nvGraphicFramePr>
-          <p:cNvPr id="5" name="Table 4"/>
-          <p:cNvGraphicFramePr>
-            <a:graphicFrameLocks noGrp="1"/>
-          </p:cNvGraphicFramePr>
-          <p:nvPr/>
-        </p:nvGraphicFramePr>
-        <p:xfrm>
-          <a:off x="457200" y="1188720"/>
-          <a:ext cx="11247120" cy="2304288"/>
-        </p:xfrm>
-        <a:graphic>
-          <a:graphicData uri="http://schemas.openxmlformats.org/drawingml/2006/table">
-            <a:tbl>
-              <a:tblPr firstRow="1" bandRow="1">
-                <a:tableStyleId>{5C22544A-7EE6-4342-B048-85BDC9FD1C3A}</a:tableStyleId>
-              </a:tblPr>
-              <a:tblGrid>
-                <a:gridCol w="1874520"/>
-                <a:gridCol w="1874520"/>
-                <a:gridCol w="1874520"/>
-                <a:gridCol w="1874520"/>
-                <a:gridCol w="1874520"/>
-                <a:gridCol w="1874520"/>
-              </a:tblGrid>
-              <a:tr h="329184">
-                <a:tc>
-                  <a:txBody>
-                    <a:bodyPr/>
-                    <a:lstStyle/>
-                    <a:p>
-                      <a:pPr>
-                        <a:defRPr>
-                          <a:latin typeface="Roboto"/>
-                        </a:defRPr>
-                      </a:pPr>
-                      <a:r>
-                        <a:rPr sz="1100" b="1">
-                          <a:solidFill>
-                            <a:srgbClr val="FFFFFF"/>
-                          </a:solidFill>
-                          <a:latin typeface="Roboto"/>
-                        </a:rPr>
-                        <a:t>Program</a:t>
-                      </a:r>
-                    </a:p>
-                  </a:txBody>
-                  <a:tcPr>
-                    <a:solidFill>
-                      <a:srgbClr val="2F7A5D"/>
-                    </a:solidFill>
-                  </a:tcPr>
-                </a:tc>
-                <a:tc>
-                  <a:txBody>
-                    <a:bodyPr/>
-                    <a:lstStyle/>
-                    <a:p>
-                      <a:pPr algn="r">
-                        <a:defRPr>
-                          <a:latin typeface="Roboto"/>
-                        </a:defRPr>
-                      </a:pPr>
-                      <a:r>
-                        <a:rPr sz="1100" b="1">
-                          <a:solidFill>
-                            <a:srgbClr val="FFFFFF"/>
-                          </a:solidFill>
-                          <a:latin typeface="Roboto"/>
-                        </a:rPr>
-                        <a:t>Spent to date</a:t>
-                      </a:r>
-                    </a:p>
-                  </a:txBody>
-                  <a:tcPr>
-                    <a:solidFill>
-                      <a:srgbClr val="2F7A5D"/>
-                    </a:solidFill>
-                  </a:tcPr>
-                </a:tc>
-                <a:tc>
-                  <a:txBody>
-                    <a:bodyPr/>
-                    <a:lstStyle/>
-                    <a:p>
-                      <a:pPr algn="r">
-                        <a:defRPr>
-                          <a:latin typeface="Roboto"/>
-                        </a:defRPr>
-                      </a:pPr>
-                      <a:r>
-                        <a:rPr sz="1100" b="1">
-                          <a:solidFill>
-                            <a:srgbClr val="FFFFFF"/>
-                          </a:solidFill>
-                          <a:latin typeface="Roboto"/>
-                        </a:rPr>
-                        <a:t>Budget to date</a:t>
-                      </a:r>
-                    </a:p>
-                  </a:txBody>
-                  <a:tcPr>
-                    <a:solidFill>
-                      <a:srgbClr val="2F7A5D"/>
-                    </a:solidFill>
-                  </a:tcPr>
-                </a:tc>
-                <a:tc>
-                  <a:txBody>
-                    <a:bodyPr/>
-                    <a:lstStyle/>
-                    <a:p>
-                      <a:pPr algn="r">
-                        <a:defRPr>
-                          <a:latin typeface="Roboto"/>
-                        </a:defRPr>
-                      </a:pPr>
-                      <a:r>
-                        <a:rPr sz="1100" b="1">
-                          <a:solidFill>
-                            <a:srgbClr val="FFFFFF"/>
-                          </a:solidFill>
-                          <a:latin typeface="Roboto"/>
-                        </a:rPr>
-                        <a:t>Against budget</a:t>
-                      </a:r>
-                    </a:p>
-                  </a:txBody>
-                  <a:tcPr>
-                    <a:solidFill>
-                      <a:srgbClr val="2F7A5D"/>
-                    </a:solidFill>
-                  </a:tcPr>
-                </a:tc>
-                <a:tc>
-                  <a:txBody>
-                    <a:bodyPr/>
-                    <a:lstStyle/>
-                    <a:p>
-                      <a:pPr algn="r">
-                        <a:defRPr>
-                          <a:latin typeface="Roboto"/>
-                        </a:defRPr>
-                      </a:pPr>
-                      <a:r>
-                        <a:rPr sz="1100" b="1">
-                          <a:solidFill>
-                            <a:srgbClr val="FFFFFF"/>
-                          </a:solidFill>
-                          <a:latin typeface="Roboto"/>
-                        </a:rPr>
-                        <a:t>Still to spend</a:t>
-                      </a:r>
-                    </a:p>
-                  </a:txBody>
-                  <a:tcPr>
-                    <a:solidFill>
-                      <a:srgbClr val="2F7A5D"/>
-                    </a:solidFill>
-                  </a:tcPr>
-                </a:tc>
-                <a:tc>
-                  <a:txBody>
-                    <a:bodyPr/>
-                    <a:lstStyle/>
-                    <a:p>
-                      <a:pPr algn="r">
-                        <a:defRPr>
-                          <a:latin typeface="Roboto"/>
-                        </a:defRPr>
-                      </a:pPr>
-                      <a:r>
-                        <a:rPr sz="1100" b="1">
-                          <a:solidFill>
-                            <a:srgbClr val="FFFFFF"/>
-                          </a:solidFill>
-                          <a:latin typeface="Roboto"/>
-                        </a:rPr>
-                        <a:t>Months left</a:t>
-                      </a:r>
-                    </a:p>
-                  </a:txBody>
-                  <a:tcPr>
-                    <a:solidFill>
-                      <a:srgbClr val="2F7A5D"/>
-                    </a:solidFill>
-                  </a:tcPr>
-                </a:tc>
-              </a:tr>
-              <a:tr h="329184">
-                <a:tc>
-                  <a:txBody>
-                    <a:bodyPr/>
-                    <a:lstStyle/>
-                    <a:p>
-                      <a:pPr>
-                        <a:defRPr>
-                          <a:latin typeface="Roboto"/>
-                        </a:defRPr>
-                      </a:pPr>
-                      <a:r>
-                        <a:rPr sz="1050">
-                          <a:solidFill>
-                            <a:srgbClr val="25342A"/>
-                          </a:solidFill>
-                          <a:latin typeface="Roboto"/>
-                        </a:rPr>
-                        <a:t>Housing support</a:t>
-                      </a:r>
-                    </a:p>
-                  </a:txBody>
-                  <a:tcPr>
-                    <a:solidFill>
-                      <a:srgbClr val="FFFFFF"/>
-                    </a:solidFill>
-                  </a:tcPr>
-                </a:tc>
-                <a:tc>
-                  <a:txBody>
-                    <a:bodyPr/>
-                    <a:lstStyle/>
-                    <a:p>
-                      <a:pPr algn="r">
-                        <a:defRPr>
-                          <a:latin typeface="Roboto"/>
-                        </a:defRPr>
-                      </a:pPr>
-                      <a:r>
-                        <a:rPr sz="1050">
-                          <a:solidFill>
-                            <a:srgbClr val="25342A"/>
-                          </a:solidFill>
-                          <a:latin typeface="Roboto"/>
-                        </a:rPr>
-                        <a:t>$226,500</a:t>
-                      </a:r>
-                    </a:p>
-                  </a:txBody>
-                  <a:tcPr>
-                    <a:solidFill>
-                      <a:srgbClr val="FFFFFF"/>
-                    </a:solidFill>
-                  </a:tcPr>
-                </a:tc>
-                <a:tc>
-                  <a:txBody>
-                    <a:bodyPr/>
-                    <a:lstStyle/>
-                    <a:p>
-                      <a:pPr algn="r">
-                        <a:defRPr>
-                          <a:latin typeface="Roboto"/>
-                        </a:defRPr>
-                      </a:pPr>
-                      <a:r>
-                        <a:rPr sz="1050">
-                          <a:solidFill>
-                            <a:srgbClr val="25342A"/>
-                          </a:solidFill>
-                          <a:latin typeface="Roboto"/>
-                        </a:rPr>
-                        <a:t>$240,000</a:t>
-                      </a:r>
-                    </a:p>
-                  </a:txBody>
-                  <a:tcPr>
-                    <a:solidFill>
-                      <a:srgbClr val="FFFFFF"/>
-                    </a:solidFill>
-                  </a:tcPr>
-                </a:tc>
-                <a:tc>
-                  <a:txBody>
-                    <a:bodyPr/>
-                    <a:lstStyle/>
-                    <a:p>
-                      <a:pPr algn="r">
-                        <a:defRPr>
-                          <a:latin typeface="Roboto"/>
-                        </a:defRPr>
-                      </a:pPr>
-                      <a:r>
-                        <a:rPr sz="1050">
-                          <a:solidFill>
-                            <a:srgbClr val="25342A"/>
-                          </a:solidFill>
-                          <a:latin typeface="Roboto"/>
-                        </a:rPr>
-                        <a:t>94.4%</a:t>
-                      </a:r>
-                    </a:p>
-                  </a:txBody>
-                  <a:tcPr>
-                    <a:solidFill>
-                      <a:srgbClr val="FFFFFF"/>
-                    </a:solidFill>
-                  </a:tcPr>
-                </a:tc>
-                <a:tc>
-                  <a:txBody>
-                    <a:bodyPr/>
-                    <a:lstStyle/>
-                    <a:p>
-                      <a:pPr algn="r">
-                        <a:defRPr>
-                          <a:latin typeface="Roboto"/>
-                        </a:defRPr>
-                      </a:pPr>
-                      <a:r>
-                        <a:rPr sz="1050">
-                          <a:solidFill>
-                            <a:srgbClr val="25342A"/>
-                          </a:solidFill>
-                          <a:latin typeface="Roboto"/>
-                        </a:rPr>
-                        <a:t>$133,500</a:t>
-                      </a:r>
-                    </a:p>
-                  </a:txBody>
-                  <a:tcPr>
-                    <a:solidFill>
-                      <a:srgbClr val="FFFFFF"/>
-                    </a:solidFill>
-                  </a:tcPr>
-                </a:tc>
-                <a:tc>
-                  <a:txBody>
-                    <a:bodyPr/>
-                    <a:lstStyle/>
-                    <a:p>
-                      <a:pPr algn="r">
-                        <a:defRPr>
-                          <a:latin typeface="Roboto"/>
-                        </a:defRPr>
-                      </a:pPr>
-                      <a:r>
-                        <a:rPr sz="1050">
-                          <a:solidFill>
-                            <a:srgbClr val="25342A"/>
-                          </a:solidFill>
-                          <a:latin typeface="Roboto"/>
-                        </a:rPr>
-                        <a:t>4</a:t>
-                      </a:r>
-                    </a:p>
-                  </a:txBody>
-                  <a:tcPr>
-                    <a:solidFill>
-                      <a:srgbClr val="FFFFFF"/>
-                    </a:solidFill>
-                  </a:tcPr>
-                </a:tc>
-              </a:tr>
-              <a:tr h="329184">
-                <a:tc>
-                  <a:txBody>
-                    <a:bodyPr/>
-                    <a:lstStyle/>
-                    <a:p>
-                      <a:pPr>
-                        <a:defRPr>
-                          <a:latin typeface="Roboto"/>
-                        </a:defRPr>
-                      </a:pPr>
-                      <a:r>
-                        <a:rPr sz="1050">
-                          <a:solidFill>
-                            <a:srgbClr val="25342A"/>
-                          </a:solidFill>
-                          <a:latin typeface="Roboto"/>
-                        </a:rPr>
-                        <a:t>Volunteer coordinator</a:t>
-                      </a:r>
-                    </a:p>
-                  </a:txBody>
-                  <a:tcPr>
-                    <a:solidFill>
-                      <a:srgbClr val="F7FAF7"/>
-                    </a:solidFill>
-                  </a:tcPr>
-                </a:tc>
-                <a:tc>
-                  <a:txBody>
-                    <a:bodyPr/>
-                    <a:lstStyle/>
-                    <a:p>
-                      <a:pPr algn="r">
-                        <a:defRPr>
-                          <a:latin typeface="Roboto"/>
-                        </a:defRPr>
-                      </a:pPr>
-                      <a:r>
-                        <a:rPr sz="1050">
-                          <a:solidFill>
-                            <a:srgbClr val="25342A"/>
-                          </a:solidFill>
-                          <a:latin typeface="Roboto"/>
-                        </a:rPr>
-                        <a:t>$18,000</a:t>
-                      </a:r>
-                    </a:p>
-                  </a:txBody>
-                  <a:tcPr>
-                    <a:solidFill>
-                      <a:srgbClr val="F7FAF7"/>
-                    </a:solidFill>
-                  </a:tcPr>
-                </a:tc>
-                <a:tc>
-                  <a:txBody>
-                    <a:bodyPr/>
-                    <a:lstStyle/>
-                    <a:p>
-                      <a:pPr algn="r">
-                        <a:defRPr>
-                          <a:latin typeface="Roboto"/>
-                        </a:defRPr>
-                      </a:pPr>
-                      <a:r>
-                        <a:rPr sz="1050">
-                          <a:solidFill>
-                            <a:srgbClr val="25342A"/>
-                          </a:solidFill>
-                          <a:latin typeface="Roboto"/>
-                        </a:rPr>
-                        <a:t>$18,000</a:t>
-                      </a:r>
-                    </a:p>
-                  </a:txBody>
-                  <a:tcPr>
-                    <a:solidFill>
-                      <a:srgbClr val="F7FAF7"/>
-                    </a:solidFill>
-                  </a:tcPr>
-                </a:tc>
-                <a:tc>
-                  <a:txBody>
-                    <a:bodyPr/>
-                    <a:lstStyle/>
-                    <a:p>
-                      <a:pPr algn="r">
-                        <a:defRPr>
-                          <a:latin typeface="Roboto"/>
-                        </a:defRPr>
-                      </a:pPr>
-                      <a:r>
-                        <a:rPr sz="1050">
-                          <a:solidFill>
-                            <a:srgbClr val="25342A"/>
-                          </a:solidFill>
-                          <a:latin typeface="Roboto"/>
-                        </a:rPr>
-                        <a:t>100.0%</a:t>
-                      </a:r>
-                    </a:p>
-                  </a:txBody>
-                  <a:tcPr>
-                    <a:solidFill>
-                      <a:srgbClr val="F7FAF7"/>
-                    </a:solidFill>
-                  </a:tcPr>
-                </a:tc>
-                <a:tc>
-                  <a:txBody>
-                    <a:bodyPr/>
-                    <a:lstStyle/>
-                    <a:p>
-                      <a:pPr algn="r">
-                        <a:defRPr>
-                          <a:latin typeface="Roboto"/>
-                        </a:defRPr>
-                      </a:pPr>
-                      <a:r>
-                        <a:rPr sz="1050">
-                          <a:solidFill>
-                            <a:srgbClr val="25342A"/>
-                          </a:solidFill>
-                          <a:latin typeface="Roboto"/>
-                        </a:rPr>
-                        <a:t>$18,000</a:t>
-                      </a:r>
-                    </a:p>
-                  </a:txBody>
-                  <a:tcPr>
-                    <a:solidFill>
-                      <a:srgbClr val="F7FAF7"/>
-                    </a:solidFill>
-                  </a:tcPr>
-                </a:tc>
-                <a:tc>
-                  <a:txBody>
-                    <a:bodyPr/>
-                    <a:lstStyle/>
-                    <a:p>
-                      <a:pPr algn="r">
-                        <a:defRPr>
-                          <a:latin typeface="Roboto"/>
-                        </a:defRPr>
-                      </a:pPr>
-                      <a:r>
-                        <a:rPr sz="1050">
-                          <a:solidFill>
-                            <a:srgbClr val="25342A"/>
-                          </a:solidFill>
-                          <a:latin typeface="Roboto"/>
-                        </a:rPr>
-                        <a:t>6</a:t>
-                      </a:r>
-                    </a:p>
-                  </a:txBody>
-                  <a:tcPr>
-                    <a:solidFill>
-                      <a:srgbClr val="F7FAF7"/>
-                    </a:solidFill>
-                  </a:tcPr>
-                </a:tc>
-              </a:tr>
-              <a:tr h="329184">
-                <a:tc>
-                  <a:txBody>
-                    <a:bodyPr/>
-                    <a:lstStyle/>
-                    <a:p>
-                      <a:pPr>
-                        <a:defRPr>
-                          <a:latin typeface="Roboto"/>
-                        </a:defRPr>
-                      </a:pPr>
-                      <a:r>
-                        <a:rPr sz="1050">
-                          <a:solidFill>
-                            <a:srgbClr val="25342A"/>
-                          </a:solidFill>
-                          <a:latin typeface="Roboto"/>
-                        </a:rPr>
-                        <a:t>Digital literacy</a:t>
-                      </a:r>
-                    </a:p>
-                  </a:txBody>
-                  <a:tcPr>
-                    <a:solidFill>
-                      <a:srgbClr val="FFFFFF"/>
-                    </a:solidFill>
-                  </a:tcPr>
-                </a:tc>
-                <a:tc>
-                  <a:txBody>
-                    <a:bodyPr/>
-                    <a:lstStyle/>
-                    <a:p>
-                      <a:pPr algn="r">
-                        <a:defRPr>
-                          <a:latin typeface="Roboto"/>
-                        </a:defRPr>
-                      </a:pPr>
-                      <a:r>
-                        <a:rPr sz="1050">
-                          <a:solidFill>
-                            <a:srgbClr val="25342A"/>
-                          </a:solidFill>
-                          <a:latin typeface="Roboto"/>
-                        </a:rPr>
-                        <a:t>$54,700</a:t>
-                      </a:r>
-                    </a:p>
-                  </a:txBody>
-                  <a:tcPr>
-                    <a:solidFill>
-                      <a:srgbClr val="FFFFFF"/>
-                    </a:solidFill>
-                  </a:tcPr>
-                </a:tc>
-                <a:tc>
-                  <a:txBody>
-                    <a:bodyPr/>
-                    <a:lstStyle/>
-                    <a:p>
-                      <a:pPr algn="r">
-                        <a:defRPr>
-                          <a:latin typeface="Roboto"/>
-                        </a:defRPr>
-                      </a:pPr>
-                      <a:r>
-                        <a:rPr sz="1050">
-                          <a:solidFill>
-                            <a:srgbClr val="25342A"/>
-                          </a:solidFill>
-                          <a:latin typeface="Roboto"/>
-                        </a:rPr>
-                        <a:t>$55,000</a:t>
-                      </a:r>
-                    </a:p>
-                  </a:txBody>
-                  <a:tcPr>
-                    <a:solidFill>
-                      <a:srgbClr val="FFFFFF"/>
-                    </a:solidFill>
-                  </a:tcPr>
-                </a:tc>
-                <a:tc>
-                  <a:txBody>
-                    <a:bodyPr/>
-                    <a:lstStyle/>
-                    <a:p>
-                      <a:pPr algn="r">
-                        <a:defRPr>
-                          <a:latin typeface="Roboto"/>
-                        </a:defRPr>
-                      </a:pPr>
-                      <a:r>
-                        <a:rPr sz="1050">
-                          <a:solidFill>
-                            <a:srgbClr val="25342A"/>
-                          </a:solidFill>
-                          <a:latin typeface="Roboto"/>
-                        </a:rPr>
-                        <a:t>99.5%</a:t>
-                      </a:r>
-                    </a:p>
-                  </a:txBody>
-                  <a:tcPr>
-                    <a:solidFill>
-                      <a:srgbClr val="FFFFFF"/>
-                    </a:solidFill>
-                  </a:tcPr>
-                </a:tc>
-                <a:tc>
-                  <a:txBody>
-                    <a:bodyPr/>
-                    <a:lstStyle/>
-                    <a:p>
-                      <a:pPr algn="r">
-                        <a:defRPr>
-                          <a:latin typeface="Roboto"/>
-                        </a:defRPr>
-                      </a:pPr>
-                      <a:r>
-                        <a:rPr sz="1050">
-                          <a:solidFill>
-                            <a:srgbClr val="25342A"/>
-                          </a:solidFill>
-                          <a:latin typeface="Roboto"/>
-                        </a:rPr>
-                        <a:t>$35,300</a:t>
-                      </a:r>
-                    </a:p>
-                  </a:txBody>
-                  <a:tcPr>
-                    <a:solidFill>
-                      <a:srgbClr val="FFFFFF"/>
-                    </a:solidFill>
-                  </a:tcPr>
-                </a:tc>
-                <a:tc>
-                  <a:txBody>
-                    <a:bodyPr/>
-                    <a:lstStyle/>
-                    <a:p>
-                      <a:pPr algn="r">
-                        <a:defRPr>
-                          <a:latin typeface="Roboto"/>
-                        </a:defRPr>
-                      </a:pPr>
-                      <a:r>
-                        <a:rPr sz="1050">
-                          <a:solidFill>
-                            <a:srgbClr val="25342A"/>
-                          </a:solidFill>
-                          <a:latin typeface="Roboto"/>
-                        </a:rPr>
-                        <a:t>7</a:t>
-                      </a:r>
-                    </a:p>
-                  </a:txBody>
-                  <a:tcPr>
-                    <a:solidFill>
-                      <a:srgbClr val="FFFFFF"/>
-                    </a:solidFill>
-                  </a:tcPr>
-                </a:tc>
-              </a:tr>
-              <a:tr h="329184">
-                <a:tc>
-                  <a:txBody>
-                    <a:bodyPr/>
-                    <a:lstStyle/>
-                    <a:p>
-                      <a:pPr>
-                        <a:defRPr>
-                          <a:latin typeface="Roboto"/>
-                        </a:defRPr>
-                      </a:pPr>
-                      <a:r>
-                        <a:rPr sz="1050">
-                          <a:solidFill>
-                            <a:srgbClr val="25342A"/>
-                          </a:solidFill>
-                          <a:latin typeface="Roboto"/>
-                        </a:rPr>
-                        <a:t>Mental health first aid</a:t>
-                      </a:r>
-                    </a:p>
-                  </a:txBody>
-                  <a:tcPr>
-                    <a:solidFill>
-                      <a:srgbClr val="F7FAF7"/>
-                    </a:solidFill>
-                  </a:tcPr>
-                </a:tc>
-                <a:tc>
-                  <a:txBody>
-                    <a:bodyPr/>
-                    <a:lstStyle/>
-                    <a:p>
-                      <a:pPr algn="r">
-                        <a:defRPr>
-                          <a:latin typeface="Roboto"/>
-                        </a:defRPr>
-                      </a:pPr>
-                      <a:r>
-                        <a:rPr sz="1050">
-                          <a:solidFill>
-                            <a:srgbClr val="25342A"/>
-                          </a:solidFill>
-                          <a:latin typeface="Roboto"/>
-                        </a:rPr>
-                        <a:t>$46,400</a:t>
-                      </a:r>
-                    </a:p>
-                  </a:txBody>
-                  <a:tcPr>
-                    <a:solidFill>
-                      <a:srgbClr val="F7FAF7"/>
-                    </a:solidFill>
-                  </a:tcPr>
-                </a:tc>
-                <a:tc>
-                  <a:txBody>
-                    <a:bodyPr/>
-                    <a:lstStyle/>
-                    <a:p>
-                      <a:pPr algn="r">
-                        <a:defRPr>
-                          <a:latin typeface="Roboto"/>
-                        </a:defRPr>
-                      </a:pPr>
-                      <a:r>
-                        <a:rPr sz="1050">
-                          <a:solidFill>
-                            <a:srgbClr val="25342A"/>
-                          </a:solidFill>
-                          <a:latin typeface="Roboto"/>
-                        </a:rPr>
-                        <a:t>$50,000</a:t>
-                      </a:r>
-                    </a:p>
-                  </a:txBody>
-                  <a:tcPr>
-                    <a:solidFill>
-                      <a:srgbClr val="F7FAF7"/>
-                    </a:solidFill>
-                  </a:tcPr>
-                </a:tc>
-                <a:tc>
-                  <a:txBody>
-                    <a:bodyPr/>
-                    <a:lstStyle/>
-                    <a:p>
-                      <a:pPr algn="r">
-                        <a:defRPr>
-                          <a:latin typeface="Roboto"/>
-                        </a:defRPr>
-                      </a:pPr>
-                      <a:r>
-                        <a:rPr sz="1050">
-                          <a:solidFill>
-                            <a:srgbClr val="25342A"/>
-                          </a:solidFill>
-                          <a:latin typeface="Roboto"/>
-                        </a:rPr>
-                        <a:t>92.8%</a:t>
-                      </a:r>
-                    </a:p>
-                  </a:txBody>
-                  <a:tcPr>
-                    <a:solidFill>
-                      <a:srgbClr val="F7FAF7"/>
-                    </a:solidFill>
-                  </a:tcPr>
-                </a:tc>
-                <a:tc>
-                  <a:txBody>
-                    <a:bodyPr/>
-                    <a:lstStyle/>
-                    <a:p>
-                      <a:pPr algn="r">
-                        <a:defRPr>
-                          <a:latin typeface="Roboto"/>
-                        </a:defRPr>
-                      </a:pPr>
-                      <a:r>
-                        <a:rPr sz="1050">
-                          <a:solidFill>
-                            <a:srgbClr val="25342A"/>
-                          </a:solidFill>
-                          <a:latin typeface="Roboto"/>
-                        </a:rPr>
-                        <a:t>$73,600</a:t>
-                      </a:r>
-                    </a:p>
-                  </a:txBody>
-                  <a:tcPr>
-                    <a:solidFill>
-                      <a:srgbClr val="F7FAF7"/>
-                    </a:solidFill>
-                  </a:tcPr>
-                </a:tc>
-                <a:tc>
-                  <a:txBody>
-                    <a:bodyPr/>
-                    <a:lstStyle/>
-                    <a:p>
-                      <a:pPr algn="r">
-                        <a:defRPr>
-                          <a:latin typeface="Roboto"/>
-                        </a:defRPr>
-                      </a:pPr>
-                      <a:r>
-                        <a:rPr sz="1050">
-                          <a:solidFill>
-                            <a:srgbClr val="25342A"/>
-                          </a:solidFill>
-                          <a:latin typeface="Roboto"/>
-                        </a:rPr>
-                        <a:t>7</a:t>
-                      </a:r>
-                    </a:p>
-                  </a:txBody>
-                  <a:tcPr>
-                    <a:solidFill>
-                      <a:srgbClr val="F7FAF7"/>
-                    </a:solidFill>
-                  </a:tcPr>
-                </a:tc>
-              </a:tr>
-              <a:tr h="329184">
-                <a:tc>
-                  <a:txBody>
-                    <a:bodyPr/>
-                    <a:lstStyle/>
-                    <a:p>
-                      <a:pPr>
-                        <a:defRPr>
-                          <a:latin typeface="Roboto"/>
-                        </a:defRPr>
-                      </a:pPr>
-                      <a:r>
-                        <a:rPr sz="1050">
-                          <a:solidFill>
-                            <a:srgbClr val="25342A"/>
-                          </a:solidFill>
-                          <a:latin typeface="Roboto"/>
-                        </a:rPr>
-                        <a:t>Youth outreach</a:t>
-                      </a:r>
-                    </a:p>
-                  </a:txBody>
-                  <a:tcPr>
-                    <a:solidFill>
-                      <a:srgbClr val="FFFFFF"/>
-                    </a:solidFill>
-                  </a:tcPr>
-                </a:tc>
-                <a:tc>
-                  <a:txBody>
-                    <a:bodyPr/>
-                    <a:lstStyle/>
-                    <a:p>
-                      <a:pPr algn="r">
-                        <a:defRPr>
-                          <a:latin typeface="Roboto"/>
-                        </a:defRPr>
-                      </a:pPr>
-                      <a:r>
-                        <a:rPr sz="1050">
-                          <a:solidFill>
-                            <a:srgbClr val="25342A"/>
-                          </a:solidFill>
-                          <a:latin typeface="Roboto"/>
-                        </a:rPr>
-                        <a:t>$283,500</a:t>
-                      </a:r>
-                    </a:p>
-                  </a:txBody>
-                  <a:tcPr>
-                    <a:solidFill>
-                      <a:srgbClr val="FFFFFF"/>
-                    </a:solidFill>
-                  </a:tcPr>
-                </a:tc>
-                <a:tc>
-                  <a:txBody>
-                    <a:bodyPr/>
-                    <a:lstStyle/>
-                    <a:p>
-                      <a:pPr algn="r">
-                        <a:defRPr>
-                          <a:latin typeface="Roboto"/>
-                        </a:defRPr>
-                      </a:pPr>
-                      <a:r>
-                        <a:rPr sz="1050">
-                          <a:solidFill>
-                            <a:srgbClr val="25342A"/>
-                          </a:solidFill>
-                          <a:latin typeface="Roboto"/>
-                        </a:rPr>
-                        <a:t>$280,000</a:t>
-                      </a:r>
-                    </a:p>
-                  </a:txBody>
-                  <a:tcPr>
-                    <a:solidFill>
-                      <a:srgbClr val="FFFFFF"/>
-                    </a:solidFill>
-                  </a:tcPr>
-                </a:tc>
-                <a:tc>
-                  <a:txBody>
-                    <a:bodyPr/>
-                    <a:lstStyle/>
-                    <a:p>
-                      <a:pPr algn="r">
-                        <a:defRPr>
-                          <a:latin typeface="Roboto"/>
-                        </a:defRPr>
-                      </a:pPr>
-                      <a:r>
-                        <a:rPr sz="1050">
-                          <a:solidFill>
-                            <a:srgbClr val="25342A"/>
-                          </a:solidFill>
-                          <a:latin typeface="Roboto"/>
-                        </a:rPr>
-                        <a:t>101.2%</a:t>
-                      </a:r>
-                    </a:p>
-                  </a:txBody>
-                  <a:tcPr>
-                    <a:solidFill>
-                      <a:srgbClr val="FFFFFF"/>
-                    </a:solidFill>
-                  </a:tcPr>
-                </a:tc>
-                <a:tc>
-                  <a:txBody>
-                    <a:bodyPr/>
-                    <a:lstStyle/>
-                    <a:p>
-                      <a:pPr algn="r">
-                        <a:defRPr>
-                          <a:latin typeface="Roboto"/>
-                        </a:defRPr>
-                      </a:pPr>
-                      <a:r>
-                        <a:rPr sz="1050">
-                          <a:solidFill>
-                            <a:srgbClr val="25342A"/>
-                          </a:solidFill>
-                          <a:latin typeface="Roboto"/>
-                        </a:rPr>
-                        <a:t>$196,500</a:t>
-                      </a:r>
-                    </a:p>
-                  </a:txBody>
-                  <a:tcPr>
-                    <a:solidFill>
-                      <a:srgbClr val="FFFFFF"/>
-                    </a:solidFill>
-                  </a:tcPr>
-                </a:tc>
-                <a:tc>
-                  <a:txBody>
-                    <a:bodyPr/>
-                    <a:lstStyle/>
-                    <a:p>
-                      <a:pPr algn="r">
-                        <a:defRPr>
-                          <a:latin typeface="Roboto"/>
-                        </a:defRPr>
-                      </a:pPr>
-                      <a:r>
-                        <a:rPr sz="1050">
-                          <a:solidFill>
-                            <a:srgbClr val="25342A"/>
-                          </a:solidFill>
-                          <a:latin typeface="Roboto"/>
-                        </a:rPr>
-                        <a:t>10</a:t>
-                      </a:r>
-                    </a:p>
-                  </a:txBody>
-                  <a:tcPr>
-                    <a:solidFill>
-                      <a:srgbClr val="FFFFFF"/>
-                    </a:solidFill>
-                  </a:tcPr>
-                </a:tc>
-              </a:tr>
-              <a:tr h="329184">
-                <a:tc>
-                  <a:txBody>
-                    <a:bodyPr/>
-                    <a:lstStyle/>
-                    <a:p>
-                      <a:pPr>
-                        <a:defRPr>
-                          <a:latin typeface="Roboto"/>
-                        </a:defRPr>
-                      </a:pPr>
-                      <a:r>
-                        <a:rPr sz="1050">
-                          <a:solidFill>
-                            <a:srgbClr val="25342A"/>
-                          </a:solidFill>
-                          <a:latin typeface="Roboto"/>
-                        </a:rPr>
-                        <a:t>Community meals</a:t>
-                      </a:r>
-                    </a:p>
-                  </a:txBody>
-                  <a:tcPr>
-                    <a:solidFill>
-                      <a:srgbClr val="F7FAF7"/>
-                    </a:solidFill>
-                  </a:tcPr>
-                </a:tc>
-                <a:tc>
-                  <a:txBody>
-                    <a:bodyPr/>
-                    <a:lstStyle/>
-                    <a:p>
-                      <a:pPr algn="r">
-                        <a:defRPr>
-                          <a:latin typeface="Roboto"/>
-                        </a:defRPr>
-                      </a:pPr>
-                      <a:r>
-                        <a:rPr sz="1050">
-                          <a:solidFill>
-                            <a:srgbClr val="25342A"/>
-                          </a:solidFill>
-                          <a:latin typeface="Roboto"/>
-                        </a:rPr>
-                        <a:t>$7,700</a:t>
-                      </a:r>
-                    </a:p>
-                  </a:txBody>
-                  <a:tcPr>
-                    <a:solidFill>
-                      <a:srgbClr val="F7FAF7"/>
-                    </a:solidFill>
-                  </a:tcPr>
-                </a:tc>
-                <a:tc>
-                  <a:txBody>
-                    <a:bodyPr/>
-                    <a:lstStyle/>
-                    <a:p>
-                      <a:pPr algn="r">
-                        <a:defRPr>
-                          <a:latin typeface="Roboto"/>
-                        </a:defRPr>
-                      </a:pPr>
-                      <a:r>
-                        <a:rPr sz="1050">
-                          <a:solidFill>
-                            <a:srgbClr val="25342A"/>
-                          </a:solidFill>
-                          <a:latin typeface="Roboto"/>
-                        </a:rPr>
-                        <a:t>$8,000</a:t>
-                      </a:r>
-                    </a:p>
-                  </a:txBody>
-                  <a:tcPr>
-                    <a:solidFill>
-                      <a:srgbClr val="F7FAF7"/>
-                    </a:solidFill>
-                  </a:tcPr>
-                </a:tc>
-                <a:tc>
-                  <a:txBody>
-                    <a:bodyPr/>
-                    <a:lstStyle/>
-                    <a:p>
-                      <a:pPr algn="r">
-                        <a:defRPr>
-                          <a:latin typeface="Roboto"/>
-                        </a:defRPr>
-                      </a:pPr>
-                      <a:r>
-                        <a:rPr sz="1050">
-                          <a:solidFill>
-                            <a:srgbClr val="25342A"/>
-                          </a:solidFill>
-                          <a:latin typeface="Roboto"/>
-                        </a:rPr>
-                        <a:t>96.2%</a:t>
-                      </a:r>
-                    </a:p>
-                  </a:txBody>
-                  <a:tcPr>
-                    <a:solidFill>
-                      <a:srgbClr val="F7FAF7"/>
-                    </a:solidFill>
-                  </a:tcPr>
-                </a:tc>
-                <a:tc>
-                  <a:txBody>
-                    <a:bodyPr/>
-                    <a:lstStyle/>
-                    <a:p>
-                      <a:pPr algn="r">
-                        <a:defRPr>
-                          <a:latin typeface="Roboto"/>
-                        </a:defRPr>
-                      </a:pPr>
-                      <a:r>
-                        <a:rPr sz="1050">
-                          <a:solidFill>
-                            <a:srgbClr val="25342A"/>
-                          </a:solidFill>
-                          <a:latin typeface="Roboto"/>
-                        </a:rPr>
-                        <a:t>$40,300</a:t>
-                      </a:r>
-                    </a:p>
-                  </a:txBody>
-                  <a:tcPr>
-                    <a:solidFill>
-                      <a:srgbClr val="F7FAF7"/>
-                    </a:solidFill>
-                  </a:tcPr>
-                </a:tc>
-                <a:tc>
-                  <a:txBody>
-                    <a:bodyPr/>
-                    <a:lstStyle/>
-                    <a:p>
-                      <a:pPr algn="r">
-                        <a:defRPr>
-                          <a:latin typeface="Roboto"/>
-                        </a:defRPr>
-                      </a:pPr>
-                      <a:r>
-                        <a:rPr sz="1050">
-                          <a:solidFill>
-                            <a:srgbClr val="25342A"/>
-                          </a:solidFill>
-                          <a:latin typeface="Roboto"/>
-                        </a:rPr>
-                        <a:t>10</a:t>
-                      </a:r>
-                    </a:p>
-                  </a:txBody>
-                  <a:tcPr>
-                    <a:solidFill>
-                      <a:srgbClr val="F7FAF7"/>
-                    </a:solidFill>
-                  </a:tcPr>
-                </a:tc>
-              </a:tr>
-            </a:tbl>
-          </a:graphicData>
-        </a:graphic>
-      </p:graphicFrame>
-      <p:sp>
-        <p:nvSpPr>
-          <p:cNvPr id="6" name="TextBox 5"/>
-          <p:cNvSpPr txBox="1"/>
-          <p:nvPr/>
-        </p:nvSpPr>
-        <p:spPr>
-          <a:xfrm>
-            <a:off x="457200" y="6492240"/>
-            <a:ext cx="3657600" cy="274320"/>
-          </a:xfrm>
-          <a:prstGeom prst="rect">
-            <a:avLst/>
-          </a:prstGeom>
-          <a:noFill/>
-        </p:spPr>
-        <p:txBody>
-          <a:bodyPr wrap="square">
-            <a:spAutoFit/>
-          </a:bodyPr>
-          <a:lstStyle/>
-          <a:p>
-            <a:pPr>
-              <a:defRPr>
-                <a:latin typeface="Roboto"/>
-              </a:defRPr>
-            </a:pPr>
-            <a:r>
-              <a:rPr sz="900" b="0">
-                <a:solidFill>
-                  <a:srgbClr val="5F6F63"/>
-                </a:solidFill>
-                <a:latin typeface="Roboto"/>
-              </a:rPr>
-              <a:t>board.pptx</a:t>
-            </a:r>
-          </a:p>
-        </p:txBody>
-      </p:sp>
-      <p:sp>
-        <p:nvSpPr>
-          <p:cNvPr id="7" name="TextBox 6"/>
-          <p:cNvSpPr txBox="1"/>
-          <p:nvPr/>
-        </p:nvSpPr>
-        <p:spPr>
-          <a:xfrm>
-            <a:off x="4297680" y="6492240"/>
-            <a:ext cx="3657600" cy="274320"/>
-          </a:xfrm>
-          <a:prstGeom prst="rect">
-            <a:avLst/>
-          </a:prstGeom>
-          <a:noFill/>
-        </p:spPr>
-        <p:txBody>
-          <a:bodyPr wrap="square">
-            <a:spAutoFit/>
-          </a:bodyPr>
-          <a:lstStyle/>
-          <a:p>
-            <a:pPr algn="ctr">
-              <a:defRPr>
-                <a:latin typeface="Roboto"/>
-              </a:defRPr>
-            </a:pPr>
-            <a:r>
-              <a:rPr sz="900" b="0">
-                <a:solidFill>
-                  <a:srgbClr val="5F6F63"/>
-                </a:solidFill>
-                <a:latin typeface="Roboto"/>
-              </a:rPr>
-              <a:t>Data retrieved 2pm, Tue 6 Oct 2026 · Sample data</a:t>
-            </a:r>
-          </a:p>
-        </p:txBody>
-      </p:sp>
-      <p:sp>
-        <p:nvSpPr>
-          <p:cNvPr id="8" name="TextBox 7"/>
-          <p:cNvSpPr txBox="1"/>
-          <p:nvPr/>
-        </p:nvSpPr>
-        <p:spPr>
-          <a:xfrm>
-            <a:off x="8503920" y="6492240"/>
-            <a:ext cx="3200400" cy="274320"/>
-          </a:xfrm>
-          <a:prstGeom prst="rect">
-            <a:avLst/>
-          </a:prstGeom>
-          <a:noFill/>
-        </p:spPr>
-        <p:txBody>
-          <a:bodyPr wrap="square">
-            <a:spAutoFit/>
-          </a:bodyPr>
-          <a:lstStyle/>
-          <a:p>
-            <a:pPr algn="r">
-              <a:defRPr>
-                <a:latin typeface="Roboto"/>
-              </a:defRPr>
-            </a:pPr>
-            <a:r>
-              <a:rPr sz="900" b="0">
-                <a:solidFill>
-                  <a:srgbClr val="5F6F63"/>
-                </a:solidFill>
-                <a:latin typeface="Roboto"/>
-              </a:rPr>
-              <a:t>Slide 4 of 5</a:t>
-            </a:r>
-          </a:p>
-        </p:txBody>
-      </p:sp>
-    </p:spTree>
-  </p:cSld>
-  <p:clrMapOvr>
-    <a:masterClrMapping/>
-  </p:clrMapOvr>
-</p:sld>
-</file>
-
-<file path=ppt/slides/slide5.xml><?xml version="1.0" encoding="utf-8"?>
-<p:sld xmlns:a="http://schemas.openxmlformats.org/drawingml/2006/main" xmlns:p="http://schemas.openxmlformats.org/presentationml/2006/main" xmlns:r="http://schemas.openxmlformats.org/officeDocument/2006/relationships">
-  <p:cSld>
-    <p:spTree>
-      <p:nvGrpSpPr>
-        <p:cNvPr id="1" name=""/>
-        <p:cNvGrpSpPr/>
-        <p:nvPr/>
-      </p:nvGrpSpPr>
-      <p:grpSpPr/>
-      <p:sp>
-        <p:nvSpPr>
-          <p:cNvPr id="2" name="Rectangle 1"/>
-          <p:cNvSpPr/>
-          <p:nvPr/>
-        </p:nvSpPr>
-        <p:spPr>
-          <a:xfrm>
-            <a:off x="0" y="0"/>
-            <a:ext cx="12191695" cy="73152"/>
-          </a:xfrm>
-          <a:prstGeom prst="rect">
-            <a:avLst/>
-          </a:prstGeom>
-          <a:solidFill>
-            <a:srgbClr val="2F7A5D"/>
-          </a:solidFill>
-          <a:ln>
-            <a:noFill/>
-          </a:ln>
-        </p:spPr>
-        <p:style>
-          <a:lnRef idx="1">
-            <a:schemeClr val="accent1"/>
-          </a:lnRef>
-          <a:fillRef idx="3">
-            <a:schemeClr val="accent1"/>
-          </a:fillRef>
-          <a:effectRef idx="2">
-            <a:schemeClr val="accent1"/>
-          </a:effectRef>
-          <a:fontRef idx="minor">
-            <a:schemeClr val="lt1"/>
-          </a:fontRef>
-        </p:style>
-        <p:txBody>
-          <a:bodyPr rtlCol="0" anchor="ctr"/>
-          <a:lstStyle/>
-          <a:p>
-            <a:pPr algn="ctr">
-              <a:defRPr>
-                <a:latin typeface="Roboto"/>
-              </a:defRPr>
-            </a:pPr>
-          </a:p>
-        </p:txBody>
-      </p:sp>
-      <p:sp>
-        <p:nvSpPr>
-          <p:cNvPr id="3" name="TextBox 2"/>
-          <p:cNvSpPr txBox="1"/>
-          <p:nvPr/>
-        </p:nvSpPr>
-        <p:spPr>
-          <a:xfrm>
-            <a:off x="457200" y="164592"/>
-            <a:ext cx="7315200" cy="274320"/>
-          </a:xfrm>
-          <a:prstGeom prst="rect">
-            <a:avLst/>
-          </a:prstGeom>
-          <a:noFill/>
-        </p:spPr>
-        <p:txBody>
-          <a:bodyPr wrap="square">
-            <a:spAutoFit/>
-          </a:bodyPr>
-          <a:lstStyle/>
-          <a:p>
-            <a:pPr>
-              <a:defRPr>
-                <a:latin typeface="Roboto"/>
-              </a:defRPr>
-            </a:pPr>
-            <a:r>
-              <a:rPr sz="1000" b="0">
-                <a:solidFill>
-                  <a:srgbClr val="5F6F63"/>
-                </a:solidFill>
-                <a:latin typeface="Roboto"/>
-              </a:rPr>
-              <a:t>Sample Community Services Ltd · What does the board need to see?</a:t>
-            </a:r>
-          </a:p>
-        </p:txBody>
-      </p:sp>
-      <p:sp>
-        <p:nvSpPr>
-          <p:cNvPr id="4" name="TextBox 3"/>
-          <p:cNvSpPr txBox="1"/>
-          <p:nvPr/>
-        </p:nvSpPr>
-        <p:spPr>
-          <a:xfrm>
-            <a:off x="457200" y="411480"/>
-            <a:ext cx="11247120" cy="548640"/>
-          </a:xfrm>
-          <a:prstGeom prst="rect">
-            <a:avLst/>
-          </a:prstGeom>
-          <a:noFill/>
-        </p:spPr>
-        <p:txBody>
-          <a:bodyPr wrap="square">
-            <a:spAutoFit/>
-          </a:bodyPr>
-          <a:lstStyle/>
-          <a:p>
-            <a:pPr>
-              <a:defRPr>
-                <a:latin typeface="Roboto"/>
-              </a:defRPr>
-            </a:pPr>
-            <a:r>
-              <a:rPr sz="2400" b="1">
-                <a:solidFill>
-                  <a:srgbClr val="25342A"/>
-                </a:solidFill>
-                <a:latin typeface="Roboto"/>
-              </a:rPr>
-              <a:t>Decisions to make</a:t>
-            </a:r>
-          </a:p>
-        </p:txBody>
-      </p:sp>
-      <p:sp>
-        <p:nvSpPr>
-          <p:cNvPr id="5" name="Rectangle 4"/>
-          <p:cNvSpPr/>
-          <p:nvPr/>
-        </p:nvSpPr>
-        <p:spPr>
-          <a:xfrm>
-            <a:off x="457200" y="1554480"/>
-            <a:ext cx="11277295" cy="4389120"/>
-          </a:xfrm>
-          <a:prstGeom prst="rect">
-            <a:avLst/>
-          </a:prstGeom>
-          <a:solidFill>
-            <a:srgbClr val="FFFFFF"/>
+            <a:srgbClr val="EEF5F0"/>
           </a:solidFill>
           <a:ln>
             <a:solidFill>
@@ -6522,14 +5047,14 @@
       </p:sp>
       <p:sp>
         <p:nvSpPr>
-          <p:cNvPr id="6" name="TextBox 5"/>
+          <p:cNvPr id="25" name="TextBox 24"/>
           <p:cNvSpPr txBox="1"/>
           <p:nvPr/>
         </p:nvSpPr>
         <p:spPr>
           <a:xfrm>
-            <a:off x="685800" y="1691640"/>
-            <a:ext cx="10820095" cy="365760"/>
+            <a:off x="6370167" y="2340864"/>
+            <a:ext cx="5227167" cy="274320"/>
           </a:xfrm>
           <a:prstGeom prst="rect">
             <a:avLst/>
@@ -6537,7 +5062,7 @@
           <a:noFill/>
         </p:spPr>
         <p:txBody>
-          <a:bodyPr wrap="square">
+          <a:bodyPr wrap="square" lIns="45720" rIns="45720">
             <a:spAutoFit/>
           </a:bodyPr>
           <a:lstStyle/>
@@ -6548,7 +5073,7 @@
               </a:defRPr>
             </a:pPr>
             <a:r>
-              <a:rPr sz="1100" b="1">
+              <a:rPr sz="1000" b="1">
                 <a:solidFill>
                   <a:srgbClr val="5F6F63"/>
                 </a:solidFill>
@@ -6561,14 +5086,14 @@
       </p:sp>
       <p:sp>
         <p:nvSpPr>
-          <p:cNvPr id="7" name="TextBox 6"/>
+          <p:cNvPr id="26" name="TextBox 25"/>
           <p:cNvSpPr txBox="1"/>
           <p:nvPr/>
         </p:nvSpPr>
         <p:spPr>
           <a:xfrm>
-            <a:off x="685800" y="2103120"/>
-            <a:ext cx="10820095" cy="3749039"/>
+            <a:off x="6370167" y="2615184"/>
+            <a:ext cx="5227167" cy="1524000"/>
           </a:xfrm>
           <a:prstGeom prst="rect">
             <a:avLst/>
@@ -6576,7 +5101,7 @@
           <a:noFill/>
         </p:spPr>
         <p:txBody>
-          <a:bodyPr wrap="square">
+          <a:bodyPr wrap="square" lIns="45720" rIns="45720">
             <a:spAutoFit/>
           </a:bodyPr>
           <a:lstStyle/>
@@ -6587,13 +5112,13 @@
               </a:defRPr>
             </a:pPr>
             <a:r>
-              <a:rPr sz="1600" b="0">
+              <a:rPr sz="1200" b="0">
                 <a:solidFill>
                   <a:srgbClr val="25342A"/>
                 </a:solidFill>
                 <a:latin typeface="Roboto"/>
               </a:rPr>
-              <a:t>• Housing support: lift spending to $33,375 a month, or ask State Housing Program about carrying the balance over.</a:t>
+              <a:t>1. Housing support: lift spending to $33,375 a month, or ask State Housing Program about carrying the balance over.</a:t>
             </a:r>
           </a:p>
           <a:p>
@@ -6603,13 +5128,13 @@
               </a:defRPr>
             </a:pPr>
             <a:r>
-              <a:rPr sz="1600" b="0">
+              <a:rPr sz="1200" b="0">
                 <a:solidFill>
                   <a:srgbClr val="25342A"/>
                 </a:solidFill>
                 <a:latin typeface="Roboto"/>
               </a:rPr>
-              <a:t>• Reserves: how much of each month's surplus goes to reserves, and by when the target is reached.</a:t>
+              <a:t>2. Reserves: how much of each month's surplus goes to reserves, and by when the target is reached.</a:t>
             </a:r>
           </a:p>
           <a:p>
@@ -6619,27 +5144,27 @@
               </a:defRPr>
             </a:pPr>
             <a:r>
-              <a:rPr sz="1600" b="0">
+              <a:rPr sz="1200" b="0">
                 <a:solidFill>
                   <a:srgbClr val="25342A"/>
                 </a:solidFill>
                 <a:latin typeface="Roboto"/>
               </a:rPr>
-              <a:t>• Fundraising: where the next spare hours go, given what each source costs to raise.</a:t>
-            </a:r>
-          </a:p>
-        </p:txBody>
-      </p:sp>
-      <p:sp>
-        <p:nvSpPr>
-          <p:cNvPr id="8" name="TextBox 7"/>
+              <a:t>3. Fundraising: where the next spare hours go, given what each source costs to raise.</a:t>
+            </a:r>
+          </a:p>
+        </p:txBody>
+      </p:sp>
+      <p:sp>
+        <p:nvSpPr>
+          <p:cNvPr id="27" name="TextBox 26"/>
           <p:cNvSpPr txBox="1"/>
           <p:nvPr/>
         </p:nvSpPr>
         <p:spPr>
           <a:xfrm>
-            <a:off x="457200" y="6492240"/>
-            <a:ext cx="3657600" cy="274320"/>
+            <a:off x="457200" y="4312920"/>
+            <a:ext cx="11277295" cy="274320"/>
           </a:xfrm>
           <a:prstGeom prst="rect">
             <a:avLst/>
@@ -6647,7 +5172,7 @@
           <a:noFill/>
         </p:spPr>
         <p:txBody>
-          <a:bodyPr wrap="square">
+          <a:bodyPr wrap="square" lIns="45720" rIns="45720">
             <a:spAutoFit/>
           </a:bodyPr>
           <a:lstStyle/>
@@ -6658,27 +5183,1205 @@
               </a:defRPr>
             </a:pPr>
             <a:r>
-              <a:rPr sz="900" b="0">
+              <a:rPr sz="1000" b="1">
                 <a:solidFill>
                   <a:srgbClr val="5F6F63"/>
                 </a:solidFill>
                 <a:latin typeface="Roboto"/>
               </a:rPr>
-              <a:t>board.pptx</a:t>
-            </a:r>
-          </a:p>
-        </p:txBody>
-      </p:sp>
-      <p:sp>
-        <p:nvSpPr>
-          <p:cNvPr id="9" name="TextBox 8"/>
+              <a:t>GRANTS · AGAINST BUDGET: RED WHEN SPENDING IS MORE THAN 1% OVER OR UNDER BUDGET TO DATE, AMBER WITHIN 1%.</a:t>
+            </a:r>
+          </a:p>
+        </p:txBody>
+      </p:sp>
+      <p:graphicFrame>
+        <p:nvGraphicFramePr>
+          <p:cNvPr id="28" name="Table 27"/>
+          <p:cNvGraphicFramePr>
+            <a:graphicFrameLocks noGrp="1"/>
+          </p:cNvGraphicFramePr>
+          <p:nvPr/>
+        </p:nvGraphicFramePr>
+        <p:xfrm>
+          <a:off x="457200" y="4587240"/>
+          <a:ext cx="11277295" cy="1728216"/>
+        </p:xfrm>
+        <a:graphic>
+          <a:graphicData uri="http://schemas.openxmlformats.org/drawingml/2006/table">
+            <a:tbl>
+              <a:tblPr firstRow="1" bandRow="1">
+                <a:tableStyleId>{5C22544A-7EE6-4342-B048-85BDC9FD1C3A}</a:tableStyleId>
+              </a:tblPr>
+              <a:tblGrid>
+                <a:gridCol w="1879549"/>
+                <a:gridCol w="1879549"/>
+                <a:gridCol w="1879549"/>
+                <a:gridCol w="1879549"/>
+                <a:gridCol w="1879549"/>
+                <a:gridCol w="1879550"/>
+              </a:tblGrid>
+              <a:tr h="246888">
+                <a:tc>
+                  <a:txBody>
+                    <a:bodyPr/>
+                    <a:lstStyle/>
+                    <a:p>
+                      <a:pPr algn="l">
+                        <a:defRPr>
+                          <a:latin typeface="Roboto"/>
+                        </a:defRPr>
+                      </a:pPr>
+                      <a:r>
+                        <a:rPr sz="1050" b="1">
+                          <a:solidFill>
+                            <a:srgbClr val="FFFFFF"/>
+                          </a:solidFill>
+                          <a:latin typeface="Roboto"/>
+                        </a:rPr>
+                        <a:t>Program</a:t>
+                      </a:r>
+                    </a:p>
+                  </a:txBody>
+                  <a:tcPr>
+                    <a:solidFill>
+                      <a:srgbClr val="2F7A5D"/>
+                    </a:solidFill>
+                  </a:tcPr>
+                </a:tc>
+                <a:tc>
+                  <a:txBody>
+                    <a:bodyPr/>
+                    <a:lstStyle/>
+                    <a:p>
+                      <a:pPr algn="r">
+                        <a:defRPr>
+                          <a:latin typeface="Roboto"/>
+                        </a:defRPr>
+                      </a:pPr>
+                      <a:r>
+                        <a:rPr sz="1050" b="1">
+                          <a:solidFill>
+                            <a:srgbClr val="FFFFFF"/>
+                          </a:solidFill>
+                          <a:latin typeface="Roboto"/>
+                        </a:rPr>
+                        <a:t>Spent to date</a:t>
+                      </a:r>
+                    </a:p>
+                  </a:txBody>
+                  <a:tcPr>
+                    <a:solidFill>
+                      <a:srgbClr val="2F7A5D"/>
+                    </a:solidFill>
+                  </a:tcPr>
+                </a:tc>
+                <a:tc>
+                  <a:txBody>
+                    <a:bodyPr/>
+                    <a:lstStyle/>
+                    <a:p>
+                      <a:pPr algn="r">
+                        <a:defRPr>
+                          <a:latin typeface="Roboto"/>
+                        </a:defRPr>
+                      </a:pPr>
+                      <a:r>
+                        <a:rPr sz="1050" b="1">
+                          <a:solidFill>
+                            <a:srgbClr val="FFFFFF"/>
+                          </a:solidFill>
+                          <a:latin typeface="Roboto"/>
+                        </a:rPr>
+                        <a:t>Budget to date</a:t>
+                      </a:r>
+                    </a:p>
+                  </a:txBody>
+                  <a:tcPr>
+                    <a:solidFill>
+                      <a:srgbClr val="2F7A5D"/>
+                    </a:solidFill>
+                  </a:tcPr>
+                </a:tc>
+                <a:tc>
+                  <a:txBody>
+                    <a:bodyPr/>
+                    <a:lstStyle/>
+                    <a:p>
+                      <a:pPr algn="r">
+                        <a:defRPr>
+                          <a:latin typeface="Roboto"/>
+                        </a:defRPr>
+                      </a:pPr>
+                      <a:r>
+                        <a:rPr sz="1050" b="1">
+                          <a:solidFill>
+                            <a:srgbClr val="FFFFFF"/>
+                          </a:solidFill>
+                          <a:latin typeface="Roboto"/>
+                        </a:rPr>
+                        <a:t>Against budget</a:t>
+                      </a:r>
+                    </a:p>
+                  </a:txBody>
+                  <a:tcPr>
+                    <a:solidFill>
+                      <a:srgbClr val="2F7A5D"/>
+                    </a:solidFill>
+                  </a:tcPr>
+                </a:tc>
+                <a:tc>
+                  <a:txBody>
+                    <a:bodyPr/>
+                    <a:lstStyle/>
+                    <a:p>
+                      <a:pPr algn="r">
+                        <a:defRPr>
+                          <a:latin typeface="Roboto"/>
+                        </a:defRPr>
+                      </a:pPr>
+                      <a:r>
+                        <a:rPr sz="1050" b="1">
+                          <a:solidFill>
+                            <a:srgbClr val="FFFFFF"/>
+                          </a:solidFill>
+                          <a:latin typeface="Roboto"/>
+                        </a:rPr>
+                        <a:t>Still to spend</a:t>
+                      </a:r>
+                    </a:p>
+                  </a:txBody>
+                  <a:tcPr>
+                    <a:solidFill>
+                      <a:srgbClr val="2F7A5D"/>
+                    </a:solidFill>
+                  </a:tcPr>
+                </a:tc>
+                <a:tc>
+                  <a:txBody>
+                    <a:bodyPr/>
+                    <a:lstStyle/>
+                    <a:p>
+                      <a:pPr algn="r">
+                        <a:defRPr>
+                          <a:latin typeface="Roboto"/>
+                        </a:defRPr>
+                      </a:pPr>
+                      <a:r>
+                        <a:rPr sz="1050" b="1">
+                          <a:solidFill>
+                            <a:srgbClr val="FFFFFF"/>
+                          </a:solidFill>
+                          <a:latin typeface="Roboto"/>
+                        </a:rPr>
+                        <a:t>Months left</a:t>
+                      </a:r>
+                    </a:p>
+                  </a:txBody>
+                  <a:tcPr>
+                    <a:solidFill>
+                      <a:srgbClr val="2F7A5D"/>
+                    </a:solidFill>
+                  </a:tcPr>
+                </a:tc>
+              </a:tr>
+              <a:tr h="246888">
+                <a:tc>
+                  <a:txBody>
+                    <a:bodyPr/>
+                    <a:lstStyle/>
+                    <a:p>
+                      <a:pPr algn="l">
+                        <a:defRPr>
+                          <a:latin typeface="Roboto"/>
+                        </a:defRPr>
+                      </a:pPr>
+                      <a:r>
+                        <a:rPr sz="1000">
+                          <a:solidFill>
+                            <a:srgbClr val="25342A"/>
+                          </a:solidFill>
+                          <a:latin typeface="Roboto"/>
+                        </a:rPr>
+                        <a:t>Housing support</a:t>
+                      </a:r>
+                    </a:p>
+                  </a:txBody>
+                  <a:tcPr>
+                    <a:solidFill>
+                      <a:srgbClr val="FFFFFF"/>
+                    </a:solidFill>
+                  </a:tcPr>
+                </a:tc>
+                <a:tc>
+                  <a:txBody>
+                    <a:bodyPr/>
+                    <a:lstStyle/>
+                    <a:p>
+                      <a:pPr algn="r">
+                        <a:defRPr>
+                          <a:latin typeface="Roboto"/>
+                        </a:defRPr>
+                      </a:pPr>
+                      <a:r>
+                        <a:rPr sz="1000">
+                          <a:solidFill>
+                            <a:srgbClr val="25342A"/>
+                          </a:solidFill>
+                          <a:latin typeface="Roboto"/>
+                        </a:rPr>
+                        <a:t>$226,500</a:t>
+                      </a:r>
+                    </a:p>
+                  </a:txBody>
+                  <a:tcPr>
+                    <a:solidFill>
+                      <a:srgbClr val="FFFFFF"/>
+                    </a:solidFill>
+                  </a:tcPr>
+                </a:tc>
+                <a:tc>
+                  <a:txBody>
+                    <a:bodyPr/>
+                    <a:lstStyle/>
+                    <a:p>
+                      <a:pPr algn="r">
+                        <a:defRPr>
+                          <a:latin typeface="Roboto"/>
+                        </a:defRPr>
+                      </a:pPr>
+                      <a:r>
+                        <a:rPr sz="1000">
+                          <a:solidFill>
+                            <a:srgbClr val="25342A"/>
+                          </a:solidFill>
+                          <a:latin typeface="Roboto"/>
+                        </a:rPr>
+                        <a:t>$240,000</a:t>
+                      </a:r>
+                    </a:p>
+                  </a:txBody>
+                  <a:tcPr>
+                    <a:solidFill>
+                      <a:srgbClr val="FFFFFF"/>
+                    </a:solidFill>
+                  </a:tcPr>
+                </a:tc>
+                <a:tc>
+                  <a:txBody>
+                    <a:bodyPr/>
+                    <a:lstStyle/>
+                    <a:p>
+                      <a:pPr algn="r">
+                        <a:defRPr>
+                          <a:latin typeface="Roboto"/>
+                        </a:defRPr>
+                      </a:pPr>
+                      <a:r>
+                        <a:rPr sz="1000" b="1">
+                          <a:solidFill>
+                            <a:srgbClr val="B42318"/>
+                          </a:solidFill>
+                          <a:latin typeface="Roboto"/>
+                        </a:rPr>
+                        <a:t>94.4%</a:t>
+                      </a:r>
+                    </a:p>
+                  </a:txBody>
+                  <a:tcPr>
+                    <a:solidFill>
+                      <a:srgbClr val="FFFFFF"/>
+                    </a:solidFill>
+                  </a:tcPr>
+                </a:tc>
+                <a:tc>
+                  <a:txBody>
+                    <a:bodyPr/>
+                    <a:lstStyle/>
+                    <a:p>
+                      <a:pPr algn="r">
+                        <a:defRPr>
+                          <a:latin typeface="Roboto"/>
+                        </a:defRPr>
+                      </a:pPr>
+                      <a:r>
+                        <a:rPr sz="1000">
+                          <a:solidFill>
+                            <a:srgbClr val="25342A"/>
+                          </a:solidFill>
+                          <a:latin typeface="Roboto"/>
+                        </a:rPr>
+                        <a:t>$133,500</a:t>
+                      </a:r>
+                    </a:p>
+                  </a:txBody>
+                  <a:tcPr>
+                    <a:solidFill>
+                      <a:srgbClr val="FFFFFF"/>
+                    </a:solidFill>
+                  </a:tcPr>
+                </a:tc>
+                <a:tc>
+                  <a:txBody>
+                    <a:bodyPr/>
+                    <a:lstStyle/>
+                    <a:p>
+                      <a:pPr algn="r">
+                        <a:defRPr>
+                          <a:latin typeface="Roboto"/>
+                        </a:defRPr>
+                      </a:pPr>
+                      <a:r>
+                        <a:rPr sz="1000">
+                          <a:solidFill>
+                            <a:srgbClr val="25342A"/>
+                          </a:solidFill>
+                          <a:latin typeface="Roboto"/>
+                        </a:rPr>
+                        <a:t>4</a:t>
+                      </a:r>
+                    </a:p>
+                  </a:txBody>
+                  <a:tcPr>
+                    <a:solidFill>
+                      <a:srgbClr val="FFFFFF"/>
+                    </a:solidFill>
+                  </a:tcPr>
+                </a:tc>
+              </a:tr>
+              <a:tr h="246888">
+                <a:tc>
+                  <a:txBody>
+                    <a:bodyPr/>
+                    <a:lstStyle/>
+                    <a:p>
+                      <a:pPr algn="l">
+                        <a:defRPr>
+                          <a:latin typeface="Roboto"/>
+                        </a:defRPr>
+                      </a:pPr>
+                      <a:r>
+                        <a:rPr sz="1000">
+                          <a:solidFill>
+                            <a:srgbClr val="25342A"/>
+                          </a:solidFill>
+                          <a:latin typeface="Roboto"/>
+                        </a:rPr>
+                        <a:t>Volunteer coordinator</a:t>
+                      </a:r>
+                    </a:p>
+                  </a:txBody>
+                  <a:tcPr>
+                    <a:solidFill>
+                      <a:srgbClr val="F7FAF7"/>
+                    </a:solidFill>
+                  </a:tcPr>
+                </a:tc>
+                <a:tc>
+                  <a:txBody>
+                    <a:bodyPr/>
+                    <a:lstStyle/>
+                    <a:p>
+                      <a:pPr algn="r">
+                        <a:defRPr>
+                          <a:latin typeface="Roboto"/>
+                        </a:defRPr>
+                      </a:pPr>
+                      <a:r>
+                        <a:rPr sz="1000">
+                          <a:solidFill>
+                            <a:srgbClr val="25342A"/>
+                          </a:solidFill>
+                          <a:latin typeface="Roboto"/>
+                        </a:rPr>
+                        <a:t>$18,000</a:t>
+                      </a:r>
+                    </a:p>
+                  </a:txBody>
+                  <a:tcPr>
+                    <a:solidFill>
+                      <a:srgbClr val="F7FAF7"/>
+                    </a:solidFill>
+                  </a:tcPr>
+                </a:tc>
+                <a:tc>
+                  <a:txBody>
+                    <a:bodyPr/>
+                    <a:lstStyle/>
+                    <a:p>
+                      <a:pPr algn="r">
+                        <a:defRPr>
+                          <a:latin typeface="Roboto"/>
+                        </a:defRPr>
+                      </a:pPr>
+                      <a:r>
+                        <a:rPr sz="1000">
+                          <a:solidFill>
+                            <a:srgbClr val="25342A"/>
+                          </a:solidFill>
+                          <a:latin typeface="Roboto"/>
+                        </a:rPr>
+                        <a:t>$18,000</a:t>
+                      </a:r>
+                    </a:p>
+                  </a:txBody>
+                  <a:tcPr>
+                    <a:solidFill>
+                      <a:srgbClr val="F7FAF7"/>
+                    </a:solidFill>
+                  </a:tcPr>
+                </a:tc>
+                <a:tc>
+                  <a:txBody>
+                    <a:bodyPr/>
+                    <a:lstStyle/>
+                    <a:p>
+                      <a:pPr algn="r">
+                        <a:defRPr>
+                          <a:latin typeface="Roboto"/>
+                        </a:defRPr>
+                      </a:pPr>
+                      <a:r>
+                        <a:rPr sz="1000">
+                          <a:solidFill>
+                            <a:srgbClr val="25342A"/>
+                          </a:solidFill>
+                          <a:latin typeface="Roboto"/>
+                        </a:rPr>
+                        <a:t>100.0%</a:t>
+                      </a:r>
+                    </a:p>
+                  </a:txBody>
+                  <a:tcPr>
+                    <a:solidFill>
+                      <a:srgbClr val="F7FAF7"/>
+                    </a:solidFill>
+                  </a:tcPr>
+                </a:tc>
+                <a:tc>
+                  <a:txBody>
+                    <a:bodyPr/>
+                    <a:lstStyle/>
+                    <a:p>
+                      <a:pPr algn="r">
+                        <a:defRPr>
+                          <a:latin typeface="Roboto"/>
+                        </a:defRPr>
+                      </a:pPr>
+                      <a:r>
+                        <a:rPr sz="1000">
+                          <a:solidFill>
+                            <a:srgbClr val="25342A"/>
+                          </a:solidFill>
+                          <a:latin typeface="Roboto"/>
+                        </a:rPr>
+                        <a:t>$18,000</a:t>
+                      </a:r>
+                    </a:p>
+                  </a:txBody>
+                  <a:tcPr>
+                    <a:solidFill>
+                      <a:srgbClr val="F7FAF7"/>
+                    </a:solidFill>
+                  </a:tcPr>
+                </a:tc>
+                <a:tc>
+                  <a:txBody>
+                    <a:bodyPr/>
+                    <a:lstStyle/>
+                    <a:p>
+                      <a:pPr algn="r">
+                        <a:defRPr>
+                          <a:latin typeface="Roboto"/>
+                        </a:defRPr>
+                      </a:pPr>
+                      <a:r>
+                        <a:rPr sz="1000">
+                          <a:solidFill>
+                            <a:srgbClr val="25342A"/>
+                          </a:solidFill>
+                          <a:latin typeface="Roboto"/>
+                        </a:rPr>
+                        <a:t>6</a:t>
+                      </a:r>
+                    </a:p>
+                  </a:txBody>
+                  <a:tcPr>
+                    <a:solidFill>
+                      <a:srgbClr val="F7FAF7"/>
+                    </a:solidFill>
+                  </a:tcPr>
+                </a:tc>
+              </a:tr>
+              <a:tr h="246888">
+                <a:tc>
+                  <a:txBody>
+                    <a:bodyPr/>
+                    <a:lstStyle/>
+                    <a:p>
+                      <a:pPr algn="l">
+                        <a:defRPr>
+                          <a:latin typeface="Roboto"/>
+                        </a:defRPr>
+                      </a:pPr>
+                      <a:r>
+                        <a:rPr sz="1000">
+                          <a:solidFill>
+                            <a:srgbClr val="25342A"/>
+                          </a:solidFill>
+                          <a:latin typeface="Roboto"/>
+                        </a:rPr>
+                        <a:t>Digital literacy</a:t>
+                      </a:r>
+                    </a:p>
+                  </a:txBody>
+                  <a:tcPr>
+                    <a:solidFill>
+                      <a:srgbClr val="FFFFFF"/>
+                    </a:solidFill>
+                  </a:tcPr>
+                </a:tc>
+                <a:tc>
+                  <a:txBody>
+                    <a:bodyPr/>
+                    <a:lstStyle/>
+                    <a:p>
+                      <a:pPr algn="r">
+                        <a:defRPr>
+                          <a:latin typeface="Roboto"/>
+                        </a:defRPr>
+                      </a:pPr>
+                      <a:r>
+                        <a:rPr sz="1000">
+                          <a:solidFill>
+                            <a:srgbClr val="25342A"/>
+                          </a:solidFill>
+                          <a:latin typeface="Roboto"/>
+                        </a:rPr>
+                        <a:t>$54,700</a:t>
+                      </a:r>
+                    </a:p>
+                  </a:txBody>
+                  <a:tcPr>
+                    <a:solidFill>
+                      <a:srgbClr val="FFFFFF"/>
+                    </a:solidFill>
+                  </a:tcPr>
+                </a:tc>
+                <a:tc>
+                  <a:txBody>
+                    <a:bodyPr/>
+                    <a:lstStyle/>
+                    <a:p>
+                      <a:pPr algn="r">
+                        <a:defRPr>
+                          <a:latin typeface="Roboto"/>
+                        </a:defRPr>
+                      </a:pPr>
+                      <a:r>
+                        <a:rPr sz="1000">
+                          <a:solidFill>
+                            <a:srgbClr val="25342A"/>
+                          </a:solidFill>
+                          <a:latin typeface="Roboto"/>
+                        </a:rPr>
+                        <a:t>$55,000</a:t>
+                      </a:r>
+                    </a:p>
+                  </a:txBody>
+                  <a:tcPr>
+                    <a:solidFill>
+                      <a:srgbClr val="FFFFFF"/>
+                    </a:solidFill>
+                  </a:tcPr>
+                </a:tc>
+                <a:tc>
+                  <a:txBody>
+                    <a:bodyPr/>
+                    <a:lstStyle/>
+                    <a:p>
+                      <a:pPr algn="r">
+                        <a:defRPr>
+                          <a:latin typeface="Roboto"/>
+                        </a:defRPr>
+                      </a:pPr>
+                      <a:r>
+                        <a:rPr sz="1000" b="1">
+                          <a:solidFill>
+                            <a:srgbClr val="8A6D3B"/>
+                          </a:solidFill>
+                          <a:latin typeface="Roboto"/>
+                        </a:rPr>
+                        <a:t>99.5%</a:t>
+                      </a:r>
+                    </a:p>
+                  </a:txBody>
+                  <a:tcPr>
+                    <a:solidFill>
+                      <a:srgbClr val="FFFFFF"/>
+                    </a:solidFill>
+                  </a:tcPr>
+                </a:tc>
+                <a:tc>
+                  <a:txBody>
+                    <a:bodyPr/>
+                    <a:lstStyle/>
+                    <a:p>
+                      <a:pPr algn="r">
+                        <a:defRPr>
+                          <a:latin typeface="Roboto"/>
+                        </a:defRPr>
+                      </a:pPr>
+                      <a:r>
+                        <a:rPr sz="1000">
+                          <a:solidFill>
+                            <a:srgbClr val="25342A"/>
+                          </a:solidFill>
+                          <a:latin typeface="Roboto"/>
+                        </a:rPr>
+                        <a:t>$35,300</a:t>
+                      </a:r>
+                    </a:p>
+                  </a:txBody>
+                  <a:tcPr>
+                    <a:solidFill>
+                      <a:srgbClr val="FFFFFF"/>
+                    </a:solidFill>
+                  </a:tcPr>
+                </a:tc>
+                <a:tc>
+                  <a:txBody>
+                    <a:bodyPr/>
+                    <a:lstStyle/>
+                    <a:p>
+                      <a:pPr algn="r">
+                        <a:defRPr>
+                          <a:latin typeface="Roboto"/>
+                        </a:defRPr>
+                      </a:pPr>
+                      <a:r>
+                        <a:rPr sz="1000">
+                          <a:solidFill>
+                            <a:srgbClr val="25342A"/>
+                          </a:solidFill>
+                          <a:latin typeface="Roboto"/>
+                        </a:rPr>
+                        <a:t>7</a:t>
+                      </a:r>
+                    </a:p>
+                  </a:txBody>
+                  <a:tcPr>
+                    <a:solidFill>
+                      <a:srgbClr val="FFFFFF"/>
+                    </a:solidFill>
+                  </a:tcPr>
+                </a:tc>
+              </a:tr>
+              <a:tr h="246888">
+                <a:tc>
+                  <a:txBody>
+                    <a:bodyPr/>
+                    <a:lstStyle/>
+                    <a:p>
+                      <a:pPr algn="l">
+                        <a:defRPr>
+                          <a:latin typeface="Roboto"/>
+                        </a:defRPr>
+                      </a:pPr>
+                      <a:r>
+                        <a:rPr sz="1000">
+                          <a:solidFill>
+                            <a:srgbClr val="25342A"/>
+                          </a:solidFill>
+                          <a:latin typeface="Roboto"/>
+                        </a:rPr>
+                        <a:t>Mental health first aid</a:t>
+                      </a:r>
+                    </a:p>
+                  </a:txBody>
+                  <a:tcPr>
+                    <a:solidFill>
+                      <a:srgbClr val="F7FAF7"/>
+                    </a:solidFill>
+                  </a:tcPr>
+                </a:tc>
+                <a:tc>
+                  <a:txBody>
+                    <a:bodyPr/>
+                    <a:lstStyle/>
+                    <a:p>
+                      <a:pPr algn="r">
+                        <a:defRPr>
+                          <a:latin typeface="Roboto"/>
+                        </a:defRPr>
+                      </a:pPr>
+                      <a:r>
+                        <a:rPr sz="1000">
+                          <a:solidFill>
+                            <a:srgbClr val="25342A"/>
+                          </a:solidFill>
+                          <a:latin typeface="Roboto"/>
+                        </a:rPr>
+                        <a:t>$46,400</a:t>
+                      </a:r>
+                    </a:p>
+                  </a:txBody>
+                  <a:tcPr>
+                    <a:solidFill>
+                      <a:srgbClr val="F7FAF7"/>
+                    </a:solidFill>
+                  </a:tcPr>
+                </a:tc>
+                <a:tc>
+                  <a:txBody>
+                    <a:bodyPr/>
+                    <a:lstStyle/>
+                    <a:p>
+                      <a:pPr algn="r">
+                        <a:defRPr>
+                          <a:latin typeface="Roboto"/>
+                        </a:defRPr>
+                      </a:pPr>
+                      <a:r>
+                        <a:rPr sz="1000">
+                          <a:solidFill>
+                            <a:srgbClr val="25342A"/>
+                          </a:solidFill>
+                          <a:latin typeface="Roboto"/>
+                        </a:rPr>
+                        <a:t>$50,000</a:t>
+                      </a:r>
+                    </a:p>
+                  </a:txBody>
+                  <a:tcPr>
+                    <a:solidFill>
+                      <a:srgbClr val="F7FAF7"/>
+                    </a:solidFill>
+                  </a:tcPr>
+                </a:tc>
+                <a:tc>
+                  <a:txBody>
+                    <a:bodyPr/>
+                    <a:lstStyle/>
+                    <a:p>
+                      <a:pPr algn="r">
+                        <a:defRPr>
+                          <a:latin typeface="Roboto"/>
+                        </a:defRPr>
+                      </a:pPr>
+                      <a:r>
+                        <a:rPr sz="1000" b="1">
+                          <a:solidFill>
+                            <a:srgbClr val="B42318"/>
+                          </a:solidFill>
+                          <a:latin typeface="Roboto"/>
+                        </a:rPr>
+                        <a:t>92.8%</a:t>
+                      </a:r>
+                    </a:p>
+                  </a:txBody>
+                  <a:tcPr>
+                    <a:solidFill>
+                      <a:srgbClr val="F7FAF7"/>
+                    </a:solidFill>
+                  </a:tcPr>
+                </a:tc>
+                <a:tc>
+                  <a:txBody>
+                    <a:bodyPr/>
+                    <a:lstStyle/>
+                    <a:p>
+                      <a:pPr algn="r">
+                        <a:defRPr>
+                          <a:latin typeface="Roboto"/>
+                        </a:defRPr>
+                      </a:pPr>
+                      <a:r>
+                        <a:rPr sz="1000">
+                          <a:solidFill>
+                            <a:srgbClr val="25342A"/>
+                          </a:solidFill>
+                          <a:latin typeface="Roboto"/>
+                        </a:rPr>
+                        <a:t>$73,600</a:t>
+                      </a:r>
+                    </a:p>
+                  </a:txBody>
+                  <a:tcPr>
+                    <a:solidFill>
+                      <a:srgbClr val="F7FAF7"/>
+                    </a:solidFill>
+                  </a:tcPr>
+                </a:tc>
+                <a:tc>
+                  <a:txBody>
+                    <a:bodyPr/>
+                    <a:lstStyle/>
+                    <a:p>
+                      <a:pPr algn="r">
+                        <a:defRPr>
+                          <a:latin typeface="Roboto"/>
+                        </a:defRPr>
+                      </a:pPr>
+                      <a:r>
+                        <a:rPr sz="1000">
+                          <a:solidFill>
+                            <a:srgbClr val="25342A"/>
+                          </a:solidFill>
+                          <a:latin typeface="Roboto"/>
+                        </a:rPr>
+                        <a:t>7</a:t>
+                      </a:r>
+                    </a:p>
+                  </a:txBody>
+                  <a:tcPr>
+                    <a:solidFill>
+                      <a:srgbClr val="F7FAF7"/>
+                    </a:solidFill>
+                  </a:tcPr>
+                </a:tc>
+              </a:tr>
+              <a:tr h="246888">
+                <a:tc>
+                  <a:txBody>
+                    <a:bodyPr/>
+                    <a:lstStyle/>
+                    <a:p>
+                      <a:pPr algn="l">
+                        <a:defRPr>
+                          <a:latin typeface="Roboto"/>
+                        </a:defRPr>
+                      </a:pPr>
+                      <a:r>
+                        <a:rPr sz="1000">
+                          <a:solidFill>
+                            <a:srgbClr val="25342A"/>
+                          </a:solidFill>
+                          <a:latin typeface="Roboto"/>
+                        </a:rPr>
+                        <a:t>Youth outreach</a:t>
+                      </a:r>
+                    </a:p>
+                  </a:txBody>
+                  <a:tcPr>
+                    <a:solidFill>
+                      <a:srgbClr val="FFFFFF"/>
+                    </a:solidFill>
+                  </a:tcPr>
+                </a:tc>
+                <a:tc>
+                  <a:txBody>
+                    <a:bodyPr/>
+                    <a:lstStyle/>
+                    <a:p>
+                      <a:pPr algn="r">
+                        <a:defRPr>
+                          <a:latin typeface="Roboto"/>
+                        </a:defRPr>
+                      </a:pPr>
+                      <a:r>
+                        <a:rPr sz="1000">
+                          <a:solidFill>
+                            <a:srgbClr val="25342A"/>
+                          </a:solidFill>
+                          <a:latin typeface="Roboto"/>
+                        </a:rPr>
+                        <a:t>$283,500</a:t>
+                      </a:r>
+                    </a:p>
+                  </a:txBody>
+                  <a:tcPr>
+                    <a:solidFill>
+                      <a:srgbClr val="FFFFFF"/>
+                    </a:solidFill>
+                  </a:tcPr>
+                </a:tc>
+                <a:tc>
+                  <a:txBody>
+                    <a:bodyPr/>
+                    <a:lstStyle/>
+                    <a:p>
+                      <a:pPr algn="r">
+                        <a:defRPr>
+                          <a:latin typeface="Roboto"/>
+                        </a:defRPr>
+                      </a:pPr>
+                      <a:r>
+                        <a:rPr sz="1000">
+                          <a:solidFill>
+                            <a:srgbClr val="25342A"/>
+                          </a:solidFill>
+                          <a:latin typeface="Roboto"/>
+                        </a:rPr>
+                        <a:t>$280,000</a:t>
+                      </a:r>
+                    </a:p>
+                  </a:txBody>
+                  <a:tcPr>
+                    <a:solidFill>
+                      <a:srgbClr val="FFFFFF"/>
+                    </a:solidFill>
+                  </a:tcPr>
+                </a:tc>
+                <a:tc>
+                  <a:txBody>
+                    <a:bodyPr/>
+                    <a:lstStyle/>
+                    <a:p>
+                      <a:pPr algn="r">
+                        <a:defRPr>
+                          <a:latin typeface="Roboto"/>
+                        </a:defRPr>
+                      </a:pPr>
+                      <a:r>
+                        <a:rPr sz="1000" b="1">
+                          <a:solidFill>
+                            <a:srgbClr val="B42318"/>
+                          </a:solidFill>
+                          <a:latin typeface="Roboto"/>
+                        </a:rPr>
+                        <a:t>101.2%</a:t>
+                      </a:r>
+                    </a:p>
+                  </a:txBody>
+                  <a:tcPr>
+                    <a:solidFill>
+                      <a:srgbClr val="FFFFFF"/>
+                    </a:solidFill>
+                  </a:tcPr>
+                </a:tc>
+                <a:tc>
+                  <a:txBody>
+                    <a:bodyPr/>
+                    <a:lstStyle/>
+                    <a:p>
+                      <a:pPr algn="r">
+                        <a:defRPr>
+                          <a:latin typeface="Roboto"/>
+                        </a:defRPr>
+                      </a:pPr>
+                      <a:r>
+                        <a:rPr sz="1000">
+                          <a:solidFill>
+                            <a:srgbClr val="25342A"/>
+                          </a:solidFill>
+                          <a:latin typeface="Roboto"/>
+                        </a:rPr>
+                        <a:t>$196,500</a:t>
+                      </a:r>
+                    </a:p>
+                  </a:txBody>
+                  <a:tcPr>
+                    <a:solidFill>
+                      <a:srgbClr val="FFFFFF"/>
+                    </a:solidFill>
+                  </a:tcPr>
+                </a:tc>
+                <a:tc>
+                  <a:txBody>
+                    <a:bodyPr/>
+                    <a:lstStyle/>
+                    <a:p>
+                      <a:pPr algn="r">
+                        <a:defRPr>
+                          <a:latin typeface="Roboto"/>
+                        </a:defRPr>
+                      </a:pPr>
+                      <a:r>
+                        <a:rPr sz="1000">
+                          <a:solidFill>
+                            <a:srgbClr val="25342A"/>
+                          </a:solidFill>
+                          <a:latin typeface="Roboto"/>
+                        </a:rPr>
+                        <a:t>10</a:t>
+                      </a:r>
+                    </a:p>
+                  </a:txBody>
+                  <a:tcPr>
+                    <a:solidFill>
+                      <a:srgbClr val="FFFFFF"/>
+                    </a:solidFill>
+                  </a:tcPr>
+                </a:tc>
+              </a:tr>
+              <a:tr h="246888">
+                <a:tc>
+                  <a:txBody>
+                    <a:bodyPr/>
+                    <a:lstStyle/>
+                    <a:p>
+                      <a:pPr algn="l">
+                        <a:defRPr>
+                          <a:latin typeface="Roboto"/>
+                        </a:defRPr>
+                      </a:pPr>
+                      <a:r>
+                        <a:rPr sz="1000">
+                          <a:solidFill>
+                            <a:srgbClr val="25342A"/>
+                          </a:solidFill>
+                          <a:latin typeface="Roboto"/>
+                        </a:rPr>
+                        <a:t>Community meals</a:t>
+                      </a:r>
+                    </a:p>
+                  </a:txBody>
+                  <a:tcPr>
+                    <a:solidFill>
+                      <a:srgbClr val="F7FAF7"/>
+                    </a:solidFill>
+                  </a:tcPr>
+                </a:tc>
+                <a:tc>
+                  <a:txBody>
+                    <a:bodyPr/>
+                    <a:lstStyle/>
+                    <a:p>
+                      <a:pPr algn="r">
+                        <a:defRPr>
+                          <a:latin typeface="Roboto"/>
+                        </a:defRPr>
+                      </a:pPr>
+                      <a:r>
+                        <a:rPr sz="1000">
+                          <a:solidFill>
+                            <a:srgbClr val="25342A"/>
+                          </a:solidFill>
+                          <a:latin typeface="Roboto"/>
+                        </a:rPr>
+                        <a:t>$7,700</a:t>
+                      </a:r>
+                    </a:p>
+                  </a:txBody>
+                  <a:tcPr>
+                    <a:solidFill>
+                      <a:srgbClr val="F7FAF7"/>
+                    </a:solidFill>
+                  </a:tcPr>
+                </a:tc>
+                <a:tc>
+                  <a:txBody>
+                    <a:bodyPr/>
+                    <a:lstStyle/>
+                    <a:p>
+                      <a:pPr algn="r">
+                        <a:defRPr>
+                          <a:latin typeface="Roboto"/>
+                        </a:defRPr>
+                      </a:pPr>
+                      <a:r>
+                        <a:rPr sz="1000">
+                          <a:solidFill>
+                            <a:srgbClr val="25342A"/>
+                          </a:solidFill>
+                          <a:latin typeface="Roboto"/>
+                        </a:rPr>
+                        <a:t>$8,000</a:t>
+                      </a:r>
+                    </a:p>
+                  </a:txBody>
+                  <a:tcPr>
+                    <a:solidFill>
+                      <a:srgbClr val="F7FAF7"/>
+                    </a:solidFill>
+                  </a:tcPr>
+                </a:tc>
+                <a:tc>
+                  <a:txBody>
+                    <a:bodyPr/>
+                    <a:lstStyle/>
+                    <a:p>
+                      <a:pPr algn="r">
+                        <a:defRPr>
+                          <a:latin typeface="Roboto"/>
+                        </a:defRPr>
+                      </a:pPr>
+                      <a:r>
+                        <a:rPr sz="1000" b="1">
+                          <a:solidFill>
+                            <a:srgbClr val="B42318"/>
+                          </a:solidFill>
+                          <a:latin typeface="Roboto"/>
+                        </a:rPr>
+                        <a:t>96.2%</a:t>
+                      </a:r>
+                    </a:p>
+                  </a:txBody>
+                  <a:tcPr>
+                    <a:solidFill>
+                      <a:srgbClr val="F7FAF7"/>
+                    </a:solidFill>
+                  </a:tcPr>
+                </a:tc>
+                <a:tc>
+                  <a:txBody>
+                    <a:bodyPr/>
+                    <a:lstStyle/>
+                    <a:p>
+                      <a:pPr algn="r">
+                        <a:defRPr>
+                          <a:latin typeface="Roboto"/>
+                        </a:defRPr>
+                      </a:pPr>
+                      <a:r>
+                        <a:rPr sz="1000">
+                          <a:solidFill>
+                            <a:srgbClr val="25342A"/>
+                          </a:solidFill>
+                          <a:latin typeface="Roboto"/>
+                        </a:rPr>
+                        <a:t>$40,300</a:t>
+                      </a:r>
+                    </a:p>
+                  </a:txBody>
+                  <a:tcPr>
+                    <a:solidFill>
+                      <a:srgbClr val="F7FAF7"/>
+                    </a:solidFill>
+                  </a:tcPr>
+                </a:tc>
+                <a:tc>
+                  <a:txBody>
+                    <a:bodyPr/>
+                    <a:lstStyle/>
+                    <a:p>
+                      <a:pPr algn="r">
+                        <a:defRPr>
+                          <a:latin typeface="Roboto"/>
+                        </a:defRPr>
+                      </a:pPr>
+                      <a:r>
+                        <a:rPr sz="1000">
+                          <a:solidFill>
+                            <a:srgbClr val="25342A"/>
+                          </a:solidFill>
+                          <a:latin typeface="Roboto"/>
+                        </a:rPr>
+                        <a:t>10</a:t>
+                      </a:r>
+                    </a:p>
+                  </a:txBody>
+                  <a:tcPr>
+                    <a:solidFill>
+                      <a:srgbClr val="F7FAF7"/>
+                    </a:solidFill>
+                  </a:tcPr>
+                </a:tc>
+              </a:tr>
+            </a:tbl>
+          </a:graphicData>
+        </a:graphic>
+      </p:graphicFrame>
+      <p:sp>
+        <p:nvSpPr>
+          <p:cNvPr id="29" name="TextBox 28"/>
           <p:cNvSpPr txBox="1"/>
           <p:nvPr/>
         </p:nvSpPr>
         <p:spPr>
           <a:xfrm>
-            <a:off x="4297680" y="6492240"/>
-            <a:ext cx="3657600" cy="274320"/>
+            <a:off x="457200" y="6492240"/>
+            <a:ext cx="2926080" cy="274320"/>
           </a:xfrm>
           <a:prstGeom prst="rect">
             <a:avLst/>
@@ -6686,12 +6389,12 @@
           <a:noFill/>
         </p:spPr>
         <p:txBody>
-          <a:bodyPr wrap="square">
+          <a:bodyPr wrap="square" lIns="45720" rIns="45720">
             <a:spAutoFit/>
           </a:bodyPr>
           <a:lstStyle/>
           <a:p>
-            <a:pPr algn="ctr">
+            <a:pPr>
               <a:defRPr>
                 <a:latin typeface="Roboto"/>
               </a:defRPr>
@@ -6703,14 +6406,53 @@
                 </a:solidFill>
                 <a:latin typeface="Roboto"/>
               </a:rPr>
-              <a:t>Data retrieved 2pm, Tue 6 Oct 2026 · Sample data</a:t>
-            </a:r>
-          </a:p>
-        </p:txBody>
-      </p:sp>
-      <p:sp>
-        <p:nvSpPr>
-          <p:cNvPr id="10" name="TextBox 9"/>
+              <a:t>board.pptx</a:t>
+            </a:r>
+          </a:p>
+        </p:txBody>
+      </p:sp>
+      <p:sp>
+        <p:nvSpPr>
+          <p:cNvPr id="30" name="TextBox 29"/>
+          <p:cNvSpPr txBox="1"/>
+          <p:nvPr/>
+        </p:nvSpPr>
+        <p:spPr>
+          <a:xfrm>
+            <a:off x="3108960" y="6492240"/>
+            <a:ext cx="5943600" cy="274320"/>
+          </a:xfrm>
+          <a:prstGeom prst="rect">
+            <a:avLst/>
+          </a:prstGeom>
+          <a:noFill/>
+        </p:spPr>
+        <p:txBody>
+          <a:bodyPr wrap="square" lIns="45720" rIns="45720">
+            <a:spAutoFit/>
+          </a:bodyPr>
+          <a:lstStyle/>
+          <a:p>
+            <a:pPr algn="ctr">
+              <a:defRPr>
+                <a:latin typeface="Roboto"/>
+              </a:defRPr>
+            </a:pPr>
+            <a:r>
+              <a:rPr sz="900" b="0">
+                <a:solidFill>
+                  <a:srgbClr val="5F6F63"/>
+                </a:solidFill>
+                <a:latin typeface="Roboto"/>
+              </a:rPr>
+              <a:t>Data retrieved 2pm, Tue 6 Oct 2026 · Generated 8 Oct 2026, 9:35am · Sample data · Made with Python (python-pptx)</a:t>
+            </a:r>
+          </a:p>
+        </p:txBody>
+      </p:sp>
+      <p:sp>
+        <p:nvSpPr>
+          <p:cNvPr id="31" name="TextBox 30"/>
           <p:cNvSpPr txBox="1"/>
           <p:nvPr/>
         </p:nvSpPr>
@@ -6725,7 +6467,7 @@
           <a:noFill/>
         </p:spPr>
         <p:txBody>
-          <a:bodyPr wrap="square">
+          <a:bodyPr wrap="square" lIns="45720" rIns="45720">
             <a:spAutoFit/>
           </a:bodyPr>
           <a:lstStyle/>
@@ -6742,7 +6484,7 @@
                 </a:solidFill>
                 <a:latin typeface="Roboto"/>
               </a:rPr>
-              <a:t>Slide 5 of 5</a:t>
+              <a:t>Slide 2 of 2</a:t>
             </a:r>
           </a:p>
         </p:txBody>
@@ -6756,6 +6498,326 @@
 </file>
 
 <file path=ppt/theme/theme1.xml><?xml version="1.0" encoding="utf-8"?>
+<a:theme xmlns:a="http://schemas.openxmlformats.org/drawingml/2006/main" name="Office Theme">
+  <a:themeElements>
+    <a:clrScheme name="Office">
+      <a:dk1>
+        <a:sysClr val="windowText" lastClr="000000"/>
+      </a:dk1>
+      <a:lt1>
+        <a:sysClr val="window" lastClr="FFFFFF"/>
+      </a:lt1>
+      <a:dk2>
+        <a:srgbClr val="25342A"/>
+      </a:dk2>
+      <a:lt2>
+        <a:srgbClr val="F4F7F2"/>
+      </a:lt2>
+      <a:accent1>
+        <a:srgbClr val="2F7A5D"/>
+      </a:accent1>
+      <a:accent2>
+        <a:srgbClr val="0E9F6E"/>
+      </a:accent2>
+      <a:accent3>
+        <a:srgbClr val="7D8790"/>
+      </a:accent3>
+      <a:accent4>
+        <a:srgbClr val="8A6D3B"/>
+      </a:accent4>
+      <a:accent5>
+        <a:srgbClr val="B42318"/>
+      </a:accent5>
+      <a:accent6>
+        <a:srgbClr val="8E9CAB"/>
+      </a:accent6>
+      <a:hlink>
+        <a:srgbClr val="0000FF"/>
+      </a:hlink>
+      <a:folHlink>
+        <a:srgbClr val="800080"/>
+      </a:folHlink>
+    </a:clrScheme>
+    <a:fontScheme name="Office">
+      <a:majorFont>
+        <a:latin typeface="Roboto"/>
+        <a:ea typeface=""/>
+        <a:cs typeface=""/>
+        <a:font script="Jpan" typeface="ＭＳ Ｐゴシック"/>
+        <a:font script="Hang" typeface="맑은 고딕"/>
+        <a:font script="Hans" typeface="宋体"/>
+        <a:font script="Hant" typeface="新細明體"/>
+        <a:font script="Arab" typeface="Times New Roman"/>
+        <a:font script="Hebr" typeface="Times New Roman"/>
+        <a:font script="Thai" typeface="Angsana New"/>
+        <a:font script="Ethi" typeface="Nyala"/>
+        <a:font script="Beng" typeface="Vrinda"/>
+        <a:font script="Gujr" typeface="Shruti"/>
+        <a:font script="Khmr" typeface="MoolBoran"/>
+        <a:font script="Knda" typeface="Tunga"/>
+        <a:font script="Guru" typeface="Raavi"/>
+        <a:font script="Cans" typeface="Euphemia"/>
+        <a:font script="Cher" typeface="Plantagenet Cherokee"/>
+        <a:font script="Yiii" typeface="Microsoft Yi Baiti"/>
+        <a:font script="Tibt" typeface="Microsoft Himalaya"/>
+        <a:font script="Thaa" typeface="MV Boli"/>
+        <a:font script="Deva" typeface="Mangal"/>
+        <a:font script="Telu" typeface="Gautami"/>
+        <a:font script="Taml" typeface="Latha"/>
+        <a:font script="Syrc" typeface="Estrangelo Edessa"/>
+        <a:font script="Orya" typeface="Kalinga"/>
+        <a:font script="Mlym" typeface="Kartika"/>
+        <a:font script="Laoo" typeface="DokChampa"/>
+        <a:font script="Sinh" typeface="Iskoola Pota"/>
+        <a:font script="Mong" typeface="Mongolian Baiti"/>
+        <a:font script="Viet" typeface="Times New Roman"/>
+        <a:font script="Uigh" typeface="Microsoft Uighur"/>
+        <a:font script="Geor" typeface="Sylfaen"/>
+      </a:majorFont>
+      <a:minorFont>
+        <a:latin typeface="Roboto"/>
+        <a:ea typeface=""/>
+        <a:cs typeface=""/>
+        <a:font script="Jpan" typeface="ＭＳ Ｐゴシック"/>
+        <a:font script="Hang" typeface="맑은 고딕"/>
+        <a:font script="Hans" typeface="宋体"/>
+        <a:font script="Hant" typeface="新細明體"/>
+        <a:font script="Arab" typeface="Arial"/>
+        <a:font script="Hebr" typeface="Arial"/>
+        <a:font script="Thai" typeface="Cordia New"/>
+        <a:font script="Ethi" typeface="Nyala"/>
+        <a:font script="Beng" typeface="Vrinda"/>
+        <a:font script="Gujr" typeface="Shruti"/>
+        <a:font script="Khmr" typeface="DaunPenh"/>
+        <a:font script="Knda" typeface="Tunga"/>
+        <a:font script="Guru" typeface="Raavi"/>
+        <a:font script="Cans" typeface="Euphemia"/>
+        <a:font script="Cher" typeface="Plantagenet Cherokee"/>
+        <a:font script="Yiii" typeface="Microsoft Yi Baiti"/>
+        <a:font script="Tibt" typeface="Microsoft Himalaya"/>
+        <a:font script="Thaa" typeface="MV Boli"/>
+        <a:font script="Deva" typeface="Mangal"/>
+        <a:font script="Telu" typeface="Gautami"/>
+        <a:font script="Taml" typeface="Latha"/>
+        <a:font script="Syrc" typeface="Estrangelo Edessa"/>
+        <a:font script="Orya" typeface="Kalinga"/>
+        <a:font script="Mlym" typeface="Kartika"/>
+        <a:font script="Laoo" typeface="DokChampa"/>
+        <a:font script="Sinh" typeface="Iskoola Pota"/>
+        <a:font script="Mong" typeface="Mongolian Baiti"/>
+        <a:font script="Viet" typeface="Arial"/>
+        <a:font script="Uigh" typeface="Microsoft Uighur"/>
+        <a:font script="Geor" typeface="Sylfaen"/>
+      </a:minorFont>
+    </a:fontScheme>
+    <a:fmtScheme name="Office">
+      <a:fillStyleLst>
+        <a:solidFill>
+          <a:schemeClr val="phClr"/>
+        </a:solidFill>
+        <a:gradFill rotWithShape="1">
+          <a:gsLst>
+            <a:gs pos="0">
+              <a:schemeClr val="phClr">
+                <a:tint val="50000"/>
+                <a:satMod val="300000"/>
+              </a:schemeClr>
+            </a:gs>
+            <a:gs pos="35000">
+              <a:schemeClr val="phClr">
+                <a:tint val="37000"/>
+                <a:satMod val="300000"/>
+              </a:schemeClr>
+            </a:gs>
+            <a:gs pos="100000">
+              <a:schemeClr val="phClr">
+                <a:tint val="15000"/>
+                <a:satMod val="350000"/>
+              </a:schemeClr>
+            </a:gs>
+          </a:gsLst>
+          <a:lin ang="16200000" scaled="1"/>
+        </a:gradFill>
+        <a:gradFill rotWithShape="1">
+          <a:gsLst>
+            <a:gs pos="0">
+              <a:schemeClr val="phClr">
+                <a:tint val="100000"/>
+                <a:shade val="100000"/>
+                <a:satMod val="130000"/>
+              </a:schemeClr>
+            </a:gs>
+            <a:gs pos="100000">
+              <a:schemeClr val="phClr">
+                <a:tint val="50000"/>
+                <a:shade val="100000"/>
+                <a:satMod val="350000"/>
+              </a:schemeClr>
+            </a:gs>
+          </a:gsLst>
+          <a:lin ang="16200000" scaled="0"/>
+        </a:gradFill>
+      </a:fillStyleLst>
+      <a:lnStyleLst>
+        <a:ln w="9525" cap="flat" cmpd="sng" algn="ctr">
+          <a:solidFill>
+            <a:schemeClr val="phClr">
+              <a:shade val="95000"/>
+              <a:satMod val="105000"/>
+            </a:schemeClr>
+          </a:solidFill>
+          <a:prstDash val="solid"/>
+        </a:ln>
+        <a:ln w="25400" cap="flat" cmpd="sng" algn="ctr">
+          <a:solidFill>
+            <a:schemeClr val="phClr"/>
+          </a:solidFill>
+          <a:prstDash val="solid"/>
+        </a:ln>
+        <a:ln w="38100" cap="flat" cmpd="sng" algn="ctr">
+          <a:solidFill>
+            <a:schemeClr val="phClr"/>
+          </a:solidFill>
+          <a:prstDash val="solid"/>
+        </a:ln>
+      </a:lnStyleLst>
+      <a:effectStyleLst>
+        <a:effectStyle>
+          <a:effectLst>
+            <a:outerShdw blurRad="40000" dist="20000" dir="5400000" rotWithShape="0">
+              <a:srgbClr val="000000">
+                <a:alpha val="38000"/>
+              </a:srgbClr>
+            </a:outerShdw>
+          </a:effectLst>
+        </a:effectStyle>
+        <a:effectStyle>
+          <a:effectLst>
+            <a:outerShdw blurRad="40000" dist="23000" dir="5400000" rotWithShape="0">
+              <a:srgbClr val="000000">
+                <a:alpha val="35000"/>
+              </a:srgbClr>
+            </a:outerShdw>
+          </a:effectLst>
+        </a:effectStyle>
+        <a:effectStyle>
+          <a:effectLst>
+            <a:outerShdw blurRad="40000" dist="23000" dir="5400000" rotWithShape="0">
+              <a:srgbClr val="000000">
+                <a:alpha val="35000"/>
+              </a:srgbClr>
+            </a:outerShdw>
+          </a:effectLst>
+          <a:scene3d>
+            <a:camera prst="orthographicFront">
+              <a:rot lat="0" lon="0" rev="0"/>
+            </a:camera>
+            <a:lightRig rig="threePt" dir="t">
+              <a:rot lat="0" lon="0" rev="1200000"/>
+            </a:lightRig>
+          </a:scene3d>
+          <a:sp3d>
+            <a:bevelT w="63500" h="25400"/>
+          </a:sp3d>
+        </a:effectStyle>
+      </a:effectStyleLst>
+      <a:bgFillStyleLst>
+        <a:solidFill>
+          <a:schemeClr val="phClr"/>
+        </a:solidFill>
+        <a:gradFill rotWithShape="1">
+          <a:gsLst>
+            <a:gs pos="0">
+              <a:schemeClr val="phClr">
+                <a:tint val="40000"/>
+                <a:satMod val="350000"/>
+              </a:schemeClr>
+            </a:gs>
+            <a:gs pos="40000">
+              <a:schemeClr val="phClr">
+                <a:tint val="45000"/>
+                <a:shade val="99000"/>
+                <a:satMod val="350000"/>
+              </a:schemeClr>
+            </a:gs>
+            <a:gs pos="100000">
+              <a:schemeClr val="phClr">
+                <a:shade val="20000"/>
+                <a:satMod val="255000"/>
+              </a:schemeClr>
+            </a:gs>
+          </a:gsLst>
+          <a:path path="circle">
+            <a:fillToRect l="50000" t="-80000" r="50000" b="180000"/>
+          </a:path>
+        </a:gradFill>
+        <a:gradFill rotWithShape="1">
+          <a:gsLst>
+            <a:gs pos="0">
+              <a:schemeClr val="phClr">
+                <a:tint val="80000"/>
+                <a:satMod val="300000"/>
+              </a:schemeClr>
+            </a:gs>
+            <a:gs pos="100000">
+              <a:schemeClr val="phClr">
+                <a:shade val="30000"/>
+                <a:satMod val="200000"/>
+              </a:schemeClr>
+            </a:gs>
+          </a:gsLst>
+          <a:path path="circle">
+            <a:fillToRect l="50000" t="50000" r="50000" b="50000"/>
+          </a:path>
+        </a:gradFill>
+      </a:bgFillStyleLst>
+    </a:fmtScheme>
+  </a:themeElements>
+  <a:objectDefaults>
+    <a:spDef>
+      <a:spPr/>
+      <a:bodyPr/>
+      <a:lstStyle/>
+      <a:style>
+        <a:lnRef idx="1">
+          <a:schemeClr val="accent1"/>
+        </a:lnRef>
+        <a:fillRef idx="3">
+          <a:schemeClr val="accent1"/>
+        </a:fillRef>
+        <a:effectRef idx="2">
+          <a:schemeClr val="accent1"/>
+        </a:effectRef>
+        <a:fontRef idx="minor">
+          <a:schemeClr val="lt1"/>
+        </a:fontRef>
+      </a:style>
+    </a:spDef>
+    <a:lnDef>
+      <a:spPr/>
+      <a:bodyPr/>
+      <a:lstStyle/>
+      <a:style>
+        <a:lnRef idx="2">
+          <a:schemeClr val="accent1"/>
+        </a:lnRef>
+        <a:fillRef idx="0">
+          <a:schemeClr val="accent1"/>
+        </a:fillRef>
+        <a:effectRef idx="1">
+          <a:schemeClr val="accent1"/>
+        </a:effectRef>
+        <a:fontRef idx="minor">
+          <a:schemeClr val="tx1"/>
+        </a:fontRef>
+      </a:style>
+    </a:lnDef>
+  </a:objectDefaults>
+  <a:extraClrSchemeLst/>
+</a:theme>
+</file>
+
+<file path=ppt/theme/theme2.xml><?xml version="1.0" encoding="utf-8"?>
 <a:theme xmlns:a="http://schemas.openxmlformats.org/drawingml/2006/main" name="Office Theme">
   <a:themeElements>
     <a:clrScheme name="Office">

--- a/media/exports/reports/2026-08/board.pptx
+++ b/media/exports/reports/2026-08/board.pptx
@@ -3988,7 +3988,7 @@
                 </a:solidFill>
                 <a:latin typeface="Roboto"/>
               </a:rPr>
-              <a:t>Data retrieved 2pm, Tue 6 Oct 2026 · Generated 8 Oct 2026, 9:35am · Sample data · Made with Python (python-pptx)</a:t>
+              <a:t>Data retrieved 2pm, Tue 6 Oct 2026 · Generated 8 Oct 2026, 10:34am · Sample data · Made with Python (python-pptx)</a:t>
             </a:r>
           </a:p>
         </p:txBody>
@@ -5189,7 +5189,7 @@
                 </a:solidFill>
                 <a:latin typeface="Roboto"/>
               </a:rPr>
-              <a:t>GRANTS · AGAINST BUDGET: RED WHEN SPENDING IS MORE THAN 1% OVER OR UNDER BUDGET TO DATE, AMBER WITHIN 1%.</a:t>
+              <a:t>GRANTS · AGAINST BUDGET: RED WHEN SPENDING IS MORE THAN 1% OVER BUDGET TO DATE, GREEN MORE THAN 1% UNDER, AMBER WITHIN 1%.</a:t>
             </a:r>
           </a:p>
         </p:txBody>
@@ -5479,7 +5479,7 @@
                       <a:r>
                         <a:rPr sz="1000" b="1">
                           <a:solidFill>
-                            <a:srgbClr val="B42318"/>
+                            <a:srgbClr val="2F7A5D"/>
                           </a:solidFill>
                           <a:latin typeface="Roboto"/>
                         </a:rPr>
@@ -5971,7 +5971,7 @@
                       <a:r>
                         <a:rPr sz="1000" b="1">
                           <a:solidFill>
-                            <a:srgbClr val="B42318"/>
+                            <a:srgbClr val="2F7A5D"/>
                           </a:solidFill>
                           <a:latin typeface="Roboto"/>
                         </a:rPr>
@@ -6299,7 +6299,7 @@
                       <a:r>
                         <a:rPr sz="1000" b="1">
                           <a:solidFill>
-                            <a:srgbClr val="B42318"/>
+                            <a:srgbClr val="2F7A5D"/>
                           </a:solidFill>
                           <a:latin typeface="Roboto"/>
                         </a:rPr>
@@ -6445,7 +6445,7 @@
                 </a:solidFill>
                 <a:latin typeface="Roboto"/>
               </a:rPr>
-              <a:t>Data retrieved 2pm, Tue 6 Oct 2026 · Generated 8 Oct 2026, 9:35am · Sample data · Made with Python (python-pptx)</a:t>
+              <a:t>Data retrieved 2pm, Tue 6 Oct 2026 · Generated 8 Oct 2026, 10:34am · Sample data · Made with Python (python-pptx)</a:t>
             </a:r>
           </a:p>
         </p:txBody>

--- a/media/exports/reports/2026-08/board.pptx
+++ b/media/exports/reports/2026-08/board.pptx
@@ -573,7 +573,7 @@
           <a:lstStyle/>
           <a:p>
             <a:r>
-              <a:t>What does the board need to see?. Surplus, August: ($23,750); Surplus (deficit), year to date: ($49,170); Unrestricted cash runway: 2.2 months; Cost to raise a dollar, August: 13¢.</a:t>
+              <a:t>What does the board need to see?. Surplus, August: ($23,750); Surplus (deficit), year to date: ($49,170); Unrestricted cash runway: 1.9 months; Cost to raise a dollar, August: 13¢.</a:t>
             </a:r>
           </a:p>
         </p:txBody>
@@ -3988,7 +3988,7 @@
                 </a:solidFill>
                 <a:latin typeface="Roboto"/>
               </a:rPr>
-              <a:t>Data retrieved 2pm, Tue 6 Oct 2026 · Generated 8 Oct 2026, 10:34am · Sample data · Made with Python (python-pptx)</a:t>
+              <a:t>Data retrieved 2pm, Tue 6 Oct 2026 · Generated 9 Oct 2026, 8:56am · Sample data · Made with Python (python-pptx)</a:t>
             </a:r>
           </a:p>
         </p:txBody>
@@ -4627,7 +4627,7 @@
                 </a:solidFill>
                 <a:latin typeface="Roboto"/>
               </a:rPr>
-              <a:t>2.2 months</a:t>
+              <a:t>1.9 months</a:t>
             </a:r>
           </a:p>
         </p:txBody>
@@ -4959,7 +4959,7 @@
                 </a:solidFill>
                 <a:latin typeface="Roboto"/>
               </a:rPr>
-              <a:t>• Unrestricted cash covers 2.2 months of spending, against a 3.0 months reserves target.</a:t>
+              <a:t>• Unrestricted cash covers 1.9 months of spending, against a 3.0 months reserves target.</a:t>
             </a:r>
           </a:p>
           <a:p>
@@ -4975,7 +4975,7 @@
                 </a:solidFill>
                 <a:latin typeface="Roboto"/>
               </a:rPr>
-              <a:t>• 1 grant ends within 6 months with $133,500 still to spend. Housing support: $133,500 left in 4 months ($33,375 a month needed, against $30,500 spent in August).</a:t>
+              <a:t>• 2 grants end within 6 months with $151,500 still to spend. Housing support: $133,500 left in 4 months ($33,375 a month needed, against $30,500 spent in August).</a:t>
             </a:r>
           </a:p>
           <a:p>
@@ -6139,7 +6139,7 @@
                           </a:solidFill>
                           <a:latin typeface="Roboto"/>
                         </a:rPr>
-                        <a:t>101.2%</a:t>
+                        <a:t>101.3%</a:t>
                       </a:r>
                     </a:p>
                   </a:txBody>
@@ -6303,7 +6303,7 @@
                           </a:solidFill>
                           <a:latin typeface="Roboto"/>
                         </a:rPr>
-                        <a:t>96.2%</a:t>
+                        <a:t>96.3%</a:t>
                       </a:r>
                     </a:p>
                   </a:txBody>
@@ -6445,7 +6445,7 @@
                 </a:solidFill>
                 <a:latin typeface="Roboto"/>
               </a:rPr>
-              <a:t>Data retrieved 2pm, Tue 6 Oct 2026 · Generated 8 Oct 2026, 10:34am · Sample data · Made with Python (python-pptx)</a:t>
+              <a:t>Data retrieved 2pm, Tue 6 Oct 2026 · Generated 9 Oct 2026, 8:56am · Sample data · Made with Python (python-pptx)</a:t>
             </a:r>
           </a:p>
         </p:txBody>

--- a/media/exports/reports/2026-08/board.pptx
+++ b/media/exports/reports/2026-08/board.pptx
@@ -503,7 +503,7 @@
           <a:lstStyle/>
           <a:p>
             <a:r>
-              <a:t>What does the board need to see?. Sample Community Services Ltd. Period: August 2026. A one-page board summary for August 2026: the result, the money, the risks, and the decisions to make. The full statements are in the downloads.</a:t>
+              <a:t>What does the board need to see?. Sample Community Services Ltd. Period: August 2026. In short: A ($23,750) deficit in August, 1.9 months of runway, and 2 grants ending within 6 months. A one-page board summary for August 2026: the result, the money, the risks, and the decisions to make. The full statements are in the downloads.</a:t>
             </a:r>
           </a:p>
         </p:txBody>
@@ -3798,7 +3798,7 @@
         <p:spPr>
           <a:xfrm>
             <a:off x="457200" y="3703320"/>
-            <a:ext cx="11277295" cy="535940"/>
+            <a:ext cx="11277295" cy="758190"/>
           </a:xfrm>
           <a:prstGeom prst="rect">
             <a:avLst/>
@@ -3823,7 +3823,7 @@
                 </a:solidFill>
                 <a:latin typeface="Roboto"/>
               </a:rPr>
-              <a:t>Period: August 2026. A one-page board summary for August 2026: the result, the money, the risks, and the decisions to make. The full statements are in the downloads.</a:t>
+              <a:t>Period: August 2026. In short: A ($23,750) deficit in August, 1.9 months of runway, and 2 grants ending within 6 months. A one-page board summary for August 2026: the result, the money, the risks, and the decisions to make. The full statements are in the downloads.</a:t>
             </a:r>
           </a:p>
         </p:txBody>
@@ -3836,7 +3836,7 @@
         </p:nvSpPr>
         <p:spPr>
           <a:xfrm>
-            <a:off x="457200" y="4330700"/>
+            <a:off x="457200" y="4552950"/>
             <a:ext cx="11277295" cy="1097280"/>
           </a:xfrm>
           <a:prstGeom prst="rect">
@@ -3988,7 +3988,7 @@
                 </a:solidFill>
                 <a:latin typeface="Roboto"/>
               </a:rPr>
-              <a:t>Data retrieved 2pm, Tue 6 Oct 2026 · Generated 9 Oct 2026, 8:56am · Sample data · Made with Python (python-pptx)</a:t>
+              <a:t>Data retrieved 2pm, Tue 6 Oct 2026 · Generated 10 Oct 2026, 9:55pm · Sample data · Made with Python (python-pptx)</a:t>
             </a:r>
           </a:p>
         </p:txBody>
@@ -6445,7 +6445,7 @@
                 </a:solidFill>
                 <a:latin typeface="Roboto"/>
               </a:rPr>
-              <a:t>Data retrieved 2pm, Tue 6 Oct 2026 · Generated 9 Oct 2026, 8:56am · Sample data · Made with Python (python-pptx)</a:t>
+              <a:t>Data retrieved 2pm, Tue 6 Oct 2026 · Generated 10 Oct 2026, 9:55pm · Sample data · Made with Python (python-pptx)</a:t>
             </a:r>
           </a:p>
         </p:txBody>
